--- a/examples/consulting-ai-transformation/run/slides/s04-delivery-roadmap/deliverables/slide.pptx
+++ b/examples/consulting-ai-transformation/run/slides/s04-delivery-roadmap/deliverables/slide.pptx
@@ -505,7 +505,8 @@
               <a:t>Each pilot engagement supplies one research task. Twenty paired tasks correspond to twenty engagements.
 The practice lead and CFO release scale funding only after the evidence gates are reviewed. Critical data exceptions stop expansion.
 [SlidePoise sources]
-Generated target visual: /Users/henry/Codes/AI_slide_drafting/output/showcase-revisions/consulting-v3-authoring/slides/s04-delivery-roadmap/work/accepted-slide.png</a:t>
+Generated target visual: /private/tmp/.slidepoise-rebuild-h51errnw/slides/s04-delivery-roadmap/work/accepted-slide.png
+Canonical asset remix-flag-line: /Users/henry/Codes/AI_slide_drafting/examples/consulting-ai-transformation/run/work/icon-cache/flag/remix-flag-line.svg</a:t>
             </a:r>
             <a:endParaRPr lang="en-US" dirty="0"/>
           </a:p>
@@ -1219,20 +1220,20 @@
       </p:grpSpPr>
       <p:sp>
         <p:nvSpPr>
-          <p:cNvPr id="2" name="introduction-rule"/>
+          <p:cNvPr id="2" name="dependency-divider"/>
           <p:cNvSpPr/>
           <p:nvPr/>
         </p:nvSpPr>
         <p:spPr>
           <a:xfrm>
-            <a:off x="304800" y="1454150"/>
-            <a:ext cx="11582400" cy="12700"/>
+            <a:off x="8413750" y="4318000"/>
+            <a:ext cx="6350" cy="1193800"/>
           </a:xfrm>
           <a:prstGeom prst="rect">
             <a:avLst/>
           </a:prstGeom>
           <a:solidFill>
-            <a:srgbClr val="AAAAAA"/>
+            <a:srgbClr val="B7BCC2"/>
           </a:solidFill>
           <a:ln w="12700">
             <a:solidFill>
@@ -1246,44 +1247,20 @@
       </p:sp>
       <p:sp>
         <p:nvSpPr>
-          <p:cNvPr id="3" name="gate-1-field"/>
+          <p:cNvPr id="3" name="dependency-line"/>
           <p:cNvSpPr/>
           <p:nvPr/>
         </p:nvSpPr>
         <p:spPr>
           <a:xfrm>
-            <a:off x="8337550" y="2019300"/>
-            <a:ext cx="869950" cy="1511300"/>
+            <a:off x="8890000" y="4692650"/>
+            <a:ext cx="25400" cy="635000"/>
           </a:xfrm>
-          <a:custGeom>
+          <a:prstGeom prst="rect">
             <a:avLst/>
-            <a:gdLst/>
-            <a:ahLst/>
-            <a:cxnLst/>
-            <a:rect l="l" t="t" r="r" b="b"/>
-            <a:pathLst>
-              <a:path w="869950" h="1511300">
-                <a:moveTo>
-                  <a:pt x="0" y="0"/>
-                </a:moveTo>
-                <a:lnTo>
-                  <a:pt x="711200" y="0"/>
-                </a:lnTo>
-                <a:lnTo>
-                  <a:pt x="869950" y="63500"/>
-                </a:lnTo>
-                <a:lnTo>
-                  <a:pt x="869950" y="1511300"/>
-                </a:lnTo>
-                <a:lnTo>
-                  <a:pt x="0" y="1511300"/>
-                </a:lnTo>
-                <a:close/>
-              </a:path>
-            </a:pathLst>
-          </a:custGeom>
+          </a:prstGeom>
           <a:solidFill>
-            <a:srgbClr val="FFF5ED"/>
+            <a:srgbClr val="FD5108"/>
           </a:solidFill>
           <a:ln w="12700">
             <a:solidFill>
@@ -1297,248 +1274,14 @@
       </p:sp>
       <p:sp>
         <p:nvSpPr>
-          <p:cNvPr id="4" name="gate-2-field"/>
+          <p:cNvPr id="4" name="decision-band"/>
           <p:cNvSpPr/>
           <p:nvPr/>
         </p:nvSpPr>
         <p:spPr>
           <a:xfrm>
-            <a:off x="9232900" y="2019300"/>
-            <a:ext cx="869950" cy="1511300"/>
-          </a:xfrm>
-          <a:custGeom>
-            <a:avLst/>
-            <a:gdLst/>
-            <a:ahLst/>
-            <a:cxnLst/>
-            <a:rect l="l" t="t" r="r" b="b"/>
-            <a:pathLst>
-              <a:path w="869950" h="1511300">
-                <a:moveTo>
-                  <a:pt x="0" y="0"/>
-                </a:moveTo>
-                <a:lnTo>
-                  <a:pt x="711200" y="0"/>
-                </a:lnTo>
-                <a:lnTo>
-                  <a:pt x="869950" y="63500"/>
-                </a:lnTo>
-                <a:lnTo>
-                  <a:pt x="869950" y="1511300"/>
-                </a:lnTo>
-                <a:lnTo>
-                  <a:pt x="0" y="1511300"/>
-                </a:lnTo>
-                <a:close/>
-              </a:path>
-            </a:pathLst>
-          </a:custGeom>
-          <a:solidFill>
-            <a:srgbClr val="FFF5ED"/>
-          </a:solidFill>
-          <a:ln w="12700">
-            <a:solidFill>
-              <a:srgbClr val="FFFFFF">
-                <a:alpha val="0"/>
-              </a:srgbClr>
-            </a:solidFill>
-            <a:prstDash val="solid"/>
-          </a:ln>
-        </p:spPr>
-      </p:sp>
-      <p:sp>
-        <p:nvSpPr>
-          <p:cNvPr id="5" name="gate-3-field"/>
-          <p:cNvSpPr/>
-          <p:nvPr/>
-        </p:nvSpPr>
-        <p:spPr>
-          <a:xfrm>
-            <a:off x="10134600" y="2019300"/>
-            <a:ext cx="869950" cy="1511300"/>
-          </a:xfrm>
-          <a:custGeom>
-            <a:avLst/>
-            <a:gdLst/>
-            <a:ahLst/>
-            <a:cxnLst/>
-            <a:rect l="l" t="t" r="r" b="b"/>
-            <a:pathLst>
-              <a:path w="869950" h="1511300">
-                <a:moveTo>
-                  <a:pt x="0" y="0"/>
-                </a:moveTo>
-                <a:lnTo>
-                  <a:pt x="711200" y="0"/>
-                </a:lnTo>
-                <a:lnTo>
-                  <a:pt x="869950" y="63500"/>
-                </a:lnTo>
-                <a:lnTo>
-                  <a:pt x="869950" y="1511300"/>
-                </a:lnTo>
-                <a:lnTo>
-                  <a:pt x="0" y="1511300"/>
-                </a:lnTo>
-                <a:close/>
-              </a:path>
-            </a:pathLst>
-          </a:custGeom>
-          <a:solidFill>
-            <a:srgbClr val="FFF5ED"/>
-          </a:solidFill>
-          <a:ln w="12700">
-            <a:solidFill>
-              <a:srgbClr val="FFFFFF">
-                <a:alpha val="0"/>
-              </a:srgbClr>
-            </a:solidFill>
-            <a:prstDash val="solid"/>
-          </a:ln>
-        </p:spPr>
-      </p:sp>
-      <p:sp>
-        <p:nvSpPr>
-          <p:cNvPr id="6" name="gate-4-field"/>
-          <p:cNvSpPr/>
-          <p:nvPr/>
-        </p:nvSpPr>
-        <p:spPr>
-          <a:xfrm>
-            <a:off x="11049000" y="2019300"/>
-            <a:ext cx="869950" cy="1511300"/>
-          </a:xfrm>
-          <a:custGeom>
-            <a:avLst/>
-            <a:gdLst/>
-            <a:ahLst/>
-            <a:cxnLst/>
-            <a:rect l="l" t="t" r="r" b="b"/>
-            <a:pathLst>
-              <a:path w="869950" h="1511300">
-                <a:moveTo>
-                  <a:pt x="0" y="0"/>
-                </a:moveTo>
-                <a:lnTo>
-                  <a:pt x="711200" y="0"/>
-                </a:lnTo>
-                <a:lnTo>
-                  <a:pt x="869950" y="63500"/>
-                </a:lnTo>
-                <a:lnTo>
-                  <a:pt x="869950" y="1511300"/>
-                </a:lnTo>
-                <a:lnTo>
-                  <a:pt x="0" y="1511300"/>
-                </a:lnTo>
-                <a:close/>
-              </a:path>
-            </a:pathLst>
-          </a:custGeom>
-          <a:solidFill>
-            <a:srgbClr val="FFF5ED"/>
-          </a:solidFill>
-          <a:ln w="12700">
-            <a:solidFill>
-              <a:srgbClr val="FFFFFF">
-                <a:alpha val="0"/>
-              </a:srgbClr>
-            </a:solidFill>
-            <a:prstDash val="solid"/>
-          </a:ln>
-        </p:spPr>
-      </p:sp>
-      <p:sp>
-        <p:nvSpPr>
-          <p:cNvPr id="7" name="gates-bottom-rule"/>
-          <p:cNvSpPr/>
-          <p:nvPr/>
-        </p:nvSpPr>
-        <p:spPr>
-          <a:xfrm>
-            <a:off x="8255000" y="3644900"/>
-            <a:ext cx="3721100" cy="6350"/>
-          </a:xfrm>
-          <a:prstGeom prst="rect">
-            <a:avLst/>
-          </a:prstGeom>
-          <a:solidFill>
-            <a:srgbClr val="B5B5B5"/>
-          </a:solidFill>
-          <a:ln w="12700">
-            <a:solidFill>
-              <a:srgbClr val="FFFFFF">
-                <a:alpha val="0"/>
-              </a:srgbClr>
-            </a:solidFill>
-            <a:prstDash val="solid"/>
-          </a:ln>
-        </p:spPr>
-      </p:sp>
-      <p:sp>
-        <p:nvSpPr>
-          <p:cNvPr id="8" name="dependency-1-rule"/>
-          <p:cNvSpPr/>
-          <p:nvPr/>
-        </p:nvSpPr>
-        <p:spPr>
-          <a:xfrm>
-            <a:off x="8331200" y="4419600"/>
-            <a:ext cx="3524250" cy="6350"/>
-          </a:xfrm>
-          <a:prstGeom prst="rect">
-            <a:avLst/>
-          </a:prstGeom>
-          <a:solidFill>
-            <a:srgbClr val="B5B5B5"/>
-          </a:solidFill>
-          <a:ln w="12700">
-            <a:solidFill>
-              <a:srgbClr val="FFFFFF">
-                <a:alpha val="0"/>
-              </a:srgbClr>
-            </a:solidFill>
-            <a:prstDash val="solid"/>
-          </a:ln>
-        </p:spPr>
-      </p:sp>
-      <p:sp>
-        <p:nvSpPr>
-          <p:cNvPr id="9" name="dependency-2-rule"/>
-          <p:cNvSpPr/>
-          <p:nvPr/>
-        </p:nvSpPr>
-        <p:spPr>
-          <a:xfrm>
-            <a:off x="8331200" y="4845050"/>
-            <a:ext cx="3524250" cy="6350"/>
-          </a:xfrm>
-          <a:prstGeom prst="rect">
-            <a:avLst/>
-          </a:prstGeom>
-          <a:solidFill>
-            <a:srgbClr val="B5B5B5"/>
-          </a:solidFill>
-          <a:ln w="12700">
-            <a:solidFill>
-              <a:srgbClr val="FFFFFF">
-                <a:alpha val="0"/>
-              </a:srgbClr>
-            </a:solidFill>
-            <a:prstDash val="solid"/>
-          </a:ln>
-        </p:spPr>
-      </p:sp>
-      <p:sp>
-        <p:nvSpPr>
-          <p:cNvPr id="10" name="decision-band"/>
-          <p:cNvSpPr/>
-          <p:nvPr/>
-        </p:nvSpPr>
-        <p:spPr>
-          <a:xfrm>
-            <a:off x="304800" y="5441950"/>
-            <a:ext cx="11582400" cy="850900"/>
+            <a:off x="292100" y="5708650"/>
+            <a:ext cx="11607800" cy="590550"/>
           </a:xfrm>
           <a:prstGeom prst="rect">
             <a:avLst/>
@@ -1558,14 +1301,14 @@
       </p:sp>
       <p:sp>
         <p:nvSpPr>
-          <p:cNvPr id="11" name="gate-timeline"/>
+          <p:cNvPr id="5" name="decision-accent"/>
           <p:cNvSpPr/>
           <p:nvPr/>
         </p:nvSpPr>
         <p:spPr>
           <a:xfrm>
-            <a:off x="8743950" y="1962150"/>
-            <a:ext cx="2762250" cy="12700"/>
+            <a:off x="292100" y="5708650"/>
+            <a:ext cx="50800" cy="590550"/>
           </a:xfrm>
           <a:prstGeom prst="rect">
             <a:avLst/>
@@ -1585,16 +1328,16 @@
       </p:sp>
       <p:sp>
         <p:nvSpPr>
-          <p:cNvPr id="12" name="gate-1-rule"/>
+          <p:cNvPr id="6" name="dependency-node-1"/>
           <p:cNvSpPr/>
           <p:nvPr/>
         </p:nvSpPr>
         <p:spPr>
           <a:xfrm>
-            <a:off x="8489950" y="2711450"/>
-            <a:ext cx="558800" cy="6350"/>
+            <a:off x="8832850" y="4635500"/>
+            <a:ext cx="139700" cy="139700"/>
           </a:xfrm>
-          <a:prstGeom prst="rect">
+          <a:prstGeom prst="ellipse">
             <a:avLst/>
           </a:prstGeom>
           <a:solidFill>
@@ -1612,16 +1355,16 @@
       </p:sp>
       <p:sp>
         <p:nvSpPr>
-          <p:cNvPr id="13" name="gate-2-rule"/>
+          <p:cNvPr id="7" name="dependency-node-2"/>
           <p:cNvSpPr/>
           <p:nvPr/>
         </p:nvSpPr>
         <p:spPr>
           <a:xfrm>
-            <a:off x="9385300" y="2711450"/>
-            <a:ext cx="558800" cy="6350"/>
+            <a:off x="8832850" y="4953000"/>
+            <a:ext cx="139700" cy="139700"/>
           </a:xfrm>
-          <a:prstGeom prst="rect">
+          <a:prstGeom prst="ellipse">
             <a:avLst/>
           </a:prstGeom>
           <a:solidFill>
@@ -1639,16 +1382,16 @@
       </p:sp>
       <p:sp>
         <p:nvSpPr>
-          <p:cNvPr id="14" name="gate-3-rule"/>
+          <p:cNvPr id="8" name="dependency-node-3"/>
           <p:cNvSpPr/>
           <p:nvPr/>
         </p:nvSpPr>
         <p:spPr>
           <a:xfrm>
-            <a:off x="10287000" y="2711450"/>
-            <a:ext cx="558800" cy="6350"/>
+            <a:off x="8832850" y="5270500"/>
+            <a:ext cx="139700" cy="139700"/>
           </a:xfrm>
-          <a:prstGeom prst="rect">
+          <a:prstGeom prst="ellipse">
             <a:avLst/>
           </a:prstGeom>
           <a:solidFill>
@@ -1664,138 +1407,9 @@
           </a:ln>
         </p:spPr>
       </p:sp>
-      <p:sp>
-        <p:nvSpPr>
-          <p:cNvPr id="15" name="gate-4-rule"/>
-          <p:cNvSpPr/>
-          <p:nvPr/>
-        </p:nvSpPr>
-        <p:spPr>
-          <a:xfrm>
-            <a:off x="11201400" y="2711450"/>
-            <a:ext cx="558800" cy="6350"/>
-          </a:xfrm>
-          <a:prstGeom prst="rect">
-            <a:avLst/>
-          </a:prstGeom>
-          <a:solidFill>
-            <a:srgbClr val="FD5108"/>
-          </a:solidFill>
-          <a:ln w="12700">
-            <a:solidFill>
-              <a:srgbClr val="FFFFFF">
-                <a:alpha val="0"/>
-              </a:srgbClr>
-            </a:solidFill>
-            <a:prstDash val="solid"/>
-          </a:ln>
-        </p:spPr>
-      </p:sp>
-      <p:sp>
-        <p:nvSpPr>
-          <p:cNvPr id="16" name="decision-accent"/>
-          <p:cNvSpPr/>
-          <p:nvPr/>
-        </p:nvSpPr>
-        <p:spPr>
-          <a:xfrm>
-            <a:off x="304800" y="5441950"/>
-            <a:ext cx="50800" cy="850900"/>
-          </a:xfrm>
-          <a:prstGeom prst="rect">
-            <a:avLst/>
-          </a:prstGeom>
-          <a:solidFill>
-            <a:srgbClr val="FD5108"/>
-          </a:solidFill>
-          <a:ln w="12700">
-            <a:solidFill>
-              <a:srgbClr val="FFFFFF">
-                <a:alpha val="0"/>
-              </a:srgbClr>
-            </a:solidFill>
-            <a:prstDash val="solid"/>
-          </a:ln>
-        </p:spPr>
-      </p:sp>
-      <p:sp>
-        <p:nvSpPr>
-          <p:cNvPr id="17" name="dependency-1-circle"/>
-          <p:cNvSpPr/>
-          <p:nvPr/>
-        </p:nvSpPr>
-        <p:spPr>
-          <a:xfrm>
-            <a:off x="8432800" y="4089400"/>
-            <a:ext cx="266700" cy="266700"/>
-          </a:xfrm>
-          <a:prstGeom prst="ellipse">
-            <a:avLst/>
-          </a:prstGeom>
-          <a:solidFill>
-            <a:srgbClr val="FFFFFF"/>
-          </a:solidFill>
-          <a:ln w="9525">
-            <a:solidFill>
-              <a:srgbClr val="FD5108"/>
-            </a:solidFill>
-            <a:prstDash val="solid"/>
-          </a:ln>
-        </p:spPr>
-      </p:sp>
-      <p:sp>
-        <p:nvSpPr>
-          <p:cNvPr id="18" name="dependency-2-circle"/>
-          <p:cNvSpPr/>
-          <p:nvPr/>
-        </p:nvSpPr>
-        <p:spPr>
-          <a:xfrm>
-            <a:off x="8432800" y="4514850"/>
-            <a:ext cx="266700" cy="266700"/>
-          </a:xfrm>
-          <a:prstGeom prst="ellipse">
-            <a:avLst/>
-          </a:prstGeom>
-          <a:solidFill>
-            <a:srgbClr val="FFFFFF"/>
-          </a:solidFill>
-          <a:ln w="9525">
-            <a:solidFill>
-              <a:srgbClr val="FD5108"/>
-            </a:solidFill>
-            <a:prstDash val="solid"/>
-          </a:ln>
-        </p:spPr>
-      </p:sp>
-      <p:sp>
-        <p:nvSpPr>
-          <p:cNvPr id="19" name="dependency-3-circle"/>
-          <p:cNvSpPr/>
-          <p:nvPr/>
-        </p:nvSpPr>
-        <p:spPr>
-          <a:xfrm>
-            <a:off x="8432800" y="4940300"/>
-            <a:ext cx="266700" cy="266700"/>
-          </a:xfrm>
-          <a:prstGeom prst="ellipse">
-            <a:avLst/>
-          </a:prstGeom>
-          <a:solidFill>
-            <a:srgbClr val="FFFFFF"/>
-          </a:solidFill>
-          <a:ln w="9525">
-            <a:solidFill>
-              <a:srgbClr val="FD5108"/>
-            </a:solidFill>
-            <a:prstDash val="solid"/>
-          </a:ln>
-        </p:spPr>
-      </p:sp>
       <p:graphicFrame>
         <p:nvGraphicFramePr>
-          <p:cNvPr id="20" name="delivery-matrix"/>
+          <p:cNvPr id="9" name="roadmap-matrix"/>
           <p:cNvGraphicFramePr>
             <a:graphicFrameLocks noGrp="1"/>
           </p:cNvGraphicFramePr>
@@ -1808,21 +1422,21 @@
           </p:nvPr>
         </p:nvGraphicFramePr>
         <p:xfrm>
-          <a:off x="317500" y="1593850"/>
-          <a:ext cx="7766050" cy="3587750"/>
+          <a:off x="273050" y="1460500"/>
+          <a:ext cx="11620500" cy="2743200"/>
         </p:xfrm>
         <a:graphic>
           <a:graphicData uri="http://schemas.openxmlformats.org/drawingml/2006/table">
             <a:tbl>
               <a:tblPr/>
               <a:tblGrid>
-                <a:gridCol w="1739900"/>
-                <a:gridCol w="1581150"/>
-                <a:gridCol w="1479550"/>
-                <a:gridCol w="1435100"/>
-                <a:gridCol w="1530350"/>
+                <a:gridCol w="2254250"/>
+                <a:gridCol w="2336800"/>
+                <a:gridCol w="2336800"/>
+                <a:gridCol w="2336800"/>
+                <a:gridCol w="2355850"/>
               </a:tblGrid>
-              <a:tr h="603250">
+              <a:tr h="508000">
                 <a:tc>
                   <a:txBody>
                     <a:bodyPr>
@@ -1830,14 +1444,11 @@
                     </a:bodyPr>
                     <a:lstStyle/>
                     <a:p>
-                      <a:pPr algn="ctr" indent="0" marL="0">
-                        <a:lnSpc>
-                          <a:spcPct val="100000"/>
-                        </a:lnSpc>
+                      <a:pPr algn="l" indent="0" marL="0">
                         <a:buNone/>
                       </a:pPr>
                       <a:r>
-                        <a:rPr lang="en-US" sz="1200" b="1" dirty="0">
+                        <a:rPr lang="en-US" sz="1000" b="1" dirty="0">
                           <a:solidFill>
                             <a:srgbClr val="FFFFFF"/>
                           </a:solidFill>
@@ -1847,17 +1458,17 @@
                         </a:rPr>
                         <a:t>WORKSTREAM / OWNER</a:t>
                       </a:r>
-                      <a:endParaRPr lang="en-US" sz="1200" dirty="0">
+                      <a:endParaRPr lang="en-US" sz="1000" dirty="0">
                         <a:latin typeface="Arial" charset="0"/>
                         <a:ea typeface="Arial" charset="0"/>
                         <a:cs typeface="Arial" charset="0"/>
                       </a:endParaRPr>
                     </a:p>
                   </a:txBody>
-                  <a:tcPr marL="63500" marR="63500" marT="38100" marB="38100" anchor="ctr">
+                  <a:tcPr marL="101600" marR="101600" marT="38100" marB="38100" anchor="ctr">
                     <a:lnL w="6350" cap="flat" cmpd="sng" algn="ctr">
                       <a:solidFill>
-                        <a:srgbClr val="B5B5B5"/>
+                        <a:srgbClr val="C6C9CD"/>
                       </a:solidFill>
                       <a:prstDash val="solid"/>
                       <a:round/>
@@ -1866,7 +1477,7 @@
                     </a:lnL>
                     <a:lnR w="6350" cap="flat" cmpd="sng" algn="ctr">
                       <a:solidFill>
-                        <a:srgbClr val="B5B5B5"/>
+                        <a:srgbClr val="C6C9CD"/>
                       </a:solidFill>
                       <a:prstDash val="solid"/>
                       <a:round/>
@@ -1875,7 +1486,7 @@
                     </a:lnR>
                     <a:lnT w="6350" cap="flat" cmpd="sng" algn="ctr">
                       <a:solidFill>
-                        <a:srgbClr val="B5B5B5"/>
+                        <a:srgbClr val="C6C9CD"/>
                       </a:solidFill>
                       <a:prstDash val="solid"/>
                       <a:round/>
@@ -1884,7 +1495,7 @@
                     </a:lnT>
                     <a:lnB w="6350" cap="flat" cmpd="sng" algn="ctr">
                       <a:solidFill>
-                        <a:srgbClr val="B5B5B5"/>
+                        <a:srgbClr val="C6C9CD"/>
                       </a:solidFill>
                       <a:prstDash val="solid"/>
                       <a:round/>
@@ -1904,13 +1515,10 @@
                     <a:lstStyle/>
                     <a:p>
                       <a:pPr algn="ctr" indent="0" marL="0">
-                        <a:lnSpc>
-                          <a:spcPct val="100000"/>
-                        </a:lnSpc>
                         <a:buNone/>
                       </a:pPr>
                       <a:r>
-                        <a:rPr lang="en-US" sz="1200" b="1" dirty="0">
+                        <a:rPr lang="en-US" sz="1000" b="1" dirty="0">
                           <a:solidFill>
                             <a:srgbClr val="FFFFFF"/>
                           </a:solidFill>
@@ -1920,7 +1528,7 @@
                         </a:rPr>
                         <a:t>WEEKS 1–2</a:t>
                       </a:r>
-                      <a:endParaRPr lang="en-US" sz="1200" dirty="0">
+                      <a:endParaRPr lang="en-US" sz="1000" dirty="0">
                         <a:latin typeface="Arial" charset="0"/>
                         <a:ea typeface="Arial" charset="0"/>
                         <a:cs typeface="Arial" charset="0"/>
@@ -1928,13 +1536,10 @@
                     </a:p>
                     <a:p>
                       <a:pPr algn="ctr" indent="0" marL="0">
-                        <a:lnSpc>
-                          <a:spcPct val="100000"/>
-                        </a:lnSpc>
                         <a:buNone/>
                       </a:pPr>
                       <a:r>
-                        <a:rPr lang="en-US" sz="1200" b="1" dirty="0">
+                        <a:rPr lang="en-US" sz="1000" b="1" dirty="0">
                           <a:solidFill>
                             <a:srgbClr val="FFFFFF"/>
                           </a:solidFill>
@@ -1944,17 +1549,17 @@
                         </a:rPr>
                         <a:t>Approve &amp; baseline</a:t>
                       </a:r>
-                      <a:endParaRPr lang="en-US" sz="1200" dirty="0">
+                      <a:endParaRPr lang="en-US" sz="1000" dirty="0">
                         <a:latin typeface="Arial" charset="0"/>
                         <a:ea typeface="Arial" charset="0"/>
                         <a:cs typeface="Arial" charset="0"/>
                       </a:endParaRPr>
                     </a:p>
                   </a:txBody>
-                  <a:tcPr marL="63500" marR="63500" marT="38100" marB="38100" anchor="ctr">
+                  <a:tcPr marL="101600" marR="101600" marT="38100" marB="38100" anchor="ctr">
                     <a:lnL w="6350" cap="flat" cmpd="sng" algn="ctr">
                       <a:solidFill>
-                        <a:srgbClr val="B5B5B5"/>
+                        <a:srgbClr val="C6C9CD"/>
                       </a:solidFill>
                       <a:prstDash val="solid"/>
                       <a:round/>
@@ -1963,7 +1568,7 @@
                     </a:lnL>
                     <a:lnR w="6350" cap="flat" cmpd="sng" algn="ctr">
                       <a:solidFill>
-                        <a:srgbClr val="B5B5B5"/>
+                        <a:srgbClr val="C6C9CD"/>
                       </a:solidFill>
                       <a:prstDash val="solid"/>
                       <a:round/>
@@ -1972,7 +1577,7 @@
                     </a:lnR>
                     <a:lnT w="6350" cap="flat" cmpd="sng" algn="ctr">
                       <a:solidFill>
-                        <a:srgbClr val="B5B5B5"/>
+                        <a:srgbClr val="C6C9CD"/>
                       </a:solidFill>
                       <a:prstDash val="solid"/>
                       <a:round/>
@@ -1981,7 +1586,7 @@
                     </a:lnT>
                     <a:lnB w="6350" cap="flat" cmpd="sng" algn="ctr">
                       <a:solidFill>
-                        <a:srgbClr val="B5B5B5"/>
+                        <a:srgbClr val="C6C9CD"/>
                       </a:solidFill>
                       <a:prstDash val="solid"/>
                       <a:round/>
@@ -2001,13 +1606,10 @@
                     <a:lstStyle/>
                     <a:p>
                       <a:pPr algn="ctr" indent="0" marL="0">
-                        <a:lnSpc>
-                          <a:spcPct val="100000"/>
-                        </a:lnSpc>
                         <a:buNone/>
                       </a:pPr>
                       <a:r>
-                        <a:rPr lang="en-US" sz="1200" b="1" dirty="0">
+                        <a:rPr lang="en-US" sz="1000" b="1" dirty="0">
                           <a:solidFill>
                             <a:srgbClr val="FFFFFF"/>
                           </a:solidFill>
@@ -2017,7 +1619,7 @@
                         </a:rPr>
                         <a:t>WEEKS 3–4</a:t>
                       </a:r>
-                      <a:endParaRPr lang="en-US" sz="1200" dirty="0">
+                      <a:endParaRPr lang="en-US" sz="1000" dirty="0">
                         <a:latin typeface="Arial" charset="0"/>
                         <a:ea typeface="Arial" charset="0"/>
                         <a:cs typeface="Arial" charset="0"/>
@@ -2025,13 +1627,10 @@
                     </a:p>
                     <a:p>
                       <a:pPr algn="ctr" indent="0" marL="0">
-                        <a:lnSpc>
-                          <a:spcPct val="100000"/>
-                        </a:lnSpc>
                         <a:buNone/>
                       </a:pPr>
                       <a:r>
-                        <a:rPr lang="en-US" sz="1200" b="1" dirty="0">
+                        <a:rPr lang="en-US" sz="1000" b="1" dirty="0">
                           <a:solidFill>
                             <a:srgbClr val="FFFFFF"/>
                           </a:solidFill>
@@ -2041,17 +1640,17 @@
                         </a:rPr>
                         <a:t>Build &amp; test</a:t>
                       </a:r>
-                      <a:endParaRPr lang="en-US" sz="1200" dirty="0">
+                      <a:endParaRPr lang="en-US" sz="1000" dirty="0">
                         <a:latin typeface="Arial" charset="0"/>
                         <a:ea typeface="Arial" charset="0"/>
                         <a:cs typeface="Arial" charset="0"/>
                       </a:endParaRPr>
                     </a:p>
                   </a:txBody>
-                  <a:tcPr marL="63500" marR="63500" marT="38100" marB="38100" anchor="ctr">
+                  <a:tcPr marL="101600" marR="101600" marT="38100" marB="38100" anchor="ctr">
                     <a:lnL w="6350" cap="flat" cmpd="sng" algn="ctr">
                       <a:solidFill>
-                        <a:srgbClr val="B5B5B5"/>
+                        <a:srgbClr val="C6C9CD"/>
                       </a:solidFill>
                       <a:prstDash val="solid"/>
                       <a:round/>
@@ -2060,7 +1659,7 @@
                     </a:lnL>
                     <a:lnR w="6350" cap="flat" cmpd="sng" algn="ctr">
                       <a:solidFill>
-                        <a:srgbClr val="B5B5B5"/>
+                        <a:srgbClr val="C6C9CD"/>
                       </a:solidFill>
                       <a:prstDash val="solid"/>
                       <a:round/>
@@ -2069,7 +1668,7 @@
                     </a:lnR>
                     <a:lnT w="6350" cap="flat" cmpd="sng" algn="ctr">
                       <a:solidFill>
-                        <a:srgbClr val="B5B5B5"/>
+                        <a:srgbClr val="C6C9CD"/>
                       </a:solidFill>
                       <a:prstDash val="solid"/>
                       <a:round/>
@@ -2078,7 +1677,7 @@
                     </a:lnT>
                     <a:lnB w="6350" cap="flat" cmpd="sng" algn="ctr">
                       <a:solidFill>
-                        <a:srgbClr val="B5B5B5"/>
+                        <a:srgbClr val="C6C9CD"/>
                       </a:solidFill>
                       <a:prstDash val="solid"/>
                       <a:round/>
@@ -2098,13 +1697,10 @@
                     <a:lstStyle/>
                     <a:p>
                       <a:pPr algn="ctr" indent="0" marL="0">
-                        <a:lnSpc>
-                          <a:spcPct val="100000"/>
-                        </a:lnSpc>
                         <a:buNone/>
                       </a:pPr>
                       <a:r>
-                        <a:rPr lang="en-US" sz="1200" b="1" dirty="0">
+                        <a:rPr lang="en-US" sz="1000" b="1" dirty="0">
                           <a:solidFill>
                             <a:srgbClr val="FFFFFF"/>
                           </a:solidFill>
@@ -2114,7 +1710,7 @@
                         </a:rPr>
                         <a:t>WEEKS 5–8</a:t>
                       </a:r>
-                      <a:endParaRPr lang="en-US" sz="1200" dirty="0">
+                      <a:endParaRPr lang="en-US" sz="1000" dirty="0">
                         <a:latin typeface="Arial" charset="0"/>
                         <a:ea typeface="Arial" charset="0"/>
                         <a:cs typeface="Arial" charset="0"/>
@@ -2122,13 +1718,10 @@
                     </a:p>
                     <a:p>
                       <a:pPr algn="ctr" indent="0" marL="0">
-                        <a:lnSpc>
-                          <a:spcPct val="100000"/>
-                        </a:lnSpc>
                         <a:buNone/>
                       </a:pPr>
                       <a:r>
-                        <a:rPr lang="en-US" sz="1200" b="1" dirty="0">
+                        <a:rPr lang="en-US" sz="1000" b="1" dirty="0">
                           <a:solidFill>
                             <a:srgbClr val="FFFFFF"/>
                           </a:solidFill>
@@ -2138,17 +1731,17 @@
                         </a:rPr>
                         <a:t>Pilot &amp; learn</a:t>
                       </a:r>
-                      <a:endParaRPr lang="en-US" sz="1200" dirty="0">
+                      <a:endParaRPr lang="en-US" sz="1000" dirty="0">
                         <a:latin typeface="Arial" charset="0"/>
                         <a:ea typeface="Arial" charset="0"/>
                         <a:cs typeface="Arial" charset="0"/>
                       </a:endParaRPr>
                     </a:p>
                   </a:txBody>
-                  <a:tcPr marL="63500" marR="63500" marT="38100" marB="38100" anchor="ctr">
+                  <a:tcPr marL="101600" marR="101600" marT="38100" marB="38100" anchor="ctr">
                     <a:lnL w="6350" cap="flat" cmpd="sng" algn="ctr">
                       <a:solidFill>
-                        <a:srgbClr val="B5B5B5"/>
+                        <a:srgbClr val="C6C9CD"/>
                       </a:solidFill>
                       <a:prstDash val="solid"/>
                       <a:round/>
@@ -2157,7 +1750,7 @@
                     </a:lnL>
                     <a:lnR w="6350" cap="flat" cmpd="sng" algn="ctr">
                       <a:solidFill>
-                        <a:srgbClr val="B5B5B5"/>
+                        <a:srgbClr val="C6C9CD"/>
                       </a:solidFill>
                       <a:prstDash val="solid"/>
                       <a:round/>
@@ -2166,7 +1759,7 @@
                     </a:lnR>
                     <a:lnT w="6350" cap="flat" cmpd="sng" algn="ctr">
                       <a:solidFill>
-                        <a:srgbClr val="B5B5B5"/>
+                        <a:srgbClr val="C6C9CD"/>
                       </a:solidFill>
                       <a:prstDash val="solid"/>
                       <a:round/>
@@ -2175,7 +1768,7 @@
                     </a:lnT>
                     <a:lnB w="6350" cap="flat" cmpd="sng" algn="ctr">
                       <a:solidFill>
-                        <a:srgbClr val="B5B5B5"/>
+                        <a:srgbClr val="C6C9CD"/>
                       </a:solidFill>
                       <a:prstDash val="solid"/>
                       <a:round/>
@@ -2195,13 +1788,10 @@
                     <a:lstStyle/>
                     <a:p>
                       <a:pPr algn="ctr" indent="0" marL="0">
-                        <a:lnSpc>
-                          <a:spcPct val="100000"/>
-                        </a:lnSpc>
                         <a:buNone/>
                       </a:pPr>
                       <a:r>
-                        <a:rPr lang="en-US" sz="1200" b="1" dirty="0">
+                        <a:rPr lang="en-US" sz="1000" b="1" dirty="0">
                           <a:solidFill>
                             <a:srgbClr val="FFFFFF"/>
                           </a:solidFill>
@@ -2211,7 +1801,7 @@
                         </a:rPr>
                         <a:t>WEEKS 9–12</a:t>
                       </a:r>
-                      <a:endParaRPr lang="en-US" sz="1200" dirty="0">
+                      <a:endParaRPr lang="en-US" sz="1000" dirty="0">
                         <a:latin typeface="Arial" charset="0"/>
                         <a:ea typeface="Arial" charset="0"/>
                         <a:cs typeface="Arial" charset="0"/>
@@ -2219,13 +1809,10 @@
                     </a:p>
                     <a:p>
                       <a:pPr algn="ctr" indent="0" marL="0">
-                        <a:lnSpc>
-                          <a:spcPct val="100000"/>
-                        </a:lnSpc>
                         <a:buNone/>
                       </a:pPr>
                       <a:r>
-                        <a:rPr lang="en-US" sz="1200" b="1" dirty="0">
+                        <a:rPr lang="en-US" sz="1000" b="1" dirty="0">
                           <a:solidFill>
                             <a:srgbClr val="FFFFFF"/>
                           </a:solidFill>
@@ -2235,17 +1822,17 @@
                         </a:rPr>
                         <a:t>Prove &amp; decide</a:t>
                       </a:r>
-                      <a:endParaRPr lang="en-US" sz="1200" dirty="0">
+                      <a:endParaRPr lang="en-US" sz="1000" dirty="0">
                         <a:latin typeface="Arial" charset="0"/>
                         <a:ea typeface="Arial" charset="0"/>
                         <a:cs typeface="Arial" charset="0"/>
                       </a:endParaRPr>
                     </a:p>
                   </a:txBody>
-                  <a:tcPr marL="63500" marR="63500" marT="38100" marB="38100" anchor="ctr">
+                  <a:tcPr marL="101600" marR="101600" marT="38100" marB="38100" anchor="ctr">
                     <a:lnL w="6350" cap="flat" cmpd="sng" algn="ctr">
                       <a:solidFill>
-                        <a:srgbClr val="B5B5B5"/>
+                        <a:srgbClr val="C6C9CD"/>
                       </a:solidFill>
                       <a:prstDash val="solid"/>
                       <a:round/>
@@ -2254,7 +1841,7 @@
                     </a:lnL>
                     <a:lnR w="6350" cap="flat" cmpd="sng" algn="ctr">
                       <a:solidFill>
-                        <a:srgbClr val="B5B5B5"/>
+                        <a:srgbClr val="C6C9CD"/>
                       </a:solidFill>
                       <a:prstDash val="solid"/>
                       <a:round/>
@@ -2263,7 +1850,7 @@
                     </a:lnR>
                     <a:lnT w="6350" cap="flat" cmpd="sng" algn="ctr">
                       <a:solidFill>
-                        <a:srgbClr val="B5B5B5"/>
+                        <a:srgbClr val="C6C9CD"/>
                       </a:solidFill>
                       <a:prstDash val="solid"/>
                       <a:round/>
@@ -2272,7 +1859,7 @@
                     </a:lnT>
                     <a:lnB w="6350" cap="flat" cmpd="sng" algn="ctr">
                       <a:solidFill>
-                        <a:srgbClr val="B5B5B5"/>
+                        <a:srgbClr val="C6C9CD"/>
                       </a:solidFill>
                       <a:prstDash val="solid"/>
                       <a:round/>
@@ -2285,7 +1872,7 @@
                   </a:tcPr>
                 </a:tc>
               </a:tr>
-              <a:tr h="762000">
+              <a:tr h="558800">
                 <a:tc>
                   <a:txBody>
                     <a:bodyPr>
@@ -2294,13 +1881,10 @@
                     <a:lstStyle/>
                     <a:p>
                       <a:pPr algn="l" indent="0" marL="0">
-                        <a:lnSpc>
-                          <a:spcPct val="100000"/>
-                        </a:lnSpc>
                         <a:buNone/>
                       </a:pPr>
                       <a:r>
-                        <a:rPr lang="en-US" sz="1200" b="1" dirty="0">
+                        <a:rPr lang="en-US" sz="1000" b="1" dirty="0">
                           <a:solidFill>
                             <a:srgbClr val="000000"/>
                           </a:solidFill>
@@ -2310,13 +1894,7 @@
                         </a:rPr>
                         <a:t>Data &amp; access</a:t>
                       </a:r>
-                      <a:pPr algn="l" indent="0" marL="0">
-                        <a:lnSpc>
-                          <a:spcPct val="100000"/>
-                        </a:lnSpc>
-                        <a:buNone/>
-                      </a:pPr>
-                      <a:endParaRPr lang="en-US" sz="1200" dirty="0">
+                      <a:endParaRPr lang="en-US" sz="1000" dirty="0">
                         <a:latin typeface="Arial" charset="0"/>
                         <a:ea typeface="Arial" charset="0"/>
                         <a:cs typeface="Arial" charset="0"/>
@@ -2324,13 +1902,10 @@
                     </a:p>
                     <a:p>
                       <a:pPr algn="l" indent="0" marL="0">
-                        <a:lnSpc>
-                          <a:spcPct val="100000"/>
-                        </a:lnSpc>
                         <a:buNone/>
                       </a:pPr>
                       <a:r>
-                        <a:rPr lang="en-US" sz="1200" dirty="0">
+                        <a:rPr lang="en-US" sz="1000" b="1" dirty="0">
                           <a:solidFill>
                             <a:srgbClr val="000000"/>
                           </a:solidFill>
@@ -2340,17 +1915,17 @@
                         </a:rPr>
                         <a:t>Source steward</a:t>
                       </a:r>
-                      <a:endParaRPr lang="en-US" sz="1200" dirty="0">
+                      <a:endParaRPr lang="en-US" sz="1000" dirty="0">
                         <a:latin typeface="Arial" charset="0"/>
                         <a:ea typeface="Arial" charset="0"/>
                         <a:cs typeface="Arial" charset="0"/>
                       </a:endParaRPr>
                     </a:p>
                   </a:txBody>
-                  <a:tcPr marL="63500" marR="63500" marT="38100" marB="38100" anchor="ctr">
+                  <a:tcPr marL="101600" marR="101600" marT="38100" marB="38100" anchor="ctr">
                     <a:lnL w="6350" cap="flat" cmpd="sng" algn="ctr">
                       <a:solidFill>
-                        <a:srgbClr val="B5B5B5"/>
+                        <a:srgbClr val="C6C9CD"/>
                       </a:solidFill>
                       <a:prstDash val="solid"/>
                       <a:round/>
@@ -2359,7 +1934,7 @@
                     </a:lnL>
                     <a:lnR w="6350" cap="flat" cmpd="sng" algn="ctr">
                       <a:solidFill>
-                        <a:srgbClr val="B5B5B5"/>
+                        <a:srgbClr val="C6C9CD"/>
                       </a:solidFill>
                       <a:prstDash val="solid"/>
                       <a:round/>
@@ -2368,7 +1943,7 @@
                     </a:lnR>
                     <a:lnT w="6350" cap="flat" cmpd="sng" algn="ctr">
                       <a:solidFill>
-                        <a:srgbClr val="B5B5B5"/>
+                        <a:srgbClr val="C6C9CD"/>
                       </a:solidFill>
                       <a:prstDash val="solid"/>
                       <a:round/>
@@ -2377,7 +1952,7 @@
                     </a:lnT>
                     <a:lnB w="6350" cap="flat" cmpd="sng" algn="ctr">
                       <a:solidFill>
-                        <a:srgbClr val="B5B5B5"/>
+                        <a:srgbClr val="C6C9CD"/>
                       </a:solidFill>
                       <a:prstDash val="solid"/>
                       <a:round/>
@@ -2396,14 +1971,11 @@
                     </a:bodyPr>
                     <a:lstStyle/>
                     <a:p>
-                      <a:pPr algn="l" indent="0" marL="0">
-                        <a:lnSpc>
-                          <a:spcPct val="100000"/>
-                        </a:lnSpc>
+                      <a:pPr algn="ctr" indent="0" marL="0">
                         <a:buNone/>
                       </a:pPr>
                       <a:r>
-                        <a:rPr lang="en-US" sz="1200" dirty="0">
+                        <a:rPr lang="en-US" sz="1000" dirty="0">
                           <a:solidFill>
                             <a:srgbClr val="000000"/>
                           </a:solidFill>
@@ -2413,21 +1985,18 @@
                         </a:rPr>
                         <a:t>Approved corpus</a:t>
                       </a:r>
-                      <a:endParaRPr lang="en-US" sz="1200" dirty="0">
+                      <a:endParaRPr lang="en-US" sz="1000" dirty="0">
                         <a:latin typeface="Arial" charset="0"/>
                         <a:ea typeface="Arial" charset="0"/>
                         <a:cs typeface="Arial" charset="0"/>
                       </a:endParaRPr>
                     </a:p>
                     <a:p>
-                      <a:pPr algn="l" indent="0" marL="0">
-                        <a:lnSpc>
-                          <a:spcPct val="100000"/>
-                        </a:lnSpc>
+                      <a:pPr algn="ctr" indent="0" marL="0">
                         <a:buNone/>
                       </a:pPr>
                       <a:r>
-                        <a:rPr lang="en-US" sz="1200" dirty="0">
+                        <a:rPr lang="en-US" sz="1000" dirty="0">
                           <a:solidFill>
                             <a:srgbClr val="000000"/>
                           </a:solidFill>
@@ -2437,17 +2006,17 @@
                         </a:rPr>
                         <a:t>Access register</a:t>
                       </a:r>
-                      <a:endParaRPr lang="en-US" sz="1200" dirty="0">
+                      <a:endParaRPr lang="en-US" sz="1000" dirty="0">
                         <a:latin typeface="Arial" charset="0"/>
                         <a:ea typeface="Arial" charset="0"/>
                         <a:cs typeface="Arial" charset="0"/>
                       </a:endParaRPr>
                     </a:p>
                   </a:txBody>
-                  <a:tcPr marL="63500" marR="63500" marT="38100" marB="38100" anchor="ctr">
+                  <a:tcPr marL="101600" marR="101600" marT="38100" marB="38100" anchor="ctr">
                     <a:lnL w="6350" cap="flat" cmpd="sng" algn="ctr">
                       <a:solidFill>
-                        <a:srgbClr val="B5B5B5"/>
+                        <a:srgbClr val="C6C9CD"/>
                       </a:solidFill>
                       <a:prstDash val="solid"/>
                       <a:round/>
@@ -2456,7 +2025,7 @@
                     </a:lnL>
                     <a:lnR w="6350" cap="flat" cmpd="sng" algn="ctr">
                       <a:solidFill>
-                        <a:srgbClr val="B5B5B5"/>
+                        <a:srgbClr val="C6C9CD"/>
                       </a:solidFill>
                       <a:prstDash val="solid"/>
                       <a:round/>
@@ -2465,7 +2034,7 @@
                     </a:lnR>
                     <a:lnT w="6350" cap="flat" cmpd="sng" algn="ctr">
                       <a:solidFill>
-                        <a:srgbClr val="B5B5B5"/>
+                        <a:srgbClr val="C6C9CD"/>
                       </a:solidFill>
                       <a:prstDash val="solid"/>
                       <a:round/>
@@ -2474,7 +2043,7 @@
                     </a:lnT>
                     <a:lnB w="6350" cap="flat" cmpd="sng" algn="ctr">
                       <a:solidFill>
-                        <a:srgbClr val="B5B5B5"/>
+                        <a:srgbClr val="C6C9CD"/>
                       </a:solidFill>
                       <a:prstDash val="solid"/>
                       <a:round/>
@@ -2493,14 +2062,11 @@
                     </a:bodyPr>
                     <a:lstStyle/>
                     <a:p>
-                      <a:pPr algn="l" indent="0" marL="0">
-                        <a:lnSpc>
-                          <a:spcPct val="100000"/>
-                        </a:lnSpc>
+                      <a:pPr algn="ctr" indent="0" marL="0">
                         <a:buNone/>
                       </a:pPr>
                       <a:r>
-                        <a:rPr lang="en-US" sz="1200" dirty="0">
+                        <a:rPr lang="en-US" sz="1000" dirty="0">
                           <a:solidFill>
                             <a:srgbClr val="000000"/>
                           </a:solidFill>
@@ -2510,21 +2076,18 @@
                         </a:rPr>
                         <a:t>Source refresh</a:t>
                       </a:r>
-                      <a:endParaRPr lang="en-US" sz="1200" dirty="0">
+                      <a:endParaRPr lang="en-US" sz="1000" dirty="0">
                         <a:latin typeface="Arial" charset="0"/>
                         <a:ea typeface="Arial" charset="0"/>
                         <a:cs typeface="Arial" charset="0"/>
                       </a:endParaRPr>
                     </a:p>
                     <a:p>
-                      <a:pPr algn="l" indent="0" marL="0">
-                        <a:lnSpc>
-                          <a:spcPct val="100000"/>
-                        </a:lnSpc>
+                      <a:pPr algn="ctr" indent="0" marL="0">
                         <a:buNone/>
                       </a:pPr>
                       <a:r>
-                        <a:rPr lang="en-US" sz="1200" dirty="0">
+                        <a:rPr lang="en-US" sz="1000" dirty="0">
                           <a:solidFill>
                             <a:srgbClr val="000000"/>
                           </a:solidFill>
@@ -2534,17 +2097,17 @@
                         </a:rPr>
                         <a:t>Named stewards</a:t>
                       </a:r>
-                      <a:endParaRPr lang="en-US" sz="1200" dirty="0">
+                      <a:endParaRPr lang="en-US" sz="1000" dirty="0">
                         <a:latin typeface="Arial" charset="0"/>
                         <a:ea typeface="Arial" charset="0"/>
                         <a:cs typeface="Arial" charset="0"/>
                       </a:endParaRPr>
                     </a:p>
                   </a:txBody>
-                  <a:tcPr marL="63500" marR="63500" marT="38100" marB="38100" anchor="ctr">
+                  <a:tcPr marL="101600" marR="101600" marT="38100" marB="38100" anchor="ctr">
                     <a:lnL w="6350" cap="flat" cmpd="sng" algn="ctr">
                       <a:solidFill>
-                        <a:srgbClr val="B5B5B5"/>
+                        <a:srgbClr val="C6C9CD"/>
                       </a:solidFill>
                       <a:prstDash val="solid"/>
                       <a:round/>
@@ -2553,7 +2116,7 @@
                     </a:lnL>
                     <a:lnR w="6350" cap="flat" cmpd="sng" algn="ctr">
                       <a:solidFill>
-                        <a:srgbClr val="B5B5B5"/>
+                        <a:srgbClr val="C6C9CD"/>
                       </a:solidFill>
                       <a:prstDash val="solid"/>
                       <a:round/>
@@ -2562,7 +2125,7 @@
                     </a:lnR>
                     <a:lnT w="6350" cap="flat" cmpd="sng" algn="ctr">
                       <a:solidFill>
-                        <a:srgbClr val="B5B5B5"/>
+                        <a:srgbClr val="C6C9CD"/>
                       </a:solidFill>
                       <a:prstDash val="solid"/>
                       <a:round/>
@@ -2571,7 +2134,7 @@
                     </a:lnT>
                     <a:lnB w="6350" cap="flat" cmpd="sng" algn="ctr">
                       <a:solidFill>
-                        <a:srgbClr val="B5B5B5"/>
+                        <a:srgbClr val="C6C9CD"/>
                       </a:solidFill>
                       <a:prstDash val="solid"/>
                       <a:round/>
@@ -2590,14 +2153,11 @@
                     </a:bodyPr>
                     <a:lstStyle/>
                     <a:p>
-                      <a:pPr algn="l" indent="0" marL="0">
-                        <a:lnSpc>
-                          <a:spcPct val="100000"/>
-                        </a:lnSpc>
+                      <a:pPr algn="ctr" indent="0" marL="0">
                         <a:buNone/>
                       </a:pPr>
                       <a:r>
-                        <a:rPr lang="en-US" sz="1200" dirty="0">
+                        <a:rPr lang="en-US" sz="1000" dirty="0">
                           <a:solidFill>
                             <a:srgbClr val="000000"/>
                           </a:solidFill>
@@ -2607,21 +2167,18 @@
                         </a:rPr>
                         <a:t>Weekly access and</a:t>
                       </a:r>
-                      <a:endParaRPr lang="en-US" sz="1200" dirty="0">
+                      <a:endParaRPr lang="en-US" sz="1000" dirty="0">
                         <a:latin typeface="Arial" charset="0"/>
                         <a:ea typeface="Arial" charset="0"/>
                         <a:cs typeface="Arial" charset="0"/>
                       </a:endParaRPr>
                     </a:p>
                     <a:p>
-                      <a:pPr algn="l" indent="0" marL="0">
-                        <a:lnSpc>
-                          <a:spcPct val="100000"/>
-                        </a:lnSpc>
+                      <a:pPr algn="ctr" indent="0" marL="0">
                         <a:buNone/>
                       </a:pPr>
                       <a:r>
-                        <a:rPr lang="en-US" sz="1200" dirty="0">
+                        <a:rPr lang="en-US" sz="1000" dirty="0">
                           <a:solidFill>
                             <a:srgbClr val="000000"/>
                           </a:solidFill>
@@ -2631,17 +2188,17 @@
                         </a:rPr>
                         <a:t>freshness checks</a:t>
                       </a:r>
-                      <a:endParaRPr lang="en-US" sz="1200" dirty="0">
+                      <a:endParaRPr lang="en-US" sz="1000" dirty="0">
                         <a:latin typeface="Arial" charset="0"/>
                         <a:ea typeface="Arial" charset="0"/>
                         <a:cs typeface="Arial" charset="0"/>
                       </a:endParaRPr>
                     </a:p>
                   </a:txBody>
-                  <a:tcPr marL="63500" marR="63500" marT="38100" marB="38100" anchor="ctr">
+                  <a:tcPr marL="101600" marR="101600" marT="38100" marB="38100" anchor="ctr">
                     <a:lnL w="6350" cap="flat" cmpd="sng" algn="ctr">
                       <a:solidFill>
-                        <a:srgbClr val="B5B5B5"/>
+                        <a:srgbClr val="C6C9CD"/>
                       </a:solidFill>
                       <a:prstDash val="solid"/>
                       <a:round/>
@@ -2650,7 +2207,7 @@
                     </a:lnL>
                     <a:lnR w="6350" cap="flat" cmpd="sng" algn="ctr">
                       <a:solidFill>
-                        <a:srgbClr val="B5B5B5"/>
+                        <a:srgbClr val="C6C9CD"/>
                       </a:solidFill>
                       <a:prstDash val="solid"/>
                       <a:round/>
@@ -2659,7 +2216,7 @@
                     </a:lnR>
                     <a:lnT w="6350" cap="flat" cmpd="sng" algn="ctr">
                       <a:solidFill>
-                        <a:srgbClr val="B5B5B5"/>
+                        <a:srgbClr val="C6C9CD"/>
                       </a:solidFill>
                       <a:prstDash val="solid"/>
                       <a:round/>
@@ -2668,7 +2225,7 @@
                     </a:lnT>
                     <a:lnB w="6350" cap="flat" cmpd="sng" algn="ctr">
                       <a:solidFill>
-                        <a:srgbClr val="B5B5B5"/>
+                        <a:srgbClr val="C6C9CD"/>
                       </a:solidFill>
                       <a:prstDash val="solid"/>
                       <a:round/>
@@ -2687,14 +2244,11 @@
                     </a:bodyPr>
                     <a:lstStyle/>
                     <a:p>
-                      <a:pPr algn="l" indent="0" marL="0">
-                        <a:lnSpc>
-                          <a:spcPct val="100000"/>
-                        </a:lnSpc>
+                      <a:pPr algn="ctr" indent="0" marL="0">
                         <a:buNone/>
                       </a:pPr>
                       <a:r>
-                        <a:rPr lang="en-US" sz="1200" dirty="0">
+                        <a:rPr lang="en-US" sz="1000" dirty="0">
                           <a:solidFill>
                             <a:srgbClr val="000000"/>
                           </a:solidFill>
@@ -2704,21 +2258,18 @@
                         </a:rPr>
                         <a:t>Audit closeout</a:t>
                       </a:r>
-                      <a:endParaRPr lang="en-US" sz="1200" dirty="0">
+                      <a:endParaRPr lang="en-US" sz="1000" dirty="0">
                         <a:latin typeface="Arial" charset="0"/>
                         <a:ea typeface="Arial" charset="0"/>
                         <a:cs typeface="Arial" charset="0"/>
                       </a:endParaRPr>
                     </a:p>
                     <a:p>
-                      <a:pPr algn="l" indent="0" marL="0">
-                        <a:lnSpc>
-                          <a:spcPct val="100000"/>
-                        </a:lnSpc>
+                      <a:pPr algn="ctr" indent="0" marL="0">
                         <a:buNone/>
                       </a:pPr>
                       <a:r>
-                        <a:rPr lang="en-US" sz="1200" dirty="0">
+                        <a:rPr lang="en-US" sz="1000" dirty="0">
                           <a:solidFill>
                             <a:srgbClr val="000000"/>
                           </a:solidFill>
@@ -2728,17 +2279,17 @@
                         </a:rPr>
                         <a:t>Release inventory</a:t>
                       </a:r>
-                      <a:endParaRPr lang="en-US" sz="1200" dirty="0">
+                      <a:endParaRPr lang="en-US" sz="1000" dirty="0">
                         <a:latin typeface="Arial" charset="0"/>
                         <a:ea typeface="Arial" charset="0"/>
                         <a:cs typeface="Arial" charset="0"/>
                       </a:endParaRPr>
                     </a:p>
                   </a:txBody>
-                  <a:tcPr marL="63500" marR="63500" marT="38100" marB="38100" anchor="ctr">
+                  <a:tcPr marL="101600" marR="101600" marT="38100" marB="38100" anchor="ctr">
                     <a:lnL w="6350" cap="flat" cmpd="sng" algn="ctr">
                       <a:solidFill>
-                        <a:srgbClr val="B5B5B5"/>
+                        <a:srgbClr val="C6C9CD"/>
                       </a:solidFill>
                       <a:prstDash val="solid"/>
                       <a:round/>
@@ -2747,7 +2298,7 @@
                     </a:lnL>
                     <a:lnR w="6350" cap="flat" cmpd="sng" algn="ctr">
                       <a:solidFill>
-                        <a:srgbClr val="B5B5B5"/>
+                        <a:srgbClr val="C6C9CD"/>
                       </a:solidFill>
                       <a:prstDash val="solid"/>
                       <a:round/>
@@ -2756,7 +2307,7 @@
                     </a:lnR>
                     <a:lnT w="6350" cap="flat" cmpd="sng" algn="ctr">
                       <a:solidFill>
-                        <a:srgbClr val="B5B5B5"/>
+                        <a:srgbClr val="C6C9CD"/>
                       </a:solidFill>
                       <a:prstDash val="solid"/>
                       <a:round/>
@@ -2765,7 +2316,7 @@
                     </a:lnT>
                     <a:lnB w="6350" cap="flat" cmpd="sng" algn="ctr">
                       <a:solidFill>
-                        <a:srgbClr val="B5B5B5"/>
+                        <a:srgbClr val="C6C9CD"/>
                       </a:solidFill>
                       <a:prstDash val="solid"/>
                       <a:round/>
@@ -2778,7 +2329,7 @@
                   </a:tcPr>
                 </a:tc>
               </a:tr>
-              <a:tr h="736600">
+              <a:tr h="558800">
                 <a:tc>
                   <a:txBody>
                     <a:bodyPr>
@@ -2787,13 +2338,10 @@
                     <a:lstStyle/>
                     <a:p>
                       <a:pPr algn="l" indent="0" marL="0">
-                        <a:lnSpc>
-                          <a:spcPct val="100000"/>
-                        </a:lnSpc>
                         <a:buNone/>
                       </a:pPr>
                       <a:r>
-                        <a:rPr lang="en-US" sz="1200" b="1" dirty="0">
+                        <a:rPr lang="en-US" sz="1000" b="1" dirty="0">
                           <a:solidFill>
                             <a:srgbClr val="000000"/>
                           </a:solidFill>
@@ -2803,13 +2351,7 @@
                         </a:rPr>
                         <a:t>Workflow &amp; product</a:t>
                       </a:r>
-                      <a:pPr algn="l" indent="0" marL="0">
-                        <a:lnSpc>
-                          <a:spcPct val="100000"/>
-                        </a:lnSpc>
-                        <a:buNone/>
-                      </a:pPr>
-                      <a:endParaRPr lang="en-US" sz="1200" dirty="0">
+                      <a:endParaRPr lang="en-US" sz="1000" dirty="0">
                         <a:latin typeface="Arial" charset="0"/>
                         <a:ea typeface="Arial" charset="0"/>
                         <a:cs typeface="Arial" charset="0"/>
@@ -2817,13 +2359,10 @@
                     </a:p>
                     <a:p>
                       <a:pPr algn="l" indent="0" marL="0">
-                        <a:lnSpc>
-                          <a:spcPct val="100000"/>
-                        </a:lnSpc>
                         <a:buNone/>
                       </a:pPr>
                       <a:r>
-                        <a:rPr lang="en-US" sz="1200" dirty="0">
+                        <a:rPr lang="en-US" sz="1000" b="1" dirty="0">
                           <a:solidFill>
                             <a:srgbClr val="000000"/>
                           </a:solidFill>
@@ -2833,17 +2372,17 @@
                         </a:rPr>
                         <a:t>Product lead</a:t>
                       </a:r>
-                      <a:endParaRPr lang="en-US" sz="1200" dirty="0">
+                      <a:endParaRPr lang="en-US" sz="1000" dirty="0">
                         <a:latin typeface="Arial" charset="0"/>
                         <a:ea typeface="Arial" charset="0"/>
                         <a:cs typeface="Arial" charset="0"/>
                       </a:endParaRPr>
                     </a:p>
                   </a:txBody>
-                  <a:tcPr marL="63500" marR="63500" marT="38100" marB="38100" anchor="ctr">
+                  <a:tcPr marL="101600" marR="101600" marT="38100" marB="38100" anchor="ctr">
                     <a:lnL w="6350" cap="flat" cmpd="sng" algn="ctr">
                       <a:solidFill>
-                        <a:srgbClr val="B5B5B5"/>
+                        <a:srgbClr val="C6C9CD"/>
                       </a:solidFill>
                       <a:prstDash val="solid"/>
                       <a:round/>
@@ -2852,7 +2391,7 @@
                     </a:lnL>
                     <a:lnR w="6350" cap="flat" cmpd="sng" algn="ctr">
                       <a:solidFill>
-                        <a:srgbClr val="B5B5B5"/>
+                        <a:srgbClr val="C6C9CD"/>
                       </a:solidFill>
                       <a:prstDash val="solid"/>
                       <a:round/>
@@ -2861,7 +2400,7 @@
                     </a:lnR>
                     <a:lnT w="6350" cap="flat" cmpd="sng" algn="ctr">
                       <a:solidFill>
-                        <a:srgbClr val="B5B5B5"/>
+                        <a:srgbClr val="C6C9CD"/>
                       </a:solidFill>
                       <a:prstDash val="solid"/>
                       <a:round/>
@@ -2870,7 +2409,7 @@
                     </a:lnT>
                     <a:lnB w="6350" cap="flat" cmpd="sng" algn="ctr">
                       <a:solidFill>
-                        <a:srgbClr val="B5B5B5"/>
+                        <a:srgbClr val="C6C9CD"/>
                       </a:solidFill>
                       <a:prstDash val="solid"/>
                       <a:round/>
@@ -2889,14 +2428,11 @@
                     </a:bodyPr>
                     <a:lstStyle/>
                     <a:p>
-                      <a:pPr algn="l" indent="0" marL="0">
-                        <a:lnSpc>
-                          <a:spcPct val="100000"/>
-                        </a:lnSpc>
+                      <a:pPr algn="ctr" indent="0" marL="0">
                         <a:buNone/>
                       </a:pPr>
                       <a:r>
-                        <a:rPr lang="en-US" sz="1200" dirty="0">
+                        <a:rPr lang="en-US" sz="1000" dirty="0">
                           <a:solidFill>
                             <a:srgbClr val="000000"/>
                           </a:solidFill>
@@ -2906,21 +2442,18 @@
                         </a:rPr>
                         <a:t>Task mapping</a:t>
                       </a:r>
-                      <a:endParaRPr lang="en-US" sz="1200" dirty="0">
+                      <a:endParaRPr lang="en-US" sz="1000" dirty="0">
                         <a:latin typeface="Arial" charset="0"/>
                         <a:ea typeface="Arial" charset="0"/>
                         <a:cs typeface="Arial" charset="0"/>
                       </a:endParaRPr>
                     </a:p>
                     <a:p>
-                      <a:pPr algn="l" indent="0" marL="0">
-                        <a:lnSpc>
-                          <a:spcPct val="100000"/>
-                        </a:lnSpc>
+                      <a:pPr algn="ctr" indent="0" marL="0">
                         <a:buNone/>
                       </a:pPr>
                       <a:r>
-                        <a:rPr lang="en-US" sz="1200" dirty="0">
+                        <a:rPr lang="en-US" sz="1000" dirty="0">
                           <a:solidFill>
                             <a:srgbClr val="000000"/>
                           </a:solidFill>
@@ -2930,17 +2463,17 @@
                         </a:rPr>
                         <a:t>Baseline time logs</a:t>
                       </a:r>
-                      <a:endParaRPr lang="en-US" sz="1200" dirty="0">
+                      <a:endParaRPr lang="en-US" sz="1000" dirty="0">
                         <a:latin typeface="Arial" charset="0"/>
                         <a:ea typeface="Arial" charset="0"/>
                         <a:cs typeface="Arial" charset="0"/>
                       </a:endParaRPr>
                     </a:p>
                   </a:txBody>
-                  <a:tcPr marL="63500" marR="63500" marT="38100" marB="38100" anchor="ctr">
+                  <a:tcPr marL="101600" marR="101600" marT="38100" marB="38100" anchor="ctr">
                     <a:lnL w="6350" cap="flat" cmpd="sng" algn="ctr">
                       <a:solidFill>
-                        <a:srgbClr val="B5B5B5"/>
+                        <a:srgbClr val="C6C9CD"/>
                       </a:solidFill>
                       <a:prstDash val="solid"/>
                       <a:round/>
@@ -2949,7 +2482,7 @@
                     </a:lnL>
                     <a:lnR w="6350" cap="flat" cmpd="sng" algn="ctr">
                       <a:solidFill>
-                        <a:srgbClr val="B5B5B5"/>
+                        <a:srgbClr val="C6C9CD"/>
                       </a:solidFill>
                       <a:prstDash val="solid"/>
                       <a:round/>
@@ -2958,7 +2491,7 @@
                     </a:lnR>
                     <a:lnT w="6350" cap="flat" cmpd="sng" algn="ctr">
                       <a:solidFill>
-                        <a:srgbClr val="B5B5B5"/>
+                        <a:srgbClr val="C6C9CD"/>
                       </a:solidFill>
                       <a:prstDash val="solid"/>
                       <a:round/>
@@ -2967,7 +2500,7 @@
                     </a:lnT>
                     <a:lnB w="6350" cap="flat" cmpd="sng" algn="ctr">
                       <a:solidFill>
-                        <a:srgbClr val="B5B5B5"/>
+                        <a:srgbClr val="C6C9CD"/>
                       </a:solidFill>
                       <a:prstDash val="solid"/>
                       <a:round/>
@@ -2986,14 +2519,11 @@
                     </a:bodyPr>
                     <a:lstStyle/>
                     <a:p>
-                      <a:pPr algn="l" indent="0" marL="0">
-                        <a:lnSpc>
-                          <a:spcPct val="100000"/>
-                        </a:lnSpc>
+                      <a:pPr algn="ctr" indent="0" marL="0">
                         <a:buNone/>
                       </a:pPr>
                       <a:r>
-                        <a:rPr lang="en-US" sz="1200" dirty="0">
+                        <a:rPr lang="en-US" sz="1000" dirty="0">
                           <a:solidFill>
                             <a:srgbClr val="000000"/>
                           </a:solidFill>
@@ -3003,21 +2533,18 @@
                         </a:rPr>
                         <a:t>Grounded draft</a:t>
                       </a:r>
-                      <a:endParaRPr lang="en-US" sz="1200" dirty="0">
+                      <a:endParaRPr lang="en-US" sz="1000" dirty="0">
                         <a:latin typeface="Arial" charset="0"/>
                         <a:ea typeface="Arial" charset="0"/>
                         <a:cs typeface="Arial" charset="0"/>
                       </a:endParaRPr>
                     </a:p>
                     <a:p>
-                      <a:pPr algn="l" indent="0" marL="0">
-                        <a:lnSpc>
-                          <a:spcPct val="100000"/>
-                        </a:lnSpc>
+                      <a:pPr algn="ctr" indent="0" marL="0">
                         <a:buNone/>
                       </a:pPr>
                       <a:r>
-                        <a:rPr lang="en-US" sz="1200" dirty="0">
+                        <a:rPr lang="en-US" sz="1000" dirty="0">
                           <a:solidFill>
                             <a:srgbClr val="000000"/>
                           </a:solidFill>
@@ -3027,17 +2554,17 @@
                         </a:rPr>
                         <a:t>Visible citations</a:t>
                       </a:r>
-                      <a:endParaRPr lang="en-US" sz="1200" dirty="0">
+                      <a:endParaRPr lang="en-US" sz="1000" dirty="0">
                         <a:latin typeface="Arial" charset="0"/>
                         <a:ea typeface="Arial" charset="0"/>
                         <a:cs typeface="Arial" charset="0"/>
                       </a:endParaRPr>
                     </a:p>
                   </a:txBody>
-                  <a:tcPr marL="63500" marR="63500" marT="38100" marB="38100" anchor="ctr">
+                  <a:tcPr marL="101600" marR="101600" marT="38100" marB="38100" anchor="ctr">
                     <a:lnL w="6350" cap="flat" cmpd="sng" algn="ctr">
                       <a:solidFill>
-                        <a:srgbClr val="B5B5B5"/>
+                        <a:srgbClr val="C6C9CD"/>
                       </a:solidFill>
                       <a:prstDash val="solid"/>
                       <a:round/>
@@ -3046,7 +2573,7 @@
                     </a:lnL>
                     <a:lnR w="6350" cap="flat" cmpd="sng" algn="ctr">
                       <a:solidFill>
-                        <a:srgbClr val="B5B5B5"/>
+                        <a:srgbClr val="C6C9CD"/>
                       </a:solidFill>
                       <a:prstDash val="solid"/>
                       <a:round/>
@@ -3055,7 +2582,7 @@
                     </a:lnR>
                     <a:lnT w="6350" cap="flat" cmpd="sng" algn="ctr">
                       <a:solidFill>
-                        <a:srgbClr val="B5B5B5"/>
+                        <a:srgbClr val="C6C9CD"/>
                       </a:solidFill>
                       <a:prstDash val="solid"/>
                       <a:round/>
@@ -3064,7 +2591,7 @@
                     </a:lnT>
                     <a:lnB w="6350" cap="flat" cmpd="sng" algn="ctr">
                       <a:solidFill>
-                        <a:srgbClr val="B5B5B5"/>
+                        <a:srgbClr val="C6C9CD"/>
                       </a:solidFill>
                       <a:prstDash val="solid"/>
                       <a:round/>
@@ -3083,14 +2610,11 @@
                     </a:bodyPr>
                     <a:lstStyle/>
                     <a:p>
-                      <a:pPr algn="l" indent="0" marL="0">
-                        <a:lnSpc>
-                          <a:spcPct val="100000"/>
-                        </a:lnSpc>
+                      <a:pPr algn="ctr" indent="0" marL="0">
                         <a:buNone/>
                       </a:pPr>
                       <a:r>
-                        <a:rPr lang="en-US" sz="1200" dirty="0">
+                        <a:rPr lang="en-US" sz="1000" dirty="0">
                           <a:solidFill>
                             <a:srgbClr val="000000"/>
                           </a:solidFill>
@@ -3100,21 +2624,18 @@
                         </a:rPr>
                         <a:t>15-user pilot</a:t>
                       </a:r>
-                      <a:endParaRPr lang="en-US" sz="1200" dirty="0">
+                      <a:endParaRPr lang="en-US" sz="1000" dirty="0">
                         <a:latin typeface="Arial" charset="0"/>
                         <a:ea typeface="Arial" charset="0"/>
                         <a:cs typeface="Arial" charset="0"/>
                       </a:endParaRPr>
                     </a:p>
                     <a:p>
-                      <a:pPr algn="l" indent="0" marL="0">
-                        <a:lnSpc>
-                          <a:spcPct val="100000"/>
-                        </a:lnSpc>
+                      <a:pPr algn="ctr" indent="0" marL="0">
                         <a:buNone/>
                       </a:pPr>
                       <a:r>
-                        <a:rPr lang="en-US" sz="1200" dirty="0">
+                        <a:rPr lang="en-US" sz="1000" dirty="0">
                           <a:solidFill>
                             <a:srgbClr val="000000"/>
                           </a:solidFill>
@@ -3124,17 +2645,17 @@
                         </a:rPr>
                         <a:t>Defect fixes</a:t>
                       </a:r>
-                      <a:endParaRPr lang="en-US" sz="1200" dirty="0">
+                      <a:endParaRPr lang="en-US" sz="1000" dirty="0">
                         <a:latin typeface="Arial" charset="0"/>
                         <a:ea typeface="Arial" charset="0"/>
                         <a:cs typeface="Arial" charset="0"/>
                       </a:endParaRPr>
                     </a:p>
                   </a:txBody>
-                  <a:tcPr marL="63500" marR="63500" marT="38100" marB="38100" anchor="ctr">
+                  <a:tcPr marL="101600" marR="101600" marT="38100" marB="38100" anchor="ctr">
                     <a:lnL w="6350" cap="flat" cmpd="sng" algn="ctr">
                       <a:solidFill>
-                        <a:srgbClr val="B5B5B5"/>
+                        <a:srgbClr val="C6C9CD"/>
                       </a:solidFill>
                       <a:prstDash val="solid"/>
                       <a:round/>
@@ -3143,7 +2664,7 @@
                     </a:lnL>
                     <a:lnR w="6350" cap="flat" cmpd="sng" algn="ctr">
                       <a:solidFill>
-                        <a:srgbClr val="B5B5B5"/>
+                        <a:srgbClr val="C6C9CD"/>
                       </a:solidFill>
                       <a:prstDash val="solid"/>
                       <a:round/>
@@ -3152,7 +2673,7 @@
                     </a:lnR>
                     <a:lnT w="6350" cap="flat" cmpd="sng" algn="ctr">
                       <a:solidFill>
-                        <a:srgbClr val="B5B5B5"/>
+                        <a:srgbClr val="C6C9CD"/>
                       </a:solidFill>
                       <a:prstDash val="solid"/>
                       <a:round/>
@@ -3161,7 +2682,7 @@
                     </a:lnT>
                     <a:lnB w="6350" cap="flat" cmpd="sng" algn="ctr">
                       <a:solidFill>
-                        <a:srgbClr val="B5B5B5"/>
+                        <a:srgbClr val="C6C9CD"/>
                       </a:solidFill>
                       <a:prstDash val="solid"/>
                       <a:round/>
@@ -3180,14 +2701,11 @@
                     </a:bodyPr>
                     <a:lstStyle/>
                     <a:p>
-                      <a:pPr algn="l" indent="0" marL="0">
-                        <a:lnSpc>
-                          <a:spcPct val="100000"/>
-                        </a:lnSpc>
+                      <a:pPr algn="ctr" indent="0" marL="0">
                         <a:buNone/>
                       </a:pPr>
                       <a:r>
-                        <a:rPr lang="en-US" sz="1200" dirty="0">
+                        <a:rPr lang="en-US" sz="1000" dirty="0">
                           <a:solidFill>
                             <a:srgbClr val="000000"/>
                           </a:solidFill>
@@ -3197,21 +2715,18 @@
                         </a:rPr>
                         <a:t>Release candidate</a:t>
                       </a:r>
-                      <a:endParaRPr lang="en-US" sz="1200" dirty="0">
+                      <a:endParaRPr lang="en-US" sz="1000" dirty="0">
                         <a:latin typeface="Arial" charset="0"/>
                         <a:ea typeface="Arial" charset="0"/>
                         <a:cs typeface="Arial" charset="0"/>
                       </a:endParaRPr>
                     </a:p>
                     <a:p>
-                      <a:pPr algn="l" indent="0" marL="0">
-                        <a:lnSpc>
-                          <a:spcPct val="100000"/>
-                        </a:lnSpc>
+                      <a:pPr algn="ctr" indent="0" marL="0">
                         <a:buNone/>
                       </a:pPr>
                       <a:r>
-                        <a:rPr lang="en-US" sz="1200" dirty="0">
+                        <a:rPr lang="en-US" sz="1000" dirty="0">
                           <a:solidFill>
                             <a:srgbClr val="000000"/>
                           </a:solidFill>
@@ -3221,17 +2736,17 @@
                         </a:rPr>
                         <a:t>Runbook</a:t>
                       </a:r>
-                      <a:endParaRPr lang="en-US" sz="1200" dirty="0">
+                      <a:endParaRPr lang="en-US" sz="1000" dirty="0">
                         <a:latin typeface="Arial" charset="0"/>
                         <a:ea typeface="Arial" charset="0"/>
                         <a:cs typeface="Arial" charset="0"/>
                       </a:endParaRPr>
                     </a:p>
                   </a:txBody>
-                  <a:tcPr marL="63500" marR="63500" marT="38100" marB="38100" anchor="ctr">
+                  <a:tcPr marL="101600" marR="101600" marT="38100" marB="38100" anchor="ctr">
                     <a:lnL w="6350" cap="flat" cmpd="sng" algn="ctr">
                       <a:solidFill>
-                        <a:srgbClr val="B5B5B5"/>
+                        <a:srgbClr val="C6C9CD"/>
                       </a:solidFill>
                       <a:prstDash val="solid"/>
                       <a:round/>
@@ -3240,7 +2755,7 @@
                     </a:lnL>
                     <a:lnR w="6350" cap="flat" cmpd="sng" algn="ctr">
                       <a:solidFill>
-                        <a:srgbClr val="B5B5B5"/>
+                        <a:srgbClr val="C6C9CD"/>
                       </a:solidFill>
                       <a:prstDash val="solid"/>
                       <a:round/>
@@ -3249,7 +2764,7 @@
                     </a:lnR>
                     <a:lnT w="6350" cap="flat" cmpd="sng" algn="ctr">
                       <a:solidFill>
-                        <a:srgbClr val="B5B5B5"/>
+                        <a:srgbClr val="C6C9CD"/>
                       </a:solidFill>
                       <a:prstDash val="solid"/>
                       <a:round/>
@@ -3258,7 +2773,7 @@
                     </a:lnT>
                     <a:lnB w="6350" cap="flat" cmpd="sng" algn="ctr">
                       <a:solidFill>
-                        <a:srgbClr val="B5B5B5"/>
+                        <a:srgbClr val="C6C9CD"/>
                       </a:solidFill>
                       <a:prstDash val="solid"/>
                       <a:round/>
@@ -3271,7 +2786,7 @@
                   </a:tcPr>
                 </a:tc>
               </a:tr>
-              <a:tr h="730250">
+              <a:tr h="558800">
                 <a:tc>
                   <a:txBody>
                     <a:bodyPr>
@@ -3280,13 +2795,10 @@
                     <a:lstStyle/>
                     <a:p>
                       <a:pPr algn="l" indent="0" marL="0">
-                        <a:lnSpc>
-                          <a:spcPct val="100000"/>
-                        </a:lnSpc>
                         <a:buNone/>
                       </a:pPr>
                       <a:r>
-                        <a:rPr lang="en-US" sz="1200" b="1" dirty="0">
+                        <a:rPr lang="en-US" sz="1000" b="1" dirty="0">
                           <a:solidFill>
                             <a:srgbClr val="000000"/>
                           </a:solidFill>
@@ -3296,13 +2808,7 @@
                         </a:rPr>
                         <a:t>Quality &amp; controls</a:t>
                       </a:r>
-                      <a:pPr algn="l" indent="0" marL="0">
-                        <a:lnSpc>
-                          <a:spcPct val="100000"/>
-                        </a:lnSpc>
-                        <a:buNone/>
-                      </a:pPr>
-                      <a:endParaRPr lang="en-US" sz="1200" dirty="0">
+                      <a:endParaRPr lang="en-US" sz="1000" dirty="0">
                         <a:latin typeface="Arial" charset="0"/>
                         <a:ea typeface="Arial" charset="0"/>
                         <a:cs typeface="Arial" charset="0"/>
@@ -3310,13 +2816,10 @@
                     </a:p>
                     <a:p>
                       <a:pPr algn="l" indent="0" marL="0">
-                        <a:lnSpc>
-                          <a:spcPct val="100000"/>
-                        </a:lnSpc>
                         <a:buNone/>
                       </a:pPr>
                       <a:r>
-                        <a:rPr lang="en-US" sz="1200" dirty="0">
+                        <a:rPr lang="en-US" sz="1000" b="1" dirty="0">
                           <a:solidFill>
                             <a:srgbClr val="000000"/>
                           </a:solidFill>
@@ -3326,17 +2829,17 @@
                         </a:rPr>
                         <a:t>Expert reviewer</a:t>
                       </a:r>
-                      <a:endParaRPr lang="en-US" sz="1200" dirty="0">
+                      <a:endParaRPr lang="en-US" sz="1000" dirty="0">
                         <a:latin typeface="Arial" charset="0"/>
                         <a:ea typeface="Arial" charset="0"/>
                         <a:cs typeface="Arial" charset="0"/>
                       </a:endParaRPr>
                     </a:p>
                   </a:txBody>
-                  <a:tcPr marL="63500" marR="63500" marT="38100" marB="38100" anchor="ctr">
+                  <a:tcPr marL="101600" marR="101600" marT="38100" marB="38100" anchor="ctr">
                     <a:lnL w="6350" cap="flat" cmpd="sng" algn="ctr">
                       <a:solidFill>
-                        <a:srgbClr val="B5B5B5"/>
+                        <a:srgbClr val="C6C9CD"/>
                       </a:solidFill>
                       <a:prstDash val="solid"/>
                       <a:round/>
@@ -3345,7 +2848,7 @@
                     </a:lnL>
                     <a:lnR w="6350" cap="flat" cmpd="sng" algn="ctr">
                       <a:solidFill>
-                        <a:srgbClr val="B5B5B5"/>
+                        <a:srgbClr val="C6C9CD"/>
                       </a:solidFill>
                       <a:prstDash val="solid"/>
                       <a:round/>
@@ -3354,7 +2857,7 @@
                     </a:lnR>
                     <a:lnT w="6350" cap="flat" cmpd="sng" algn="ctr">
                       <a:solidFill>
-                        <a:srgbClr val="B5B5B5"/>
+                        <a:srgbClr val="C6C9CD"/>
                       </a:solidFill>
                       <a:prstDash val="solid"/>
                       <a:round/>
@@ -3363,7 +2866,7 @@
                     </a:lnT>
                     <a:lnB w="6350" cap="flat" cmpd="sng" algn="ctr">
                       <a:solidFill>
-                        <a:srgbClr val="B5B5B5"/>
+                        <a:srgbClr val="C6C9CD"/>
                       </a:solidFill>
                       <a:prstDash val="solid"/>
                       <a:round/>
@@ -3382,14 +2885,11 @@
                     </a:bodyPr>
                     <a:lstStyle/>
                     <a:p>
-                      <a:pPr algn="l" indent="0" marL="0">
-                        <a:lnSpc>
-                          <a:spcPct val="100000"/>
-                        </a:lnSpc>
+                      <a:pPr algn="ctr" indent="0" marL="0">
                         <a:buNone/>
                       </a:pPr>
                       <a:r>
-                        <a:rPr lang="en-US" sz="1200" dirty="0">
+                        <a:rPr lang="en-US" sz="1000" dirty="0">
                           <a:solidFill>
                             <a:srgbClr val="000000"/>
                           </a:solidFill>
@@ -3399,21 +2899,18 @@
                         </a:rPr>
                         <a:t>Risk boundaries</a:t>
                       </a:r>
-                      <a:endParaRPr lang="en-US" sz="1200" dirty="0">
+                      <a:endParaRPr lang="en-US" sz="1000" dirty="0">
                         <a:latin typeface="Arial" charset="0"/>
                         <a:ea typeface="Arial" charset="0"/>
                         <a:cs typeface="Arial" charset="0"/>
                       </a:endParaRPr>
                     </a:p>
                     <a:p>
-                      <a:pPr algn="l" indent="0" marL="0">
-                        <a:lnSpc>
-                          <a:spcPct val="100000"/>
-                        </a:lnSpc>
+                      <a:pPr algn="ctr" indent="0" marL="0">
                         <a:buNone/>
                       </a:pPr>
                       <a:r>
-                        <a:rPr lang="en-US" sz="1200" dirty="0">
+                        <a:rPr lang="en-US" sz="1000" dirty="0">
                           <a:solidFill>
                             <a:srgbClr val="000000"/>
                           </a:solidFill>
@@ -3423,17 +2920,17 @@
                         </a:rPr>
                         <a:t>Review criteria</a:t>
                       </a:r>
-                      <a:endParaRPr lang="en-US" sz="1200" dirty="0">
+                      <a:endParaRPr lang="en-US" sz="1000" dirty="0">
                         <a:latin typeface="Arial" charset="0"/>
                         <a:ea typeface="Arial" charset="0"/>
                         <a:cs typeface="Arial" charset="0"/>
                       </a:endParaRPr>
                     </a:p>
                   </a:txBody>
-                  <a:tcPr marL="63500" marR="63500" marT="38100" marB="38100" anchor="ctr">
+                  <a:tcPr marL="101600" marR="101600" marT="38100" marB="38100" anchor="ctr">
                     <a:lnL w="6350" cap="flat" cmpd="sng" algn="ctr">
                       <a:solidFill>
-                        <a:srgbClr val="B5B5B5"/>
+                        <a:srgbClr val="C6C9CD"/>
                       </a:solidFill>
                       <a:prstDash val="solid"/>
                       <a:round/>
@@ -3442,7 +2939,7 @@
                     </a:lnL>
                     <a:lnR w="6350" cap="flat" cmpd="sng" algn="ctr">
                       <a:solidFill>
-                        <a:srgbClr val="B5B5B5"/>
+                        <a:srgbClr val="C6C9CD"/>
                       </a:solidFill>
                       <a:prstDash val="solid"/>
                       <a:round/>
@@ -3451,7 +2948,7 @@
                     </a:lnR>
                     <a:lnT w="6350" cap="flat" cmpd="sng" algn="ctr">
                       <a:solidFill>
-                        <a:srgbClr val="B5B5B5"/>
+                        <a:srgbClr val="C6C9CD"/>
                       </a:solidFill>
                       <a:prstDash val="solid"/>
                       <a:round/>
@@ -3460,7 +2957,7 @@
                     </a:lnT>
                     <a:lnB w="6350" cap="flat" cmpd="sng" algn="ctr">
                       <a:solidFill>
-                        <a:srgbClr val="B5B5B5"/>
+                        <a:srgbClr val="C6C9CD"/>
                       </a:solidFill>
                       <a:prstDash val="solid"/>
                       <a:round/>
@@ -3479,14 +2976,11 @@
                     </a:bodyPr>
                     <a:lstStyle/>
                     <a:p>
-                      <a:pPr algn="l" indent="0" marL="0">
-                        <a:lnSpc>
-                          <a:spcPct val="100000"/>
-                        </a:lnSpc>
+                      <a:pPr algn="ctr" indent="0" marL="0">
                         <a:buNone/>
                       </a:pPr>
                       <a:r>
-                        <a:rPr lang="en-US" sz="1200" dirty="0">
+                        <a:rPr lang="en-US" sz="1000" dirty="0">
                           <a:solidFill>
                             <a:srgbClr val="000000"/>
                           </a:solidFill>
@@ -3496,21 +2990,18 @@
                         </a:rPr>
                         <a:t>Test pack</a:t>
                       </a:r>
-                      <a:endParaRPr lang="en-US" sz="1200" dirty="0">
+                      <a:endParaRPr lang="en-US" sz="1000" dirty="0">
                         <a:latin typeface="Arial" charset="0"/>
                         <a:ea typeface="Arial" charset="0"/>
                         <a:cs typeface="Arial" charset="0"/>
                       </a:endParaRPr>
                     </a:p>
                     <a:p>
-                      <a:pPr algn="l" indent="0" marL="0">
-                        <a:lnSpc>
-                          <a:spcPct val="100000"/>
-                        </a:lnSpc>
+                      <a:pPr algn="ctr" indent="0" marL="0">
                         <a:buNone/>
                       </a:pPr>
                       <a:r>
-                        <a:rPr lang="en-US" sz="1200" dirty="0">
+                        <a:rPr lang="en-US" sz="1000" dirty="0">
                           <a:solidFill>
                             <a:srgbClr val="000000"/>
                           </a:solidFill>
@@ -3520,17 +3011,17 @@
                         </a:rPr>
                         <a:t>Rejection reasons</a:t>
                       </a:r>
-                      <a:endParaRPr lang="en-US" sz="1200" dirty="0">
+                      <a:endParaRPr lang="en-US" sz="1000" dirty="0">
                         <a:latin typeface="Arial" charset="0"/>
                         <a:ea typeface="Arial" charset="0"/>
                         <a:cs typeface="Arial" charset="0"/>
                       </a:endParaRPr>
                     </a:p>
                   </a:txBody>
-                  <a:tcPr marL="63500" marR="63500" marT="38100" marB="38100" anchor="ctr">
+                  <a:tcPr marL="101600" marR="101600" marT="38100" marB="38100" anchor="ctr">
                     <a:lnL w="6350" cap="flat" cmpd="sng" algn="ctr">
                       <a:solidFill>
-                        <a:srgbClr val="B5B5B5"/>
+                        <a:srgbClr val="C6C9CD"/>
                       </a:solidFill>
                       <a:prstDash val="solid"/>
                       <a:round/>
@@ -3539,7 +3030,7 @@
                     </a:lnL>
                     <a:lnR w="6350" cap="flat" cmpd="sng" algn="ctr">
                       <a:solidFill>
-                        <a:srgbClr val="B5B5B5"/>
+                        <a:srgbClr val="C6C9CD"/>
                       </a:solidFill>
                       <a:prstDash val="solid"/>
                       <a:round/>
@@ -3548,7 +3039,7 @@
                     </a:lnR>
                     <a:lnT w="6350" cap="flat" cmpd="sng" algn="ctr">
                       <a:solidFill>
-                        <a:srgbClr val="B5B5B5"/>
+                        <a:srgbClr val="C6C9CD"/>
                       </a:solidFill>
                       <a:prstDash val="solid"/>
                       <a:round/>
@@ -3557,7 +3048,7 @@
                     </a:lnT>
                     <a:lnB w="6350" cap="flat" cmpd="sng" algn="ctr">
                       <a:solidFill>
-                        <a:srgbClr val="B5B5B5"/>
+                        <a:srgbClr val="C6C9CD"/>
                       </a:solidFill>
                       <a:prstDash val="solid"/>
                       <a:round/>
@@ -3576,14 +3067,11 @@
                     </a:bodyPr>
                     <a:lstStyle/>
                     <a:p>
-                      <a:pPr algn="l" indent="0" marL="0">
-                        <a:lnSpc>
-                          <a:spcPct val="100000"/>
-                        </a:lnSpc>
+                      <a:pPr algn="ctr" indent="0" marL="0">
                         <a:buNone/>
                       </a:pPr>
                       <a:r>
-                        <a:rPr lang="en-US" sz="1200" dirty="0">
+                        <a:rPr lang="en-US" sz="1000" dirty="0">
                           <a:solidFill>
                             <a:srgbClr val="000000"/>
                           </a:solidFill>
@@ -3593,21 +3081,18 @@
                         </a:rPr>
                         <a:t>10 reviewed tasks</a:t>
                       </a:r>
-                      <a:endParaRPr lang="en-US" sz="1200" dirty="0">
+                      <a:endParaRPr lang="en-US" sz="1000" dirty="0">
                         <a:latin typeface="Arial" charset="0"/>
                         <a:ea typeface="Arial" charset="0"/>
                         <a:cs typeface="Arial" charset="0"/>
                       </a:endParaRPr>
                     </a:p>
                     <a:p>
-                      <a:pPr algn="l" indent="0" marL="0">
-                        <a:lnSpc>
-                          <a:spcPct val="100000"/>
-                        </a:lnSpc>
+                      <a:pPr algn="ctr" indent="0" marL="0">
                         <a:buNone/>
                       </a:pPr>
                       <a:r>
-                        <a:rPr lang="en-US" sz="1200" dirty="0">
+                        <a:rPr lang="en-US" sz="1000" dirty="0">
                           <a:solidFill>
                             <a:srgbClr val="000000"/>
                           </a:solidFill>
@@ -3617,17 +3102,17 @@
                         </a:rPr>
                         <a:t>Error triage</a:t>
                       </a:r>
-                      <a:endParaRPr lang="en-US" sz="1200" dirty="0">
+                      <a:endParaRPr lang="en-US" sz="1000" dirty="0">
                         <a:latin typeface="Arial" charset="0"/>
                         <a:ea typeface="Arial" charset="0"/>
                         <a:cs typeface="Arial" charset="0"/>
                       </a:endParaRPr>
                     </a:p>
                   </a:txBody>
-                  <a:tcPr marL="63500" marR="63500" marT="38100" marB="38100" anchor="ctr">
+                  <a:tcPr marL="101600" marR="101600" marT="38100" marB="38100" anchor="ctr">
                     <a:lnL w="6350" cap="flat" cmpd="sng" algn="ctr">
                       <a:solidFill>
-                        <a:srgbClr val="B5B5B5"/>
+                        <a:srgbClr val="C6C9CD"/>
                       </a:solidFill>
                       <a:prstDash val="solid"/>
                       <a:round/>
@@ -3636,7 +3121,7 @@
                     </a:lnL>
                     <a:lnR w="6350" cap="flat" cmpd="sng" algn="ctr">
                       <a:solidFill>
-                        <a:srgbClr val="B5B5B5"/>
+                        <a:srgbClr val="C6C9CD"/>
                       </a:solidFill>
                       <a:prstDash val="solid"/>
                       <a:round/>
@@ -3645,7 +3130,7 @@
                     </a:lnR>
                     <a:lnT w="6350" cap="flat" cmpd="sng" algn="ctr">
                       <a:solidFill>
-                        <a:srgbClr val="B5B5B5"/>
+                        <a:srgbClr val="C6C9CD"/>
                       </a:solidFill>
                       <a:prstDash val="solid"/>
                       <a:round/>
@@ -3654,7 +3139,7 @@
                     </a:lnT>
                     <a:lnB w="6350" cap="flat" cmpd="sng" algn="ctr">
                       <a:solidFill>
-                        <a:srgbClr val="B5B5B5"/>
+                        <a:srgbClr val="C6C9CD"/>
                       </a:solidFill>
                       <a:prstDash val="solid"/>
                       <a:round/>
@@ -3673,14 +3158,11 @@
                     </a:bodyPr>
                     <a:lstStyle/>
                     <a:p>
-                      <a:pPr algn="l" indent="0" marL="0">
-                        <a:lnSpc>
-                          <a:spcPct val="100000"/>
-                        </a:lnSpc>
+                      <a:pPr algn="ctr" indent="0" marL="0">
                         <a:buNone/>
                       </a:pPr>
                       <a:r>
-                        <a:rPr lang="en-US" sz="1200" dirty="0">
+                        <a:rPr lang="en-US" sz="1000" dirty="0">
                           <a:solidFill>
                             <a:srgbClr val="000000"/>
                           </a:solidFill>
@@ -3690,21 +3172,18 @@
                         </a:rPr>
                         <a:t>20 completed tasks</a:t>
                       </a:r>
-                      <a:endParaRPr lang="en-US" sz="1200" dirty="0">
+                      <a:endParaRPr lang="en-US" sz="1000" dirty="0">
                         <a:latin typeface="Arial" charset="0"/>
                         <a:ea typeface="Arial" charset="0"/>
                         <a:cs typeface="Arial" charset="0"/>
                       </a:endParaRPr>
                     </a:p>
                     <a:p>
-                      <a:pPr algn="l" indent="0" marL="0">
-                        <a:lnSpc>
-                          <a:spcPct val="100000"/>
-                        </a:lnSpc>
+                      <a:pPr algn="ctr" indent="0" marL="0">
                         <a:buNone/>
                       </a:pPr>
                       <a:r>
-                        <a:rPr lang="en-US" sz="1200" dirty="0">
+                        <a:rPr lang="en-US" sz="1000" dirty="0">
                           <a:solidFill>
                             <a:srgbClr val="000000"/>
                           </a:solidFill>
@@ -3714,17 +3193,17 @@
                         </a:rPr>
                         <a:t>Gate evidence</a:t>
                       </a:r>
-                      <a:endParaRPr lang="en-US" sz="1200" dirty="0">
+                      <a:endParaRPr lang="en-US" sz="1000" dirty="0">
                         <a:latin typeface="Arial" charset="0"/>
                         <a:ea typeface="Arial" charset="0"/>
                         <a:cs typeface="Arial" charset="0"/>
                       </a:endParaRPr>
                     </a:p>
                   </a:txBody>
-                  <a:tcPr marL="63500" marR="63500" marT="38100" marB="38100" anchor="ctr">
+                  <a:tcPr marL="101600" marR="101600" marT="38100" marB="38100" anchor="ctr">
                     <a:lnL w="6350" cap="flat" cmpd="sng" algn="ctr">
                       <a:solidFill>
-                        <a:srgbClr val="B5B5B5"/>
+                        <a:srgbClr val="C6C9CD"/>
                       </a:solidFill>
                       <a:prstDash val="solid"/>
                       <a:round/>
@@ -3733,7 +3212,7 @@
                     </a:lnL>
                     <a:lnR w="6350" cap="flat" cmpd="sng" algn="ctr">
                       <a:solidFill>
-                        <a:srgbClr val="B5B5B5"/>
+                        <a:srgbClr val="C6C9CD"/>
                       </a:solidFill>
                       <a:prstDash val="solid"/>
                       <a:round/>
@@ -3742,7 +3221,7 @@
                     </a:lnR>
                     <a:lnT w="6350" cap="flat" cmpd="sng" algn="ctr">
                       <a:solidFill>
-                        <a:srgbClr val="B5B5B5"/>
+                        <a:srgbClr val="C6C9CD"/>
                       </a:solidFill>
                       <a:prstDash val="solid"/>
                       <a:round/>
@@ -3751,7 +3230,7 @@
                     </a:lnT>
                     <a:lnB w="6350" cap="flat" cmpd="sng" algn="ctr">
                       <a:solidFill>
-                        <a:srgbClr val="B5B5B5"/>
+                        <a:srgbClr val="C6C9CD"/>
                       </a:solidFill>
                       <a:prstDash val="solid"/>
                       <a:round/>
@@ -3764,7 +3243,7 @@
                   </a:tcPr>
                 </a:tc>
               </a:tr>
-              <a:tr h="755650">
+              <a:tr h="558800">
                 <a:tc>
                   <a:txBody>
                     <a:bodyPr>
@@ -3773,13 +3252,10 @@
                     <a:lstStyle/>
                     <a:p>
                       <a:pPr algn="l" indent="0" marL="0">
-                        <a:lnSpc>
-                          <a:spcPct val="100000"/>
-                        </a:lnSpc>
                         <a:buNone/>
                       </a:pPr>
                       <a:r>
-                        <a:rPr lang="en-US" sz="1200" b="1" dirty="0">
+                        <a:rPr lang="en-US" sz="1000" b="1" dirty="0">
                           <a:solidFill>
                             <a:srgbClr val="000000"/>
                           </a:solidFill>
@@ -3789,13 +3265,7 @@
                         </a:rPr>
                         <a:t>Adoption &amp; value</a:t>
                       </a:r>
-                      <a:pPr algn="l" indent="0" marL="0">
-                        <a:lnSpc>
-                          <a:spcPct val="100000"/>
-                        </a:lnSpc>
-                        <a:buNone/>
-                      </a:pPr>
-                      <a:endParaRPr lang="en-US" sz="1200" dirty="0">
+                      <a:endParaRPr lang="en-US" sz="1000" dirty="0">
                         <a:latin typeface="Arial" charset="0"/>
                         <a:ea typeface="Arial" charset="0"/>
                         <a:cs typeface="Arial" charset="0"/>
@@ -3803,13 +3273,10 @@
                     </a:p>
                     <a:p>
                       <a:pPr algn="l" indent="0" marL="0">
-                        <a:lnSpc>
-                          <a:spcPct val="100000"/>
-                        </a:lnSpc>
                         <a:buNone/>
                       </a:pPr>
                       <a:r>
-                        <a:rPr lang="en-US" sz="1200" dirty="0">
+                        <a:rPr lang="en-US" sz="1000" b="1" dirty="0">
                           <a:solidFill>
                             <a:srgbClr val="000000"/>
                           </a:solidFill>
@@ -3819,17 +3286,17 @@
                         </a:rPr>
                         <a:t>Practice lead</a:t>
                       </a:r>
-                      <a:endParaRPr lang="en-US" sz="1200" dirty="0">
+                      <a:endParaRPr lang="en-US" sz="1000" dirty="0">
                         <a:latin typeface="Arial" charset="0"/>
                         <a:ea typeface="Arial" charset="0"/>
                         <a:cs typeface="Arial" charset="0"/>
                       </a:endParaRPr>
                     </a:p>
                   </a:txBody>
-                  <a:tcPr marL="63500" marR="63500" marT="38100" marB="38100" anchor="ctr">
+                  <a:tcPr marL="101600" marR="101600" marT="38100" marB="38100" anchor="ctr">
                     <a:lnL w="6350" cap="flat" cmpd="sng" algn="ctr">
                       <a:solidFill>
-                        <a:srgbClr val="B5B5B5"/>
+                        <a:srgbClr val="C6C9CD"/>
                       </a:solidFill>
                       <a:prstDash val="solid"/>
                       <a:round/>
@@ -3838,7 +3305,7 @@
                     </a:lnL>
                     <a:lnR w="6350" cap="flat" cmpd="sng" algn="ctr">
                       <a:solidFill>
-                        <a:srgbClr val="B5B5B5"/>
+                        <a:srgbClr val="C6C9CD"/>
                       </a:solidFill>
                       <a:prstDash val="solid"/>
                       <a:round/>
@@ -3847,7 +3314,7 @@
                     </a:lnR>
                     <a:lnT w="6350" cap="flat" cmpd="sng" algn="ctr">
                       <a:solidFill>
-                        <a:srgbClr val="B5B5B5"/>
+                        <a:srgbClr val="C6C9CD"/>
                       </a:solidFill>
                       <a:prstDash val="solid"/>
                       <a:round/>
@@ -3856,7 +3323,7 @@
                     </a:lnT>
                     <a:lnB w="6350" cap="flat" cmpd="sng" algn="ctr">
                       <a:solidFill>
-                        <a:srgbClr val="B5B5B5"/>
+                        <a:srgbClr val="C6C9CD"/>
                       </a:solidFill>
                       <a:prstDash val="solid"/>
                       <a:round/>
@@ -3875,14 +3342,11 @@
                     </a:bodyPr>
                     <a:lstStyle/>
                     <a:p>
-                      <a:pPr algn="l" indent="0" marL="0">
-                        <a:lnSpc>
-                          <a:spcPct val="100000"/>
-                        </a:lnSpc>
+                      <a:pPr algn="ctr" indent="0" marL="0">
                         <a:buNone/>
                       </a:pPr>
                       <a:r>
-                        <a:rPr lang="en-US" sz="1200" dirty="0">
+                        <a:rPr lang="en-US" sz="1000" dirty="0">
                           <a:solidFill>
                             <a:srgbClr val="000000"/>
                           </a:solidFill>
@@ -3892,21 +3356,18 @@
                         </a:rPr>
                         <a:t>Sponsor &amp; users</a:t>
                       </a:r>
-                      <a:endParaRPr lang="en-US" sz="1200" dirty="0">
+                      <a:endParaRPr lang="en-US" sz="1000" dirty="0">
                         <a:latin typeface="Arial" charset="0"/>
                         <a:ea typeface="Arial" charset="0"/>
                         <a:cs typeface="Arial" charset="0"/>
                       </a:endParaRPr>
                     </a:p>
                     <a:p>
-                      <a:pPr algn="l" indent="0" marL="0">
-                        <a:lnSpc>
-                          <a:spcPct val="100000"/>
-                        </a:lnSpc>
+                      <a:pPr algn="ctr" indent="0" marL="0">
                         <a:buNone/>
                       </a:pPr>
                       <a:r>
-                        <a:rPr lang="en-US" sz="1200" dirty="0">
+                        <a:rPr lang="en-US" sz="1000" dirty="0">
                           <a:solidFill>
                             <a:srgbClr val="000000"/>
                           </a:solidFill>
@@ -3916,17 +3377,17 @@
                         </a:rPr>
                         <a:t>Agree tracking</a:t>
                       </a:r>
-                      <a:endParaRPr lang="en-US" sz="1200" dirty="0">
+                      <a:endParaRPr lang="en-US" sz="1000" dirty="0">
                         <a:latin typeface="Arial" charset="0"/>
                         <a:ea typeface="Arial" charset="0"/>
                         <a:cs typeface="Arial" charset="0"/>
                       </a:endParaRPr>
                     </a:p>
                   </a:txBody>
-                  <a:tcPr marL="63500" marR="63500" marT="38100" marB="38100" anchor="ctr">
+                  <a:tcPr marL="101600" marR="101600" marT="38100" marB="38100" anchor="ctr">
                     <a:lnL w="6350" cap="flat" cmpd="sng" algn="ctr">
                       <a:solidFill>
-                        <a:srgbClr val="B5B5B5"/>
+                        <a:srgbClr val="C6C9CD"/>
                       </a:solidFill>
                       <a:prstDash val="solid"/>
                       <a:round/>
@@ -3935,7 +3396,7 @@
                     </a:lnL>
                     <a:lnR w="6350" cap="flat" cmpd="sng" algn="ctr">
                       <a:solidFill>
-                        <a:srgbClr val="B5B5B5"/>
+                        <a:srgbClr val="C6C9CD"/>
                       </a:solidFill>
                       <a:prstDash val="solid"/>
                       <a:round/>
@@ -3944,7 +3405,7 @@
                     </a:lnR>
                     <a:lnT w="6350" cap="flat" cmpd="sng" algn="ctr">
                       <a:solidFill>
-                        <a:srgbClr val="B5B5B5"/>
+                        <a:srgbClr val="C6C9CD"/>
                       </a:solidFill>
                       <a:prstDash val="solid"/>
                       <a:round/>
@@ -3953,7 +3414,7 @@
                     </a:lnT>
                     <a:lnB w="6350" cap="flat" cmpd="sng" algn="ctr">
                       <a:solidFill>
-                        <a:srgbClr val="B5B5B5"/>
+                        <a:srgbClr val="C6C9CD"/>
                       </a:solidFill>
                       <a:prstDash val="solid"/>
                       <a:round/>
@@ -3972,14 +3433,11 @@
                     </a:bodyPr>
                     <a:lstStyle/>
                     <a:p>
-                      <a:pPr algn="l" indent="0" marL="0">
-                        <a:lnSpc>
-                          <a:spcPct val="100000"/>
-                        </a:lnSpc>
+                      <a:pPr algn="ctr" indent="0" marL="0">
                         <a:buNone/>
                       </a:pPr>
                       <a:r>
-                        <a:rPr lang="en-US" sz="1200" dirty="0">
+                        <a:rPr lang="en-US" sz="1000" dirty="0">
                           <a:solidFill>
                             <a:srgbClr val="000000"/>
                           </a:solidFill>
@@ -3989,21 +3447,18 @@
                         </a:rPr>
                         <a:t>Training &amp; support</a:t>
                       </a:r>
-                      <a:endParaRPr lang="en-US" sz="1200" dirty="0">
+                      <a:endParaRPr lang="en-US" sz="1000" dirty="0">
                         <a:latin typeface="Arial" charset="0"/>
                         <a:ea typeface="Arial" charset="0"/>
                         <a:cs typeface="Arial" charset="0"/>
                       </a:endParaRPr>
                     </a:p>
                     <a:p>
-                      <a:pPr algn="l" indent="0" marL="0">
-                        <a:lnSpc>
-                          <a:spcPct val="100000"/>
-                        </a:lnSpc>
+                      <a:pPr algn="ctr" indent="0" marL="0">
                         <a:buNone/>
                       </a:pPr>
                       <a:r>
-                        <a:rPr lang="en-US" sz="1200" dirty="0">
+                        <a:rPr lang="en-US" sz="1000" dirty="0">
                           <a:solidFill>
                             <a:srgbClr val="000000"/>
                           </a:solidFill>
@@ -4013,17 +3468,17 @@
                         </a:rPr>
                         <a:t>Measurement plan</a:t>
                       </a:r>
-                      <a:endParaRPr lang="en-US" sz="1200" dirty="0">
+                      <a:endParaRPr lang="en-US" sz="1000" dirty="0">
                         <a:latin typeface="Arial" charset="0"/>
                         <a:ea typeface="Arial" charset="0"/>
                         <a:cs typeface="Arial" charset="0"/>
                       </a:endParaRPr>
                     </a:p>
                   </a:txBody>
-                  <a:tcPr marL="63500" marR="63500" marT="38100" marB="38100" anchor="ctr">
+                  <a:tcPr marL="101600" marR="101600" marT="38100" marB="38100" anchor="ctr">
                     <a:lnL w="6350" cap="flat" cmpd="sng" algn="ctr">
                       <a:solidFill>
-                        <a:srgbClr val="B5B5B5"/>
+                        <a:srgbClr val="C6C9CD"/>
                       </a:solidFill>
                       <a:prstDash val="solid"/>
                       <a:round/>
@@ -4032,7 +3487,7 @@
                     </a:lnL>
                     <a:lnR w="6350" cap="flat" cmpd="sng" algn="ctr">
                       <a:solidFill>
-                        <a:srgbClr val="B5B5B5"/>
+                        <a:srgbClr val="C6C9CD"/>
                       </a:solidFill>
                       <a:prstDash val="solid"/>
                       <a:round/>
@@ -4041,7 +3496,7 @@
                     </a:lnR>
                     <a:lnT w="6350" cap="flat" cmpd="sng" algn="ctr">
                       <a:solidFill>
-                        <a:srgbClr val="B5B5B5"/>
+                        <a:srgbClr val="C6C9CD"/>
                       </a:solidFill>
                       <a:prstDash val="solid"/>
                       <a:round/>
@@ -4050,7 +3505,7 @@
                     </a:lnT>
                     <a:lnB w="6350" cap="flat" cmpd="sng" algn="ctr">
                       <a:solidFill>
-                        <a:srgbClr val="B5B5B5"/>
+                        <a:srgbClr val="C6C9CD"/>
                       </a:solidFill>
                       <a:prstDash val="solid"/>
                       <a:round/>
@@ -4069,14 +3524,11 @@
                     </a:bodyPr>
                     <a:lstStyle/>
                     <a:p>
-                      <a:pPr algn="l" indent="0" marL="0">
-                        <a:lnSpc>
-                          <a:spcPct val="100000"/>
-                        </a:lnSpc>
+                      <a:pPr algn="ctr" indent="0" marL="0">
                         <a:buNone/>
                       </a:pPr>
                       <a:r>
-                        <a:rPr lang="en-US" sz="1200" dirty="0">
+                        <a:rPr lang="en-US" sz="1000" dirty="0">
                           <a:solidFill>
                             <a:srgbClr val="000000"/>
                           </a:solidFill>
@@ -4086,21 +3538,18 @@
                         </a:rPr>
                         <a:t>Weekly usage</a:t>
                       </a:r>
-                      <a:endParaRPr lang="en-US" sz="1200" dirty="0">
+                      <a:endParaRPr lang="en-US" sz="1000" dirty="0">
                         <a:latin typeface="Arial" charset="0"/>
                         <a:ea typeface="Arial" charset="0"/>
                         <a:cs typeface="Arial" charset="0"/>
                       </a:endParaRPr>
                     </a:p>
                     <a:p>
-                      <a:pPr algn="l" indent="0" marL="0">
-                        <a:lnSpc>
-                          <a:spcPct val="100000"/>
-                        </a:lnSpc>
+                      <a:pPr algn="ctr" indent="0" marL="0">
                         <a:buNone/>
                       </a:pPr>
                       <a:r>
-                        <a:rPr lang="en-US" sz="1200" dirty="0">
+                        <a:rPr lang="en-US" sz="1000" dirty="0">
                           <a:solidFill>
                             <a:srgbClr val="000000"/>
                           </a:solidFill>
@@ -4110,17 +3559,17 @@
                         </a:rPr>
                         <a:t>Feedback sessions</a:t>
                       </a:r>
-                      <a:endParaRPr lang="en-US" sz="1200" dirty="0">
+                      <a:endParaRPr lang="en-US" sz="1000" dirty="0">
                         <a:latin typeface="Arial" charset="0"/>
                         <a:ea typeface="Arial" charset="0"/>
                         <a:cs typeface="Arial" charset="0"/>
                       </a:endParaRPr>
                     </a:p>
                   </a:txBody>
-                  <a:tcPr marL="63500" marR="63500" marT="38100" marB="38100" anchor="ctr">
+                  <a:tcPr marL="101600" marR="101600" marT="38100" marB="38100" anchor="ctr">
                     <a:lnL w="6350" cap="flat" cmpd="sng" algn="ctr">
                       <a:solidFill>
-                        <a:srgbClr val="B5B5B5"/>
+                        <a:srgbClr val="C6C9CD"/>
                       </a:solidFill>
                       <a:prstDash val="solid"/>
                       <a:round/>
@@ -4129,7 +3578,7 @@
                     </a:lnL>
                     <a:lnR w="6350" cap="flat" cmpd="sng" algn="ctr">
                       <a:solidFill>
-                        <a:srgbClr val="B5B5B5"/>
+                        <a:srgbClr val="C6C9CD"/>
                       </a:solidFill>
                       <a:prstDash val="solid"/>
                       <a:round/>
@@ -4138,7 +3587,7 @@
                     </a:lnR>
                     <a:lnT w="6350" cap="flat" cmpd="sng" algn="ctr">
                       <a:solidFill>
-                        <a:srgbClr val="B5B5B5"/>
+                        <a:srgbClr val="C6C9CD"/>
                       </a:solidFill>
                       <a:prstDash val="solid"/>
                       <a:round/>
@@ -4147,7 +3596,7 @@
                     </a:lnT>
                     <a:lnB w="6350" cap="flat" cmpd="sng" algn="ctr">
                       <a:solidFill>
-                        <a:srgbClr val="B5B5B5"/>
+                        <a:srgbClr val="C6C9CD"/>
                       </a:solidFill>
                       <a:prstDash val="solid"/>
                       <a:round/>
@@ -4166,14 +3615,11 @@
                     </a:bodyPr>
                     <a:lstStyle/>
                     <a:p>
-                      <a:pPr algn="l" indent="0" marL="0">
-                        <a:lnSpc>
-                          <a:spcPct val="100000"/>
-                        </a:lnSpc>
+                      <a:pPr algn="ctr" indent="0" marL="0">
                         <a:buNone/>
                       </a:pPr>
                       <a:r>
-                        <a:rPr lang="en-US" sz="1200" dirty="0">
+                        <a:rPr lang="en-US" sz="1000" dirty="0">
                           <a:solidFill>
                             <a:srgbClr val="000000"/>
                           </a:solidFill>
@@ -4183,21 +3629,18 @@
                         </a:rPr>
                         <a:t>Benefit case</a:t>
                       </a:r>
-                      <a:endParaRPr lang="en-US" sz="1200" dirty="0">
+                      <a:endParaRPr lang="en-US" sz="1000" dirty="0">
                         <a:latin typeface="Arial" charset="0"/>
                         <a:ea typeface="Arial" charset="0"/>
                         <a:cs typeface="Arial" charset="0"/>
                       </a:endParaRPr>
                     </a:p>
                     <a:p>
-                      <a:pPr algn="l" indent="0" marL="0">
-                        <a:lnSpc>
-                          <a:spcPct val="100000"/>
-                        </a:lnSpc>
+                      <a:pPr algn="ctr" indent="0" marL="0">
                         <a:buNone/>
                       </a:pPr>
                       <a:r>
-                        <a:rPr lang="en-US" sz="1200" dirty="0">
+                        <a:rPr lang="en-US" sz="1000" dirty="0">
                           <a:solidFill>
                             <a:srgbClr val="000000"/>
                           </a:solidFill>
@@ -4207,17 +3650,17 @@
                         </a:rPr>
                         <a:t>Scale recommendation</a:t>
                       </a:r>
-                      <a:endParaRPr lang="en-US" sz="1200" dirty="0">
+                      <a:endParaRPr lang="en-US" sz="1000" dirty="0">
                         <a:latin typeface="Arial" charset="0"/>
                         <a:ea typeface="Arial" charset="0"/>
                         <a:cs typeface="Arial" charset="0"/>
                       </a:endParaRPr>
                     </a:p>
                   </a:txBody>
-                  <a:tcPr marL="63500" marR="63500" marT="38100" marB="38100" anchor="ctr">
+                  <a:tcPr marL="101600" marR="101600" marT="38100" marB="38100" anchor="ctr">
                     <a:lnL w="6350" cap="flat" cmpd="sng" algn="ctr">
                       <a:solidFill>
-                        <a:srgbClr val="B5B5B5"/>
+                        <a:srgbClr val="C6C9CD"/>
                       </a:solidFill>
                       <a:prstDash val="solid"/>
                       <a:round/>
@@ -4226,7 +3669,7 @@
                     </a:lnL>
                     <a:lnR w="6350" cap="flat" cmpd="sng" algn="ctr">
                       <a:solidFill>
-                        <a:srgbClr val="B5B5B5"/>
+                        <a:srgbClr val="C6C9CD"/>
                       </a:solidFill>
                       <a:prstDash val="solid"/>
                       <a:round/>
@@ -4235,7 +3678,7 @@
                     </a:lnR>
                     <a:lnT w="6350" cap="flat" cmpd="sng" algn="ctr">
                       <a:solidFill>
-                        <a:srgbClr val="B5B5B5"/>
+                        <a:srgbClr val="C6C9CD"/>
                       </a:solidFill>
                       <a:prstDash val="solid"/>
                       <a:round/>
@@ -4244,7 +3687,7 @@
                     </a:lnT>
                     <a:lnB w="6350" cap="flat" cmpd="sng" algn="ctr">
                       <a:solidFill>
-                        <a:srgbClr val="B5B5B5"/>
+                        <a:srgbClr val="C6C9CD"/>
                       </a:solidFill>
                       <a:prstDash val="solid"/>
                       <a:round/>
@@ -4261,272 +3704,94 @@
           </a:graphicData>
         </a:graphic>
       </p:graphicFrame>
-      <p:sp>
-        <p:nvSpPr>
-          <p:cNvPr id="21" name="gate-1-marker"/>
-          <p:cNvSpPr/>
+      <p:cxnSp>
+        <p:nvCxnSpPr>
+          <p:cNvPr id="10" name="SC_CONNECTOR__gate-flow-1__0"/>
+          <p:cNvCxnSpPr/>
           <p:nvPr/>
-        </p:nvSpPr>
+        </p:nvCxnSpPr>
         <p:spPr>
           <a:xfrm>
-            <a:off x="8655050" y="1873250"/>
-            <a:ext cx="190500" cy="190500"/>
+            <a:off x="1549400" y="4800600"/>
+            <a:ext cx="1663700" cy="0"/>
           </a:xfrm>
-          <a:prstGeom prst="ellipse">
+          <a:prstGeom prst="line">
             <a:avLst/>
           </a:prstGeom>
-          <a:solidFill>
-            <a:srgbClr val="FFFFFF"/>
-          </a:solidFill>
-          <a:ln w="44450">
+          <a:noFill/>
+          <a:ln w="19050">
             <a:solidFill>
               <a:srgbClr val="FD5108"/>
             </a:solidFill>
             <a:prstDash val="solid"/>
+            <a:round/>
+            <a:headEnd type="none"/>
+            <a:tailEnd type="triangle" w="lg" len="lg"/>
           </a:ln>
         </p:spPr>
-      </p:sp>
-      <p:sp>
-        <p:nvSpPr>
-          <p:cNvPr id="22" name="gate-2-marker"/>
-          <p:cNvSpPr/>
+      </p:cxnSp>
+      <p:cxnSp>
+        <p:nvCxnSpPr>
+          <p:cNvPr id="11" name="SC_CONNECTOR__gate-flow-2__0"/>
+          <p:cNvCxnSpPr/>
           <p:nvPr/>
-        </p:nvSpPr>
+        </p:nvCxnSpPr>
         <p:spPr>
           <a:xfrm>
-            <a:off x="9569450" y="1873250"/>
-            <a:ext cx="190500" cy="190500"/>
+            <a:off x="3517900" y="4800600"/>
+            <a:ext cx="1663700" cy="0"/>
           </a:xfrm>
-          <a:prstGeom prst="ellipse">
+          <a:prstGeom prst="line">
             <a:avLst/>
           </a:prstGeom>
-          <a:solidFill>
-            <a:srgbClr val="FFFFFF"/>
-          </a:solidFill>
-          <a:ln w="44450">
+          <a:noFill/>
+          <a:ln w="19050">
             <a:solidFill>
               <a:srgbClr val="FD5108"/>
             </a:solidFill>
             <a:prstDash val="solid"/>
+            <a:round/>
+            <a:headEnd type="none"/>
+            <a:tailEnd type="triangle" w="lg" len="lg"/>
           </a:ln>
         </p:spPr>
-      </p:sp>
-      <p:sp>
-        <p:nvSpPr>
-          <p:cNvPr id="23" name="gate-3-marker"/>
-          <p:cNvSpPr/>
+      </p:cxnSp>
+      <p:cxnSp>
+        <p:nvCxnSpPr>
+          <p:cNvPr id="12" name="SC_CONNECTOR__gate-flow-3__0"/>
+          <p:cNvCxnSpPr/>
           <p:nvPr/>
-        </p:nvSpPr>
+        </p:nvCxnSpPr>
         <p:spPr>
           <a:xfrm>
-            <a:off x="10477500" y="1873250"/>
-            <a:ext cx="190500" cy="190500"/>
+            <a:off x="5486400" y="4800600"/>
+            <a:ext cx="1663700" cy="0"/>
           </a:xfrm>
-          <a:prstGeom prst="ellipse">
+          <a:prstGeom prst="line">
             <a:avLst/>
           </a:prstGeom>
-          <a:solidFill>
-            <a:srgbClr val="FFFFFF"/>
-          </a:solidFill>
-          <a:ln w="44450">
+          <a:noFill/>
+          <a:ln w="19050">
             <a:solidFill>
               <a:srgbClr val="FD5108"/>
             </a:solidFill>
             <a:prstDash val="solid"/>
+            <a:round/>
+            <a:headEnd type="none"/>
+            <a:tailEnd type="triangle" w="lg" len="lg"/>
           </a:ln>
         </p:spPr>
-      </p:sp>
+      </p:cxnSp>
       <p:sp>
         <p:nvSpPr>
-          <p:cNvPr id="24" name="gate-4-marker"/>
-          <p:cNvSpPr/>
-          <p:nvPr/>
-        </p:nvSpPr>
-        <p:spPr>
-          <a:xfrm>
-            <a:off x="11410950" y="1873250"/>
-            <a:ext cx="190500" cy="190500"/>
-          </a:xfrm>
-          <a:prstGeom prst="ellipse">
-            <a:avLst/>
-          </a:prstGeom>
-          <a:solidFill>
-            <a:srgbClr val="FFFFFF"/>
-          </a:solidFill>
-          <a:ln w="44450">
-            <a:solidFill>
-              <a:srgbClr val="FD5108"/>
-            </a:solidFill>
-            <a:prstDash val="solid"/>
-          </a:ln>
-        </p:spPr>
-      </p:sp>
-      <p:sp>
-        <p:nvSpPr>
-          <p:cNvPr id="25" name="dependency-1-arrow"/>
-          <p:cNvSpPr/>
-          <p:nvPr/>
-        </p:nvSpPr>
-        <p:spPr>
-          <a:xfrm>
-            <a:off x="8496300" y="4159250"/>
-            <a:ext cx="139700" cy="139700"/>
-          </a:xfrm>
-          <a:custGeom>
-            <a:avLst/>
-            <a:gdLst/>
-            <a:ahLst/>
-            <a:cxnLst/>
-            <a:rect l="l" t="t" r="r" b="b"/>
-            <a:pathLst>
-              <a:path w="139700" h="139700">
-                <a:moveTo>
-                  <a:pt x="0" y="63500"/>
-                </a:moveTo>
-                <a:lnTo>
-                  <a:pt x="139700" y="63500"/>
-                </a:lnTo>
-                <a:moveTo>
-                  <a:pt x="76200" y="0"/>
-                </a:moveTo>
-                <a:lnTo>
-                  <a:pt x="139700" y="63500"/>
-                </a:lnTo>
-                <a:lnTo>
-                  <a:pt x="76200" y="127000"/>
-                </a:lnTo>
-              </a:path>
-            </a:pathLst>
-          </a:custGeom>
-          <a:solidFill>
-            <a:srgbClr val="FFFFFF">
-              <a:alpha val="0"/>
-            </a:srgbClr>
-          </a:solidFill>
-          <a:ln w="12700">
-            <a:solidFill>
-              <a:srgbClr val="FD5108"/>
-            </a:solidFill>
-            <a:prstDash val="solid"/>
-            <a:headEnd type="none"/>
-            <a:tailEnd type="none"/>
-          </a:ln>
-        </p:spPr>
-      </p:sp>
-      <p:sp>
-        <p:nvSpPr>
-          <p:cNvPr id="26" name="dependency-2-arrow"/>
-          <p:cNvSpPr/>
-          <p:nvPr/>
-        </p:nvSpPr>
-        <p:spPr>
-          <a:xfrm>
-            <a:off x="8496300" y="4584700"/>
-            <a:ext cx="139700" cy="139700"/>
-          </a:xfrm>
-          <a:custGeom>
-            <a:avLst/>
-            <a:gdLst/>
-            <a:ahLst/>
-            <a:cxnLst/>
-            <a:rect l="l" t="t" r="r" b="b"/>
-            <a:pathLst>
-              <a:path w="139700" h="139700">
-                <a:moveTo>
-                  <a:pt x="0" y="63500"/>
-                </a:moveTo>
-                <a:lnTo>
-                  <a:pt x="139700" y="63500"/>
-                </a:lnTo>
-                <a:moveTo>
-                  <a:pt x="76200" y="0"/>
-                </a:moveTo>
-                <a:lnTo>
-                  <a:pt x="139700" y="63500"/>
-                </a:lnTo>
-                <a:lnTo>
-                  <a:pt x="76200" y="127000"/>
-                </a:lnTo>
-              </a:path>
-            </a:pathLst>
-          </a:custGeom>
-          <a:solidFill>
-            <a:srgbClr val="FFFFFF">
-              <a:alpha val="0"/>
-            </a:srgbClr>
-          </a:solidFill>
-          <a:ln w="12700">
-            <a:solidFill>
-              <a:srgbClr val="FD5108"/>
-            </a:solidFill>
-            <a:prstDash val="solid"/>
-            <a:headEnd type="none"/>
-            <a:tailEnd type="none"/>
-          </a:ln>
-        </p:spPr>
-      </p:sp>
-      <p:sp>
-        <p:nvSpPr>
-          <p:cNvPr id="27" name="dependency-3-arrow"/>
-          <p:cNvSpPr/>
-          <p:nvPr/>
-        </p:nvSpPr>
-        <p:spPr>
-          <a:xfrm>
-            <a:off x="8496300" y="5010150"/>
-            <a:ext cx="139700" cy="139700"/>
-          </a:xfrm>
-          <a:custGeom>
-            <a:avLst/>
-            <a:gdLst/>
-            <a:ahLst/>
-            <a:cxnLst/>
-            <a:rect l="l" t="t" r="r" b="b"/>
-            <a:pathLst>
-              <a:path w="139700" h="139700">
-                <a:moveTo>
-                  <a:pt x="0" y="63500"/>
-                </a:moveTo>
-                <a:lnTo>
-                  <a:pt x="139700" y="63500"/>
-                </a:lnTo>
-                <a:moveTo>
-                  <a:pt x="76200" y="0"/>
-                </a:moveTo>
-                <a:lnTo>
-                  <a:pt x="139700" y="63500"/>
-                </a:lnTo>
-                <a:lnTo>
-                  <a:pt x="76200" y="127000"/>
-                </a:lnTo>
-              </a:path>
-            </a:pathLst>
-          </a:custGeom>
-          <a:solidFill>
-            <a:srgbClr val="FFFFFF">
-              <a:alpha val="0"/>
-            </a:srgbClr>
-          </a:solidFill>
-          <a:ln w="12700">
-            <a:solidFill>
-              <a:srgbClr val="FD5108"/>
-            </a:solidFill>
-            <a:prstDash val="solid"/>
-            <a:headEnd type="none"/>
-            <a:tailEnd type="none"/>
-          </a:ln>
-        </p:spPr>
-      </p:sp>
-      <p:sp>
-        <p:nvSpPr>
-          <p:cNvPr id="28" name="headline"/>
+          <p:cNvPr id="13" name="headline"/>
           <p:cNvSpPr txBox="1"/>
           <p:nvPr/>
         </p:nvSpPr>
         <p:spPr>
           <a:xfrm>
-            <a:off x="304800" y="527050"/>
-            <a:ext cx="11588750" cy="508000"/>
+            <a:off x="292100" y="533400"/>
+            <a:ext cx="11607800" cy="482600"/>
           </a:xfrm>
           <a:prstGeom prst="rect">
             <a:avLst/>
@@ -4564,14 +3829,14 @@
       </p:sp>
       <p:sp>
         <p:nvSpPr>
-          <p:cNvPr id="29" name="subtitle"/>
+          <p:cNvPr id="14" name="subtitle"/>
           <p:cNvSpPr txBox="1"/>
           <p:nvPr/>
         </p:nvSpPr>
         <p:spPr>
           <a:xfrm>
-            <a:off x="304800" y="1060450"/>
-            <a:ext cx="11582400" cy="317500"/>
+            <a:off x="298450" y="1047750"/>
+            <a:ext cx="11588750" cy="304800"/>
           </a:xfrm>
           <a:prstGeom prst="rect">
             <a:avLst/>
@@ -4609,14 +3874,14 @@
       </p:sp>
       <p:sp>
         <p:nvSpPr>
-          <p:cNvPr id="30" name="gates-heading"/>
+          <p:cNvPr id="15" name="gates-heading"/>
           <p:cNvSpPr txBox="1"/>
           <p:nvPr/>
         </p:nvSpPr>
         <p:spPr>
           <a:xfrm>
-            <a:off x="8477250" y="1536700"/>
-            <a:ext cx="3365500" cy="273050"/>
+            <a:off x="273050" y="4324350"/>
+            <a:ext cx="5715000" cy="228600"/>
           </a:xfrm>
           <a:prstGeom prst="rect">
             <a:avLst/>
@@ -4638,7 +3903,7 @@
               <a:defRPr spc="0"/>
             </a:pPr>
             <a:r>
-              <a:rPr lang="en-US" sz="1400" b="1" dirty="0" spc="0">
+              <a:rPr lang="en-US" sz="1250" b="1" dirty="0" spc="0">
                 <a:solidFill>
                   <a:srgbClr val="000000"/>
                 </a:solidFill>
@@ -4648,20 +3913,20 @@
               </a:rPr>
               <a:t>EVIDENCE GATES</a:t>
             </a:r>
-            <a:endParaRPr lang="en-US" sz="1400" dirty="0" spc="0"/>
+            <a:endParaRPr lang="en-US" sz="1250" dirty="0" spc="0"/>
           </a:p>
         </p:txBody>
       </p:sp>
       <p:sp>
         <p:nvSpPr>
-          <p:cNvPr id="31" name="gate-1-label"/>
+          <p:cNvPr id="16" name="gate-label-g1"/>
           <p:cNvSpPr txBox="1"/>
           <p:nvPr/>
         </p:nvSpPr>
         <p:spPr>
           <a:xfrm>
-            <a:off x="8401050" y="2178050"/>
-            <a:ext cx="742950" cy="266700"/>
+            <a:off x="571500" y="5035550"/>
+            <a:ext cx="1651000" cy="203200"/>
           </a:xfrm>
           <a:prstGeom prst="rect">
             <a:avLst/>
@@ -4683,7 +3948,7 @@
               <a:defRPr spc="0"/>
             </a:pPr>
             <a:r>
-              <a:rPr lang="en-US" sz="1600" b="1" dirty="0" spc="0">
+              <a:rPr lang="en-US" sz="1150" b="1" dirty="0" spc="0">
                 <a:solidFill>
                   <a:srgbClr val="FD5108"/>
                 </a:solidFill>
@@ -4691,22 +3956,22 @@
                 <a:ea typeface="Arial" pitchFamily="34" charset="-122"/>
                 <a:cs typeface="Arial" pitchFamily="34" charset="-120"/>
               </a:rPr>
-              <a:t>G1</a:t>
+              <a:t>G1 · Week 2</a:t>
             </a:r>
-            <a:endParaRPr lang="en-US" sz="1600" dirty="0" spc="0"/>
+            <a:endParaRPr lang="en-US" sz="1150" dirty="0" spc="0"/>
           </a:p>
         </p:txBody>
       </p:sp>
       <p:sp>
         <p:nvSpPr>
-          <p:cNvPr id="32" name="gate-1-week"/>
+          <p:cNvPr id="17" name="gate-detail-g1"/>
           <p:cNvSpPr txBox="1"/>
           <p:nvPr/>
         </p:nvSpPr>
         <p:spPr>
           <a:xfrm>
-            <a:off x="8369300" y="2425700"/>
-            <a:ext cx="806450" cy="241300"/>
+            <a:off x="444500" y="5251450"/>
+            <a:ext cx="1905000" cy="222250"/>
           </a:xfrm>
           <a:prstGeom prst="rect">
             <a:avLst/>
@@ -4728,7 +3993,7 @@
               <a:defRPr spc="0"/>
             </a:pPr>
             <a:r>
-              <a:rPr lang="en-US" sz="1400" b="1" dirty="0" spc="0">
+              <a:rPr lang="en-US" sz="950" dirty="0" spc="0">
                 <a:solidFill>
                   <a:srgbClr val="000000"/>
                 </a:solidFill>
@@ -4736,22 +4001,22 @@
                 <a:ea typeface="Arial" pitchFamily="34" charset="-122"/>
                 <a:cs typeface="Arial" pitchFamily="34" charset="-120"/>
               </a:rPr>
-              <a:t>Week 2</a:t>
+              <a:t>Corpus + access signed</a:t>
             </a:r>
-            <a:endParaRPr lang="en-US" sz="1400" dirty="0" spc="0"/>
+            <a:endParaRPr lang="en-US" sz="950" dirty="0" spc="0"/>
           </a:p>
         </p:txBody>
       </p:sp>
       <p:sp>
         <p:nvSpPr>
-          <p:cNvPr id="33" name="gate-1-evidence"/>
+          <p:cNvPr id="18" name="gate-label-g2"/>
           <p:cNvSpPr txBox="1"/>
           <p:nvPr/>
         </p:nvSpPr>
         <p:spPr>
           <a:xfrm>
-            <a:off x="8350250" y="2787650"/>
-            <a:ext cx="844550" cy="723900"/>
+            <a:off x="2540000" y="5035550"/>
+            <a:ext cx="1651000" cy="203200"/>
           </a:xfrm>
           <a:prstGeom prst="rect">
             <a:avLst/>
@@ -4773,72 +4038,30 @@
               <a:defRPr spc="0"/>
             </a:pPr>
             <a:r>
-              <a:rPr lang="en-US" sz="1200" dirty="0" spc="0">
+              <a:rPr lang="en-US" sz="1150" b="1" dirty="0" spc="0">
                 <a:solidFill>
-                  <a:srgbClr val="000000"/>
+                  <a:srgbClr val="FD5108"/>
                 </a:solidFill>
                 <a:latin typeface="Arial" pitchFamily="34" charset="0"/>
                 <a:ea typeface="Arial" pitchFamily="34" charset="-122"/>
                 <a:cs typeface="Arial" pitchFamily="34" charset="-120"/>
               </a:rPr>
-              <a:t>Corpus +</a:t>
+              <a:t>G2 · Week 4</a:t>
             </a:r>
-            <a:endParaRPr lang="en-US" sz="1200" dirty="0" spc="0"/>
-          </a:p>
-          <a:p>
-            <a:pPr algn="ctr" indent="0" marL="0">
-              <a:lnSpc>
-                <a:spcPct val="100000"/>
-              </a:lnSpc>
-              <a:buNone/>
-              <a:defRPr spc="0"/>
-            </a:pPr>
-            <a:r>
-              <a:rPr lang="en-US" sz="1200" dirty="0" spc="0">
-                <a:solidFill>
-                  <a:srgbClr val="000000"/>
-                </a:solidFill>
-                <a:latin typeface="Arial" pitchFamily="34" charset="0"/>
-                <a:ea typeface="Arial" pitchFamily="34" charset="-122"/>
-                <a:cs typeface="Arial" pitchFamily="34" charset="-120"/>
-              </a:rPr>
-              <a:t>access</a:t>
-            </a:r>
-            <a:endParaRPr lang="en-US" sz="1200" dirty="0" spc="0"/>
-          </a:p>
-          <a:p>
-            <a:pPr algn="ctr" indent="0" marL="0">
-              <a:lnSpc>
-                <a:spcPct val="100000"/>
-              </a:lnSpc>
-              <a:buNone/>
-              <a:defRPr spc="0"/>
-            </a:pPr>
-            <a:r>
-              <a:rPr lang="en-US" sz="1200" dirty="0" spc="0">
-                <a:solidFill>
-                  <a:srgbClr val="000000"/>
-                </a:solidFill>
-                <a:latin typeface="Arial" pitchFamily="34" charset="0"/>
-                <a:ea typeface="Arial" pitchFamily="34" charset="-122"/>
-                <a:cs typeface="Arial" pitchFamily="34" charset="-120"/>
-              </a:rPr>
-              <a:t>signed</a:t>
-            </a:r>
-            <a:endParaRPr lang="en-US" sz="1200" dirty="0" spc="0"/>
+            <a:endParaRPr lang="en-US" sz="1150" dirty="0" spc="0"/>
           </a:p>
         </p:txBody>
       </p:sp>
       <p:sp>
         <p:nvSpPr>
-          <p:cNvPr id="34" name="gate-2-label"/>
+          <p:cNvPr id="19" name="gate-detail-g2"/>
           <p:cNvSpPr txBox="1"/>
           <p:nvPr/>
         </p:nvSpPr>
         <p:spPr>
           <a:xfrm>
-            <a:off x="9296400" y="2178050"/>
-            <a:ext cx="742950" cy="266700"/>
+            <a:off x="2413000" y="5251450"/>
+            <a:ext cx="1905000" cy="222250"/>
           </a:xfrm>
           <a:prstGeom prst="rect">
             <a:avLst/>
@@ -4860,30 +4083,30 @@
               <a:defRPr spc="0"/>
             </a:pPr>
             <a:r>
-              <a:rPr lang="en-US" sz="1600" b="1" dirty="0" spc="0">
+              <a:rPr lang="en-US" sz="950" dirty="0" spc="0">
                 <a:solidFill>
-                  <a:srgbClr val="FD5108"/>
+                  <a:srgbClr val="000000"/>
                 </a:solidFill>
                 <a:latin typeface="Arial" pitchFamily="34" charset="0"/>
                 <a:ea typeface="Arial" pitchFamily="34" charset="-122"/>
                 <a:cs typeface="Arial" pitchFamily="34" charset="-120"/>
               </a:rPr>
-              <a:t>G2</a:t>
+              <a:t>Test pack approved</a:t>
             </a:r>
-            <a:endParaRPr lang="en-US" sz="1600" dirty="0" spc="0"/>
+            <a:endParaRPr lang="en-US" sz="950" dirty="0" spc="0"/>
           </a:p>
         </p:txBody>
       </p:sp>
       <p:sp>
         <p:nvSpPr>
-          <p:cNvPr id="35" name="gate-2-week"/>
+          <p:cNvPr id="20" name="gate-label-g3"/>
           <p:cNvSpPr txBox="1"/>
           <p:nvPr/>
         </p:nvSpPr>
         <p:spPr>
           <a:xfrm>
-            <a:off x="9264650" y="2425700"/>
-            <a:ext cx="806450" cy="241300"/>
+            <a:off x="4508500" y="5035550"/>
+            <a:ext cx="1651000" cy="203200"/>
           </a:xfrm>
           <a:prstGeom prst="rect">
             <a:avLst/>
@@ -4905,30 +4128,30 @@
               <a:defRPr spc="0"/>
             </a:pPr>
             <a:r>
-              <a:rPr lang="en-US" sz="1400" b="1" dirty="0" spc="0">
+              <a:rPr lang="en-US" sz="1150" b="1" dirty="0" spc="0">
                 <a:solidFill>
-                  <a:srgbClr val="000000"/>
+                  <a:srgbClr val="FD5108"/>
                 </a:solidFill>
                 <a:latin typeface="Arial" pitchFamily="34" charset="0"/>
                 <a:ea typeface="Arial" pitchFamily="34" charset="-122"/>
                 <a:cs typeface="Arial" pitchFamily="34" charset="-120"/>
               </a:rPr>
-              <a:t>Week 4</a:t>
+              <a:t>G3 · Week 8</a:t>
             </a:r>
-            <a:endParaRPr lang="en-US" sz="1400" dirty="0" spc="0"/>
+            <a:endParaRPr lang="en-US" sz="1150" dirty="0" spc="0"/>
           </a:p>
         </p:txBody>
       </p:sp>
       <p:sp>
         <p:nvSpPr>
-          <p:cNvPr id="36" name="gate-2-evidence"/>
+          <p:cNvPr id="21" name="gate-detail-g3"/>
           <p:cNvSpPr txBox="1"/>
           <p:nvPr/>
         </p:nvSpPr>
         <p:spPr>
           <a:xfrm>
-            <a:off x="9245600" y="2787650"/>
-            <a:ext cx="844550" cy="723900"/>
+            <a:off x="4381500" y="5251450"/>
+            <a:ext cx="1905000" cy="222250"/>
           </a:xfrm>
           <a:prstGeom prst="rect">
             <a:avLst/>
@@ -4950,7 +4173,7 @@
               <a:defRPr spc="0"/>
             </a:pPr>
             <a:r>
-              <a:rPr lang="en-US" sz="1200" dirty="0" spc="0">
+              <a:rPr lang="en-US" sz="950" dirty="0" spc="0">
                 <a:solidFill>
                   <a:srgbClr val="000000"/>
                 </a:solidFill>
@@ -4958,43 +4181,22 @@
                 <a:ea typeface="Arial" pitchFamily="34" charset="-122"/>
                 <a:cs typeface="Arial" pitchFamily="34" charset="-120"/>
               </a:rPr>
-              <a:t>Test pack</a:t>
+              <a:t>10 tasks reviewed</a:t>
             </a:r>
-            <a:endParaRPr lang="en-US" sz="1200" dirty="0" spc="0"/>
-          </a:p>
-          <a:p>
-            <a:pPr algn="ctr" indent="0" marL="0">
-              <a:lnSpc>
-                <a:spcPct val="100000"/>
-              </a:lnSpc>
-              <a:buNone/>
-              <a:defRPr spc="0"/>
-            </a:pPr>
-            <a:r>
-              <a:rPr lang="en-US" sz="1200" dirty="0" spc="0">
-                <a:solidFill>
-                  <a:srgbClr val="000000"/>
-                </a:solidFill>
-                <a:latin typeface="Arial" pitchFamily="34" charset="0"/>
-                <a:ea typeface="Arial" pitchFamily="34" charset="-122"/>
-                <a:cs typeface="Arial" pitchFamily="34" charset="-120"/>
-              </a:rPr>
-              <a:t>approved</a:t>
-            </a:r>
-            <a:endParaRPr lang="en-US" sz="1200" dirty="0" spc="0"/>
+            <a:endParaRPr lang="en-US" sz="950" dirty="0" spc="0"/>
           </a:p>
         </p:txBody>
       </p:sp>
       <p:sp>
         <p:nvSpPr>
-          <p:cNvPr id="37" name="gate-3-label"/>
+          <p:cNvPr id="22" name="gate-label-g4"/>
           <p:cNvSpPr txBox="1"/>
           <p:nvPr/>
         </p:nvSpPr>
         <p:spPr>
           <a:xfrm>
-            <a:off x="10198100" y="2178050"/>
-            <a:ext cx="742950" cy="266700"/>
+            <a:off x="6477000" y="5035550"/>
+            <a:ext cx="1651000" cy="203200"/>
           </a:xfrm>
           <a:prstGeom prst="rect">
             <a:avLst/>
@@ -5016,7 +4218,7 @@
               <a:defRPr spc="0"/>
             </a:pPr>
             <a:r>
-              <a:rPr lang="en-US" sz="1600" b="1" dirty="0" spc="0">
+              <a:rPr lang="en-US" sz="1150" b="1" dirty="0" spc="0">
                 <a:solidFill>
                   <a:srgbClr val="FD5108"/>
                 </a:solidFill>
@@ -5024,22 +4226,22 @@
                 <a:ea typeface="Arial" pitchFamily="34" charset="-122"/>
                 <a:cs typeface="Arial" pitchFamily="34" charset="-120"/>
               </a:rPr>
-              <a:t>G3</a:t>
+              <a:t>G4 · Week 12</a:t>
             </a:r>
-            <a:endParaRPr lang="en-US" sz="1600" dirty="0" spc="0"/>
+            <a:endParaRPr lang="en-US" sz="1150" dirty="0" spc="0"/>
           </a:p>
         </p:txBody>
       </p:sp>
       <p:sp>
         <p:nvSpPr>
-          <p:cNvPr id="38" name="gate-3-week"/>
+          <p:cNvPr id="23" name="gate-detail-g4"/>
           <p:cNvSpPr txBox="1"/>
           <p:nvPr/>
         </p:nvSpPr>
         <p:spPr>
           <a:xfrm>
-            <a:off x="10166350" y="2425700"/>
-            <a:ext cx="806450" cy="241300"/>
+            <a:off x="6350000" y="5251450"/>
+            <a:ext cx="1905000" cy="222250"/>
           </a:xfrm>
           <a:prstGeom prst="rect">
             <a:avLst/>
@@ -5061,7 +4263,7 @@
               <a:defRPr spc="0"/>
             </a:pPr>
             <a:r>
-              <a:rPr lang="en-US" sz="1400" b="1" dirty="0" spc="0">
+              <a:rPr lang="en-US" sz="950" dirty="0" spc="0">
                 <a:solidFill>
                   <a:srgbClr val="000000"/>
                 </a:solidFill>
@@ -5069,265 +4271,22 @@
                 <a:ea typeface="Arial" pitchFamily="34" charset="-122"/>
                 <a:cs typeface="Arial" pitchFamily="34" charset="-120"/>
               </a:rPr>
-              <a:t>Week 8</a:t>
+              <a:t>Practice lead + CFO decide</a:t>
             </a:r>
-            <a:endParaRPr lang="en-US" sz="1400" dirty="0" spc="0"/>
+            <a:endParaRPr lang="en-US" sz="950" dirty="0" spc="0"/>
           </a:p>
         </p:txBody>
       </p:sp>
       <p:sp>
         <p:nvSpPr>
-          <p:cNvPr id="39" name="gate-3-evidence"/>
+          <p:cNvPr id="24" name="dependencies-heading"/>
           <p:cNvSpPr txBox="1"/>
           <p:nvPr/>
         </p:nvSpPr>
         <p:spPr>
           <a:xfrm>
-            <a:off x="10147300" y="2787650"/>
-            <a:ext cx="844550" cy="723900"/>
-          </a:xfrm>
-          <a:prstGeom prst="rect">
-            <a:avLst/>
-          </a:prstGeom>
-          <a:noFill/>
-          <a:ln/>
-        </p:spPr>
-        <p:txBody>
-          <a:bodyPr wrap="square" lIns="12700" tIns="12700" rIns="12700" bIns="12700" rtlCol="0" anchor="t">
-            <a:noAutofit/>
-          </a:bodyPr>
-          <a:lstStyle/>
-          <a:p>
-            <a:pPr algn="ctr" indent="0" marL="0">
-              <a:lnSpc>
-                <a:spcPct val="100000"/>
-              </a:lnSpc>
-              <a:buNone/>
-              <a:defRPr spc="0"/>
-            </a:pPr>
-            <a:r>
-              <a:rPr lang="en-US" sz="1200" dirty="0" spc="0">
-                <a:solidFill>
-                  <a:srgbClr val="000000"/>
-                </a:solidFill>
-                <a:latin typeface="Arial" pitchFamily="34" charset="0"/>
-                <a:ea typeface="Arial" pitchFamily="34" charset="-122"/>
-                <a:cs typeface="Arial" pitchFamily="34" charset="-120"/>
-              </a:rPr>
-              <a:t>10 tasks</a:t>
-            </a:r>
-            <a:endParaRPr lang="en-US" sz="1200" dirty="0" spc="0"/>
-          </a:p>
-          <a:p>
-            <a:pPr algn="ctr" indent="0" marL="0">
-              <a:lnSpc>
-                <a:spcPct val="100000"/>
-              </a:lnSpc>
-              <a:buNone/>
-              <a:defRPr spc="0"/>
-            </a:pPr>
-            <a:r>
-              <a:rPr lang="en-US" sz="1200" dirty="0" spc="0">
-                <a:solidFill>
-                  <a:srgbClr val="000000"/>
-                </a:solidFill>
-                <a:latin typeface="Arial" pitchFamily="34" charset="0"/>
-                <a:ea typeface="Arial" pitchFamily="34" charset="-122"/>
-                <a:cs typeface="Arial" pitchFamily="34" charset="-120"/>
-              </a:rPr>
-              <a:t>reviewed</a:t>
-            </a:r>
-            <a:endParaRPr lang="en-US" sz="1200" dirty="0" spc="0"/>
-          </a:p>
-        </p:txBody>
-      </p:sp>
-      <p:sp>
-        <p:nvSpPr>
-          <p:cNvPr id="40" name="gate-4-label"/>
-          <p:cNvSpPr txBox="1"/>
-          <p:nvPr/>
-        </p:nvSpPr>
-        <p:spPr>
-          <a:xfrm>
-            <a:off x="11112500" y="2178050"/>
-            <a:ext cx="742950" cy="266700"/>
-          </a:xfrm>
-          <a:prstGeom prst="rect">
-            <a:avLst/>
-          </a:prstGeom>
-          <a:noFill/>
-          <a:ln/>
-        </p:spPr>
-        <p:txBody>
-          <a:bodyPr wrap="square" lIns="12700" tIns="12700" rIns="12700" bIns="12700" rtlCol="0" anchor="t">
-            <a:noAutofit/>
-          </a:bodyPr>
-          <a:lstStyle/>
-          <a:p>
-            <a:pPr algn="ctr" indent="0" marL="0">
-              <a:lnSpc>
-                <a:spcPct val="100000"/>
-              </a:lnSpc>
-              <a:buNone/>
-              <a:defRPr spc="0"/>
-            </a:pPr>
-            <a:r>
-              <a:rPr lang="en-US" sz="1600" b="1" dirty="0" spc="0">
-                <a:solidFill>
-                  <a:srgbClr val="FD5108"/>
-                </a:solidFill>
-                <a:latin typeface="Arial" pitchFamily="34" charset="0"/>
-                <a:ea typeface="Arial" pitchFamily="34" charset="-122"/>
-                <a:cs typeface="Arial" pitchFamily="34" charset="-120"/>
-              </a:rPr>
-              <a:t>G4</a:t>
-            </a:r>
-            <a:endParaRPr lang="en-US" sz="1600" dirty="0" spc="0"/>
-          </a:p>
-        </p:txBody>
-      </p:sp>
-      <p:sp>
-        <p:nvSpPr>
-          <p:cNvPr id="41" name="gate-4-week"/>
-          <p:cNvSpPr txBox="1"/>
-          <p:nvPr/>
-        </p:nvSpPr>
-        <p:spPr>
-          <a:xfrm>
-            <a:off x="11080750" y="2425700"/>
-            <a:ext cx="806450" cy="241300"/>
-          </a:xfrm>
-          <a:prstGeom prst="rect">
-            <a:avLst/>
-          </a:prstGeom>
-          <a:noFill/>
-          <a:ln/>
-        </p:spPr>
-        <p:txBody>
-          <a:bodyPr wrap="square" lIns="12700" tIns="12700" rIns="12700" bIns="12700" rtlCol="0" anchor="t">
-            <a:noAutofit/>
-          </a:bodyPr>
-          <a:lstStyle/>
-          <a:p>
-            <a:pPr algn="ctr" indent="0" marL="0">
-              <a:lnSpc>
-                <a:spcPct val="100000"/>
-              </a:lnSpc>
-              <a:buNone/>
-              <a:defRPr spc="0"/>
-            </a:pPr>
-            <a:r>
-              <a:rPr lang="en-US" sz="1400" b="1" dirty="0" spc="0">
-                <a:solidFill>
-                  <a:srgbClr val="000000"/>
-                </a:solidFill>
-                <a:latin typeface="Arial" pitchFamily="34" charset="0"/>
-                <a:ea typeface="Arial" pitchFamily="34" charset="-122"/>
-                <a:cs typeface="Arial" pitchFamily="34" charset="-120"/>
-              </a:rPr>
-              <a:t>Week 12</a:t>
-            </a:r>
-            <a:endParaRPr lang="en-US" sz="1400" dirty="0" spc="0"/>
-          </a:p>
-        </p:txBody>
-      </p:sp>
-      <p:sp>
-        <p:nvSpPr>
-          <p:cNvPr id="42" name="gate-4-evidence"/>
-          <p:cNvSpPr txBox="1"/>
-          <p:nvPr/>
-        </p:nvSpPr>
-        <p:spPr>
-          <a:xfrm>
-            <a:off x="11061700" y="2787650"/>
-            <a:ext cx="844550" cy="723900"/>
-          </a:xfrm>
-          <a:prstGeom prst="rect">
-            <a:avLst/>
-          </a:prstGeom>
-          <a:noFill/>
-          <a:ln/>
-        </p:spPr>
-        <p:txBody>
-          <a:bodyPr wrap="square" lIns="12700" tIns="12700" rIns="12700" bIns="12700" rtlCol="0" anchor="t">
-            <a:noAutofit/>
-          </a:bodyPr>
-          <a:lstStyle/>
-          <a:p>
-            <a:pPr algn="ctr" indent="0" marL="0">
-              <a:lnSpc>
-                <a:spcPct val="100000"/>
-              </a:lnSpc>
-              <a:buNone/>
-              <a:defRPr spc="0"/>
-            </a:pPr>
-            <a:r>
-              <a:rPr lang="en-US" sz="1200" dirty="0" spc="0">
-                <a:solidFill>
-                  <a:srgbClr val="000000"/>
-                </a:solidFill>
-                <a:latin typeface="Arial" pitchFamily="34" charset="0"/>
-                <a:ea typeface="Arial" pitchFamily="34" charset="-122"/>
-                <a:cs typeface="Arial" pitchFamily="34" charset="-120"/>
-              </a:rPr>
-              <a:t>Practice</a:t>
-            </a:r>
-            <a:endParaRPr lang="en-US" sz="1200" dirty="0" spc="0"/>
-          </a:p>
-          <a:p>
-            <a:pPr algn="ctr" indent="0" marL="0">
-              <a:lnSpc>
-                <a:spcPct val="100000"/>
-              </a:lnSpc>
-              <a:buNone/>
-              <a:defRPr spc="0"/>
-            </a:pPr>
-            <a:r>
-              <a:rPr lang="en-US" sz="1200" dirty="0" spc="0">
-                <a:solidFill>
-                  <a:srgbClr val="000000"/>
-                </a:solidFill>
-                <a:latin typeface="Arial" pitchFamily="34" charset="0"/>
-                <a:ea typeface="Arial" pitchFamily="34" charset="-122"/>
-                <a:cs typeface="Arial" pitchFamily="34" charset="-120"/>
-              </a:rPr>
-              <a:t>lead + CFO</a:t>
-            </a:r>
-            <a:endParaRPr lang="en-US" sz="1200" dirty="0" spc="0"/>
-          </a:p>
-          <a:p>
-            <a:pPr algn="ctr" indent="0" marL="0">
-              <a:lnSpc>
-                <a:spcPct val="100000"/>
-              </a:lnSpc>
-              <a:buNone/>
-              <a:defRPr spc="0"/>
-            </a:pPr>
-            <a:r>
-              <a:rPr lang="en-US" sz="1200" dirty="0" spc="0">
-                <a:solidFill>
-                  <a:srgbClr val="000000"/>
-                </a:solidFill>
-                <a:latin typeface="Arial" pitchFamily="34" charset="0"/>
-                <a:ea typeface="Arial" pitchFamily="34" charset="-122"/>
-                <a:cs typeface="Arial" pitchFamily="34" charset="-120"/>
-              </a:rPr>
-              <a:t>decide</a:t>
-            </a:r>
-            <a:endParaRPr lang="en-US" sz="1200" dirty="0" spc="0"/>
-          </a:p>
-        </p:txBody>
-      </p:sp>
-      <p:sp>
-        <p:nvSpPr>
-          <p:cNvPr id="43" name="dependencies-heading"/>
-          <p:cNvSpPr txBox="1"/>
-          <p:nvPr/>
-        </p:nvSpPr>
-        <p:spPr>
-          <a:xfrm>
-            <a:off x="8445500" y="3746500"/>
-            <a:ext cx="3397250" cy="273050"/>
+            <a:off x="8636000" y="4324350"/>
+            <a:ext cx="3238500" cy="228600"/>
           </a:xfrm>
           <a:prstGeom prst="rect">
             <a:avLst/>
@@ -5349,7 +4308,7 @@
               <a:defRPr spc="0"/>
             </a:pPr>
             <a:r>
-              <a:rPr lang="en-US" sz="1400" b="1" dirty="0" spc="0">
+              <a:rPr lang="en-US" sz="1250" b="1" dirty="0" spc="0">
                 <a:solidFill>
                   <a:srgbClr val="000000"/>
                 </a:solidFill>
@@ -5359,20 +4318,20 @@
               </a:rPr>
               <a:t>DEPENDENCIES</a:t>
             </a:r>
-            <a:endParaRPr lang="en-US" sz="1400" dirty="0" spc="0"/>
+            <a:endParaRPr lang="en-US" sz="1250" dirty="0" spc="0"/>
           </a:p>
         </p:txBody>
       </p:sp>
       <p:sp>
         <p:nvSpPr>
-          <p:cNvPr id="44" name="dependency-1-text"/>
+          <p:cNvPr id="25" name="dependency-text-1"/>
           <p:cNvSpPr txBox="1"/>
           <p:nvPr/>
         </p:nvSpPr>
         <p:spPr>
           <a:xfrm>
-            <a:off x="8820150" y="4095750"/>
-            <a:ext cx="3048000" cy="279400"/>
+            <a:off x="9207500" y="4610100"/>
+            <a:ext cx="2603500" cy="222250"/>
           </a:xfrm>
           <a:prstGeom prst="rect">
             <a:avLst/>
@@ -5394,7 +4353,7 @@
               <a:defRPr spc="0"/>
             </a:pPr>
             <a:r>
-              <a:rPr lang="en-US" sz="1400" dirty="0" spc="0">
+              <a:rPr lang="en-US" sz="1000" dirty="0" spc="0">
                 <a:solidFill>
                   <a:srgbClr val="000000"/>
                 </a:solidFill>
@@ -5404,20 +4363,20 @@
               </a:rPr>
               <a:t>Permissions before retrieval tests</a:t>
             </a:r>
-            <a:endParaRPr lang="en-US" sz="1400" dirty="0" spc="0"/>
+            <a:endParaRPr lang="en-US" sz="1000" dirty="0" spc="0"/>
           </a:p>
         </p:txBody>
       </p:sp>
       <p:sp>
         <p:nvSpPr>
-          <p:cNvPr id="45" name="dependency-2-text"/>
+          <p:cNvPr id="26" name="dependency-text-2"/>
           <p:cNvSpPr txBox="1"/>
           <p:nvPr/>
         </p:nvSpPr>
         <p:spPr>
           <a:xfrm>
-            <a:off x="8820150" y="4521200"/>
-            <a:ext cx="3048000" cy="279400"/>
+            <a:off x="9207500" y="4927600"/>
+            <a:ext cx="2603500" cy="222250"/>
           </a:xfrm>
           <a:prstGeom prst="rect">
             <a:avLst/>
@@ -5439,7 +4398,7 @@
               <a:defRPr spc="0"/>
             </a:pPr>
             <a:r>
-              <a:rPr lang="en-US" sz="1400" dirty="0" spc="0">
+              <a:rPr lang="en-US" sz="1000" dirty="0" spc="0">
                 <a:solidFill>
                   <a:srgbClr val="000000"/>
                 </a:solidFill>
@@ -5449,20 +4408,20 @@
               </a:rPr>
               <a:t>Approved test pack before pilot</a:t>
             </a:r>
-            <a:endParaRPr lang="en-US" sz="1400" dirty="0" spc="0"/>
+            <a:endParaRPr lang="en-US" sz="1000" dirty="0" spc="0"/>
           </a:p>
         </p:txBody>
       </p:sp>
       <p:sp>
         <p:nvSpPr>
-          <p:cNvPr id="46" name="dependency-3-text"/>
+          <p:cNvPr id="27" name="dependency-text-3"/>
           <p:cNvSpPr txBox="1"/>
           <p:nvPr/>
         </p:nvSpPr>
         <p:spPr>
           <a:xfrm>
-            <a:off x="8820150" y="4946650"/>
-            <a:ext cx="3048000" cy="279400"/>
+            <a:off x="9207500" y="5245100"/>
+            <a:ext cx="2603500" cy="222250"/>
           </a:xfrm>
           <a:prstGeom prst="rect">
             <a:avLst/>
@@ -5484,7 +4443,7 @@
               <a:defRPr spc="0"/>
             </a:pPr>
             <a:r>
-              <a:rPr lang="en-US" sz="1400" dirty="0" spc="0">
+              <a:rPr lang="en-US" sz="1000" dirty="0" spc="0">
                 <a:solidFill>
                   <a:srgbClr val="000000"/>
                 </a:solidFill>
@@ -5494,20 +4453,20 @@
               </a:rPr>
               <a:t>Quality evidence before benefit case</a:t>
             </a:r>
-            <a:endParaRPr lang="en-US" sz="1400" dirty="0" spc="0"/>
+            <a:endParaRPr lang="en-US" sz="1000" dirty="0" spc="0"/>
           </a:p>
         </p:txBody>
       </p:sp>
       <p:sp>
         <p:nvSpPr>
-          <p:cNvPr id="47" name="decision-label"/>
+          <p:cNvPr id="28" name="decision-label"/>
           <p:cNvSpPr txBox="1"/>
           <p:nvPr/>
         </p:nvSpPr>
         <p:spPr>
           <a:xfrm>
-            <a:off x="635000" y="5689600"/>
-            <a:ext cx="2667000" cy="330200"/>
+            <a:off x="508000" y="5822950"/>
+            <a:ext cx="2730500" cy="317500"/>
           </a:xfrm>
           <a:prstGeom prst="rect">
             <a:avLst/>
@@ -5545,14 +4504,14 @@
       </p:sp>
       <p:sp>
         <p:nvSpPr>
-          <p:cNvPr id="48" name="decision-message"/>
+          <p:cNvPr id="29" name="decision-message"/>
           <p:cNvSpPr txBox="1"/>
           <p:nvPr/>
         </p:nvSpPr>
         <p:spPr>
           <a:xfrm>
-            <a:off x="3556000" y="5689600"/>
-            <a:ext cx="8032750" cy="330200"/>
+            <a:off x="3302000" y="5822950"/>
+            <a:ext cx="8369300" cy="317500"/>
           </a:xfrm>
           <a:prstGeom prst="rect">
             <a:avLst/>
@@ -5588,9 +4547,129 @@
           </a:p>
         </p:txBody>
       </p:sp>
+      <p:pic>
+        <p:nvPicPr>
+          <p:cNvPr id="30" name="gate-icon-g1" descr="remix-flag-line">    </p:cNvPr>
+          <p:cNvPicPr>
+            <a:picLocks noChangeAspect="1"/>
+          </p:cNvPicPr>
+          <p:nvPr/>
+        </p:nvPicPr>
+        <p:blipFill>
+          <a:blip r:embed="rId1">
+            <a:extLst>
+              <a:ext uri="{96DAC541-7B7A-43D3-8B79-37D633B846F1}">
+                <asvg:svgBlip xmlns:asvg="http://schemas.microsoft.com/office/drawing/2016/SVG/main" r:embed="rId2"/>
+              </a:ext>
+            </a:extLst>
+          </a:blip>
+          <a:stretch>
+            <a:fillRect/>
+          </a:stretch>
+        </p:blipFill>
+        <p:spPr>
+          <a:xfrm>
+            <a:off x="1257300" y="4660900"/>
+            <a:ext cx="279400" cy="279400"/>
+          </a:xfrm>
+          <a:prstGeom prst="rect">
+            <a:avLst/>
+          </a:prstGeom>
+        </p:spPr>
+      </p:pic>
+      <p:pic>
+        <p:nvPicPr>
+          <p:cNvPr id="31" name="gate-icon-g2" descr="remix-flag-line">    </p:cNvPr>
+          <p:cNvPicPr>
+            <a:picLocks noChangeAspect="1"/>
+          </p:cNvPicPr>
+          <p:nvPr/>
+        </p:nvPicPr>
+        <p:blipFill>
+          <a:blip r:embed="rId3">
+            <a:extLst>
+              <a:ext uri="{96DAC541-7B7A-43D3-8B79-37D633B846F1}">
+                <asvg:svgBlip xmlns:asvg="http://schemas.microsoft.com/office/drawing/2016/SVG/main" r:embed="rId4"/>
+              </a:ext>
+            </a:extLst>
+          </a:blip>
+          <a:stretch>
+            <a:fillRect/>
+          </a:stretch>
+        </p:blipFill>
+        <p:spPr>
+          <a:xfrm>
+            <a:off x="3225800" y="4660900"/>
+            <a:ext cx="279400" cy="279400"/>
+          </a:xfrm>
+          <a:prstGeom prst="rect">
+            <a:avLst/>
+          </a:prstGeom>
+        </p:spPr>
+      </p:pic>
+      <p:pic>
+        <p:nvPicPr>
+          <p:cNvPr id="32" name="gate-icon-g3" descr="remix-flag-line">    </p:cNvPr>
+          <p:cNvPicPr>
+            <a:picLocks noChangeAspect="1"/>
+          </p:cNvPicPr>
+          <p:nvPr/>
+        </p:nvPicPr>
+        <p:blipFill>
+          <a:blip r:embed="rId5">
+            <a:extLst>
+              <a:ext uri="{96DAC541-7B7A-43D3-8B79-37D633B846F1}">
+                <asvg:svgBlip xmlns:asvg="http://schemas.microsoft.com/office/drawing/2016/SVG/main" r:embed="rId6"/>
+              </a:ext>
+            </a:extLst>
+          </a:blip>
+          <a:stretch>
+            <a:fillRect/>
+          </a:stretch>
+        </p:blipFill>
+        <p:spPr>
+          <a:xfrm>
+            <a:off x="5194300" y="4660900"/>
+            <a:ext cx="279400" cy="279400"/>
+          </a:xfrm>
+          <a:prstGeom prst="rect">
+            <a:avLst/>
+          </a:prstGeom>
+        </p:spPr>
+      </p:pic>
+      <p:pic>
+        <p:nvPicPr>
+          <p:cNvPr id="33" name="gate-icon-g4" descr="remix-flag-line">    </p:cNvPr>
+          <p:cNvPicPr>
+            <a:picLocks noChangeAspect="1"/>
+          </p:cNvPicPr>
+          <p:nvPr/>
+        </p:nvPicPr>
+        <p:blipFill>
+          <a:blip r:embed="rId7">
+            <a:extLst>
+              <a:ext uri="{96DAC541-7B7A-43D3-8B79-37D633B846F1}">
+                <asvg:svgBlip xmlns:asvg="http://schemas.microsoft.com/office/drawing/2016/SVG/main" r:embed="rId8"/>
+              </a:ext>
+            </a:extLst>
+          </a:blip>
+          <a:stretch>
+            <a:fillRect/>
+          </a:stretch>
+        </p:blipFill>
+        <p:spPr>
+          <a:xfrm>
+            <a:off x="7162800" y="4660900"/>
+            <a:ext cx="279400" cy="279400"/>
+          </a:xfrm>
+          <a:prstGeom prst="rect">
+            <a:avLst/>
+          </a:prstGeom>
+        </p:spPr>
+      </p:pic>
       <p:sp>
         <p:nvSpPr>
-          <p:cNvPr id="49" name="Slide Number Placeholder 0"/>
+          <p:cNvPr id="34" name="Slide Number Placeholder 0"/>
           <p:cNvSpPr>
             <a:spLocks noGrp="1"/>
           </p:cNvSpPr>

--- a/examples/consulting-ai-transformation/run/slides/s04-delivery-roadmap/deliverables/slide.pptx
+++ b/examples/consulting-ai-transformation/run/slides/s04-delivery-roadmap/deliverables/slide.pptx
@@ -505,7 +505,7 @@
               <a:t>Each pilot engagement supplies one research task. Twenty paired tasks correspond to twenty engagements.
 The practice lead and CFO release scale funding only after the evidence gates are reviewed. Critical data exceptions stop expansion.
 [SlidePoise sources]
-Generated target visual: /private/tmp/.slidepoise-rebuild-h51errnw/slides/s04-delivery-roadmap/work/accepted-slide.png
+Generated target visual: /Users/henry/Codes/AI_slide_drafting/examples/consulting-ai-transformation/run/slides/s04-delivery-roadmap/work/accepted-slide.png
 Canonical asset remix-flag-line: /Users/henry/Codes/AI_slide_drafting/examples/consulting-ai-transformation/run/work/icon-cache/flag/remix-flag-line.svg</a:t>
             </a:r>
             <a:endParaRPr lang="en-US" dirty="0"/>
@@ -1448,7 +1448,7 @@
                         <a:buNone/>
                       </a:pPr>
                       <a:r>
-                        <a:rPr lang="en-US" sz="1000" b="1" dirty="0">
+                        <a:rPr lang="en-US" sz="1200" b="1" dirty="0">
                           <a:solidFill>
                             <a:srgbClr val="FFFFFF"/>
                           </a:solidFill>
@@ -1458,14 +1458,14 @@
                         </a:rPr>
                         <a:t>WORKSTREAM / OWNER</a:t>
                       </a:r>
-                      <a:endParaRPr lang="en-US" sz="1000" dirty="0">
+                      <a:endParaRPr lang="en-US" sz="1200" dirty="0">
                         <a:latin typeface="Arial" charset="0"/>
                         <a:ea typeface="Arial" charset="0"/>
                         <a:cs typeface="Arial" charset="0"/>
                       </a:endParaRPr>
                     </a:p>
                   </a:txBody>
-                  <a:tcPr marL="101600" marR="101600" marT="38100" marB="38100" anchor="ctr">
+                  <a:tcPr marL="76200" marR="76200" marT="31750" marB="31750" anchor="ctr">
                     <a:lnL w="6350" cap="flat" cmpd="sng" algn="ctr">
                       <a:solidFill>
                         <a:srgbClr val="C6C9CD"/>
@@ -1514,11 +1514,11 @@
                     </a:bodyPr>
                     <a:lstStyle/>
                     <a:p>
-                      <a:pPr algn="ctr" indent="0" marL="0">
+                      <a:pPr algn="l" indent="0" marL="0">
                         <a:buNone/>
                       </a:pPr>
                       <a:r>
-                        <a:rPr lang="en-US" sz="1000" b="1" dirty="0">
+                        <a:rPr lang="en-US" sz="1200" b="1" dirty="0">
                           <a:solidFill>
                             <a:srgbClr val="FFFFFF"/>
                           </a:solidFill>
@@ -1528,18 +1528,18 @@
                         </a:rPr>
                         <a:t>WEEKS 1–2</a:t>
                       </a:r>
-                      <a:endParaRPr lang="en-US" sz="1000" dirty="0">
+                      <a:endParaRPr lang="en-US" sz="1200" dirty="0">
                         <a:latin typeface="Arial" charset="0"/>
                         <a:ea typeface="Arial" charset="0"/>
                         <a:cs typeface="Arial" charset="0"/>
                       </a:endParaRPr>
                     </a:p>
                     <a:p>
-                      <a:pPr algn="ctr" indent="0" marL="0">
+                      <a:pPr algn="l" indent="0" marL="0">
                         <a:buNone/>
                       </a:pPr>
                       <a:r>
-                        <a:rPr lang="en-US" sz="1000" b="1" dirty="0">
+                        <a:rPr lang="en-US" sz="1200" b="1" dirty="0">
                           <a:solidFill>
                             <a:srgbClr val="FFFFFF"/>
                           </a:solidFill>
@@ -1549,14 +1549,14 @@
                         </a:rPr>
                         <a:t>Approve &amp; baseline</a:t>
                       </a:r>
-                      <a:endParaRPr lang="en-US" sz="1000" dirty="0">
+                      <a:endParaRPr lang="en-US" sz="1200" dirty="0">
                         <a:latin typeface="Arial" charset="0"/>
                         <a:ea typeface="Arial" charset="0"/>
                         <a:cs typeface="Arial" charset="0"/>
                       </a:endParaRPr>
                     </a:p>
                   </a:txBody>
-                  <a:tcPr marL="101600" marR="101600" marT="38100" marB="38100" anchor="ctr">
+                  <a:tcPr marL="76200" marR="76200" marT="31750" marB="31750" anchor="ctr">
                     <a:lnL w="6350" cap="flat" cmpd="sng" algn="ctr">
                       <a:solidFill>
                         <a:srgbClr val="C6C9CD"/>
@@ -1605,11 +1605,11 @@
                     </a:bodyPr>
                     <a:lstStyle/>
                     <a:p>
-                      <a:pPr algn="ctr" indent="0" marL="0">
+                      <a:pPr algn="l" indent="0" marL="0">
                         <a:buNone/>
                       </a:pPr>
                       <a:r>
-                        <a:rPr lang="en-US" sz="1000" b="1" dirty="0">
+                        <a:rPr lang="en-US" sz="1200" b="1" dirty="0">
                           <a:solidFill>
                             <a:srgbClr val="FFFFFF"/>
                           </a:solidFill>
@@ -1619,18 +1619,18 @@
                         </a:rPr>
                         <a:t>WEEKS 3–4</a:t>
                       </a:r>
-                      <a:endParaRPr lang="en-US" sz="1000" dirty="0">
+                      <a:endParaRPr lang="en-US" sz="1200" dirty="0">
                         <a:latin typeface="Arial" charset="0"/>
                         <a:ea typeface="Arial" charset="0"/>
                         <a:cs typeface="Arial" charset="0"/>
                       </a:endParaRPr>
                     </a:p>
                     <a:p>
-                      <a:pPr algn="ctr" indent="0" marL="0">
+                      <a:pPr algn="l" indent="0" marL="0">
                         <a:buNone/>
                       </a:pPr>
                       <a:r>
-                        <a:rPr lang="en-US" sz="1000" b="1" dirty="0">
+                        <a:rPr lang="en-US" sz="1200" b="1" dirty="0">
                           <a:solidFill>
                             <a:srgbClr val="FFFFFF"/>
                           </a:solidFill>
@@ -1640,14 +1640,14 @@
                         </a:rPr>
                         <a:t>Build &amp; test</a:t>
                       </a:r>
-                      <a:endParaRPr lang="en-US" sz="1000" dirty="0">
+                      <a:endParaRPr lang="en-US" sz="1200" dirty="0">
                         <a:latin typeface="Arial" charset="0"/>
                         <a:ea typeface="Arial" charset="0"/>
                         <a:cs typeface="Arial" charset="0"/>
                       </a:endParaRPr>
                     </a:p>
                   </a:txBody>
-                  <a:tcPr marL="101600" marR="101600" marT="38100" marB="38100" anchor="ctr">
+                  <a:tcPr marL="76200" marR="76200" marT="31750" marB="31750" anchor="ctr">
                     <a:lnL w="6350" cap="flat" cmpd="sng" algn="ctr">
                       <a:solidFill>
                         <a:srgbClr val="C6C9CD"/>
@@ -1696,11 +1696,11 @@
                     </a:bodyPr>
                     <a:lstStyle/>
                     <a:p>
-                      <a:pPr algn="ctr" indent="0" marL="0">
+                      <a:pPr algn="l" indent="0" marL="0">
                         <a:buNone/>
                       </a:pPr>
                       <a:r>
-                        <a:rPr lang="en-US" sz="1000" b="1" dirty="0">
+                        <a:rPr lang="en-US" sz="1200" b="1" dirty="0">
                           <a:solidFill>
                             <a:srgbClr val="FFFFFF"/>
                           </a:solidFill>
@@ -1710,18 +1710,18 @@
                         </a:rPr>
                         <a:t>WEEKS 5–8</a:t>
                       </a:r>
-                      <a:endParaRPr lang="en-US" sz="1000" dirty="0">
+                      <a:endParaRPr lang="en-US" sz="1200" dirty="0">
                         <a:latin typeface="Arial" charset="0"/>
                         <a:ea typeface="Arial" charset="0"/>
                         <a:cs typeface="Arial" charset="0"/>
                       </a:endParaRPr>
                     </a:p>
                     <a:p>
-                      <a:pPr algn="ctr" indent="0" marL="0">
+                      <a:pPr algn="l" indent="0" marL="0">
                         <a:buNone/>
                       </a:pPr>
                       <a:r>
-                        <a:rPr lang="en-US" sz="1000" b="1" dirty="0">
+                        <a:rPr lang="en-US" sz="1200" b="1" dirty="0">
                           <a:solidFill>
                             <a:srgbClr val="FFFFFF"/>
                           </a:solidFill>
@@ -1731,14 +1731,14 @@
                         </a:rPr>
                         <a:t>Pilot &amp; learn</a:t>
                       </a:r>
-                      <a:endParaRPr lang="en-US" sz="1000" dirty="0">
+                      <a:endParaRPr lang="en-US" sz="1200" dirty="0">
                         <a:latin typeface="Arial" charset="0"/>
                         <a:ea typeface="Arial" charset="0"/>
                         <a:cs typeface="Arial" charset="0"/>
                       </a:endParaRPr>
                     </a:p>
                   </a:txBody>
-                  <a:tcPr marL="101600" marR="101600" marT="38100" marB="38100" anchor="ctr">
+                  <a:tcPr marL="76200" marR="76200" marT="31750" marB="31750" anchor="ctr">
                     <a:lnL w="6350" cap="flat" cmpd="sng" algn="ctr">
                       <a:solidFill>
                         <a:srgbClr val="C6C9CD"/>
@@ -1787,11 +1787,11 @@
                     </a:bodyPr>
                     <a:lstStyle/>
                     <a:p>
-                      <a:pPr algn="ctr" indent="0" marL="0">
+                      <a:pPr algn="l" indent="0" marL="0">
                         <a:buNone/>
                       </a:pPr>
                       <a:r>
-                        <a:rPr lang="en-US" sz="1000" b="1" dirty="0">
+                        <a:rPr lang="en-US" sz="1200" b="1" dirty="0">
                           <a:solidFill>
                             <a:srgbClr val="FFFFFF"/>
                           </a:solidFill>
@@ -1801,18 +1801,18 @@
                         </a:rPr>
                         <a:t>WEEKS 9–12</a:t>
                       </a:r>
-                      <a:endParaRPr lang="en-US" sz="1000" dirty="0">
+                      <a:endParaRPr lang="en-US" sz="1200" dirty="0">
                         <a:latin typeface="Arial" charset="0"/>
                         <a:ea typeface="Arial" charset="0"/>
                         <a:cs typeface="Arial" charset="0"/>
                       </a:endParaRPr>
                     </a:p>
                     <a:p>
-                      <a:pPr algn="ctr" indent="0" marL="0">
+                      <a:pPr algn="l" indent="0" marL="0">
                         <a:buNone/>
                       </a:pPr>
                       <a:r>
-                        <a:rPr lang="en-US" sz="1000" b="1" dirty="0">
+                        <a:rPr lang="en-US" sz="1200" b="1" dirty="0">
                           <a:solidFill>
                             <a:srgbClr val="FFFFFF"/>
                           </a:solidFill>
@@ -1822,14 +1822,14 @@
                         </a:rPr>
                         <a:t>Prove &amp; decide</a:t>
                       </a:r>
-                      <a:endParaRPr lang="en-US" sz="1000" dirty="0">
+                      <a:endParaRPr lang="en-US" sz="1200" dirty="0">
                         <a:latin typeface="Arial" charset="0"/>
                         <a:ea typeface="Arial" charset="0"/>
                         <a:cs typeface="Arial" charset="0"/>
                       </a:endParaRPr>
                     </a:p>
                   </a:txBody>
-                  <a:tcPr marL="101600" marR="101600" marT="38100" marB="38100" anchor="ctr">
+                  <a:tcPr marL="76200" marR="76200" marT="31750" marB="31750" anchor="ctr">
                     <a:lnL w="6350" cap="flat" cmpd="sng" algn="ctr">
                       <a:solidFill>
                         <a:srgbClr val="C6C9CD"/>
@@ -1884,7 +1884,7 @@
                         <a:buNone/>
                       </a:pPr>
                       <a:r>
-                        <a:rPr lang="en-US" sz="1000" b="1" dirty="0">
+                        <a:rPr lang="en-US" sz="1200" b="1" dirty="0">
                           <a:solidFill>
                             <a:srgbClr val="000000"/>
                           </a:solidFill>
@@ -1892,20 +1892,14 @@
                           <a:ea typeface="Arial" pitchFamily="34" charset="-122"/>
                           <a:cs typeface="Arial" pitchFamily="34" charset="-120"/>
                         </a:rPr>
-                        <a:t>Data &amp; access</a:t>
+                        <a:t>Data &amp; access
+</a:t>
                       </a:r>
-                      <a:endParaRPr lang="en-US" sz="1000" dirty="0">
-                        <a:latin typeface="Arial" charset="0"/>
-                        <a:ea typeface="Arial" charset="0"/>
-                        <a:cs typeface="Arial" charset="0"/>
-                      </a:endParaRPr>
-                    </a:p>
-                    <a:p>
                       <a:pPr algn="l" indent="0" marL="0">
                         <a:buNone/>
                       </a:pPr>
                       <a:r>
-                        <a:rPr lang="en-US" sz="1000" b="1" dirty="0">
+                        <a:rPr lang="en-US" sz="1200" dirty="0">
                           <a:solidFill>
                             <a:srgbClr val="000000"/>
                           </a:solidFill>
@@ -1915,14 +1909,14 @@
                         </a:rPr>
                         <a:t>Source steward</a:t>
                       </a:r>
-                      <a:endParaRPr lang="en-US" sz="1000" dirty="0">
+                      <a:endParaRPr lang="en-US" sz="1200" dirty="0">
                         <a:latin typeface="Arial" charset="0"/>
                         <a:ea typeface="Arial" charset="0"/>
                         <a:cs typeface="Arial" charset="0"/>
                       </a:endParaRPr>
                     </a:p>
                   </a:txBody>
-                  <a:tcPr marL="101600" marR="101600" marT="38100" marB="38100" anchor="ctr">
+                  <a:tcPr marL="76200" marR="76200" marT="31750" marB="31750" anchor="ctr">
                     <a:lnL w="6350" cap="flat" cmpd="sng" algn="ctr">
                       <a:solidFill>
                         <a:srgbClr val="C6C9CD"/>
@@ -1971,11 +1965,11 @@
                     </a:bodyPr>
                     <a:lstStyle/>
                     <a:p>
-                      <a:pPr algn="ctr" indent="0" marL="0">
+                      <a:pPr algn="l" indent="0" marL="0">
                         <a:buNone/>
                       </a:pPr>
                       <a:r>
-                        <a:rPr lang="en-US" sz="1000" dirty="0">
+                        <a:rPr lang="en-US" sz="1200" dirty="0">
                           <a:solidFill>
                             <a:srgbClr val="000000"/>
                           </a:solidFill>
@@ -1985,18 +1979,18 @@
                         </a:rPr>
                         <a:t>Approved corpus</a:t>
                       </a:r>
-                      <a:endParaRPr lang="en-US" sz="1000" dirty="0">
+                      <a:endParaRPr lang="en-US" sz="1200" dirty="0">
                         <a:latin typeface="Arial" charset="0"/>
                         <a:ea typeface="Arial" charset="0"/>
                         <a:cs typeface="Arial" charset="0"/>
                       </a:endParaRPr>
                     </a:p>
                     <a:p>
-                      <a:pPr algn="ctr" indent="0" marL="0">
+                      <a:pPr algn="l" indent="0" marL="0">
                         <a:buNone/>
                       </a:pPr>
                       <a:r>
-                        <a:rPr lang="en-US" sz="1000" dirty="0">
+                        <a:rPr lang="en-US" sz="1200" dirty="0">
                           <a:solidFill>
                             <a:srgbClr val="000000"/>
                           </a:solidFill>
@@ -2006,14 +2000,14 @@
                         </a:rPr>
                         <a:t>Access register</a:t>
                       </a:r>
-                      <a:endParaRPr lang="en-US" sz="1000" dirty="0">
+                      <a:endParaRPr lang="en-US" sz="1200" dirty="0">
                         <a:latin typeface="Arial" charset="0"/>
                         <a:ea typeface="Arial" charset="0"/>
                         <a:cs typeface="Arial" charset="0"/>
                       </a:endParaRPr>
                     </a:p>
                   </a:txBody>
-                  <a:tcPr marL="101600" marR="101600" marT="38100" marB="38100" anchor="ctr">
+                  <a:tcPr marL="76200" marR="76200" marT="31750" marB="31750" anchor="ctr">
                     <a:lnL w="6350" cap="flat" cmpd="sng" algn="ctr">
                       <a:solidFill>
                         <a:srgbClr val="C6C9CD"/>
@@ -2062,11 +2056,11 @@
                     </a:bodyPr>
                     <a:lstStyle/>
                     <a:p>
-                      <a:pPr algn="ctr" indent="0" marL="0">
+                      <a:pPr algn="l" indent="0" marL="0">
                         <a:buNone/>
                       </a:pPr>
                       <a:r>
-                        <a:rPr lang="en-US" sz="1000" dirty="0">
+                        <a:rPr lang="en-US" sz="1200" dirty="0">
                           <a:solidFill>
                             <a:srgbClr val="000000"/>
                           </a:solidFill>
@@ -2076,18 +2070,18 @@
                         </a:rPr>
                         <a:t>Source refresh</a:t>
                       </a:r>
-                      <a:endParaRPr lang="en-US" sz="1000" dirty="0">
+                      <a:endParaRPr lang="en-US" sz="1200" dirty="0">
                         <a:latin typeface="Arial" charset="0"/>
                         <a:ea typeface="Arial" charset="0"/>
                         <a:cs typeface="Arial" charset="0"/>
                       </a:endParaRPr>
                     </a:p>
                     <a:p>
-                      <a:pPr algn="ctr" indent="0" marL="0">
+                      <a:pPr algn="l" indent="0" marL="0">
                         <a:buNone/>
                       </a:pPr>
                       <a:r>
-                        <a:rPr lang="en-US" sz="1000" dirty="0">
+                        <a:rPr lang="en-US" sz="1200" dirty="0">
                           <a:solidFill>
                             <a:srgbClr val="000000"/>
                           </a:solidFill>
@@ -2097,14 +2091,14 @@
                         </a:rPr>
                         <a:t>Named stewards</a:t>
                       </a:r>
-                      <a:endParaRPr lang="en-US" sz="1000" dirty="0">
+                      <a:endParaRPr lang="en-US" sz="1200" dirty="0">
                         <a:latin typeface="Arial" charset="0"/>
                         <a:ea typeface="Arial" charset="0"/>
                         <a:cs typeface="Arial" charset="0"/>
                       </a:endParaRPr>
                     </a:p>
                   </a:txBody>
-                  <a:tcPr marL="101600" marR="101600" marT="38100" marB="38100" anchor="ctr">
+                  <a:tcPr marL="76200" marR="76200" marT="31750" marB="31750" anchor="ctr">
                     <a:lnL w="6350" cap="flat" cmpd="sng" algn="ctr">
                       <a:solidFill>
                         <a:srgbClr val="C6C9CD"/>
@@ -2153,11 +2147,11 @@
                     </a:bodyPr>
                     <a:lstStyle/>
                     <a:p>
-                      <a:pPr algn="ctr" indent="0" marL="0">
+                      <a:pPr algn="l" indent="0" marL="0">
                         <a:buNone/>
                       </a:pPr>
                       <a:r>
-                        <a:rPr lang="en-US" sz="1000" dirty="0">
+                        <a:rPr lang="en-US" sz="1200" dirty="0">
                           <a:solidFill>
                             <a:srgbClr val="000000"/>
                           </a:solidFill>
@@ -2167,18 +2161,18 @@
                         </a:rPr>
                         <a:t>Weekly access and</a:t>
                       </a:r>
-                      <a:endParaRPr lang="en-US" sz="1000" dirty="0">
+                      <a:endParaRPr lang="en-US" sz="1200" dirty="0">
                         <a:latin typeface="Arial" charset="0"/>
                         <a:ea typeface="Arial" charset="0"/>
                         <a:cs typeface="Arial" charset="0"/>
                       </a:endParaRPr>
                     </a:p>
                     <a:p>
-                      <a:pPr algn="ctr" indent="0" marL="0">
+                      <a:pPr algn="l" indent="0" marL="0">
                         <a:buNone/>
                       </a:pPr>
                       <a:r>
-                        <a:rPr lang="en-US" sz="1000" dirty="0">
+                        <a:rPr lang="en-US" sz="1200" dirty="0">
                           <a:solidFill>
                             <a:srgbClr val="000000"/>
                           </a:solidFill>
@@ -2188,14 +2182,14 @@
                         </a:rPr>
                         <a:t>freshness checks</a:t>
                       </a:r>
-                      <a:endParaRPr lang="en-US" sz="1000" dirty="0">
+                      <a:endParaRPr lang="en-US" sz="1200" dirty="0">
                         <a:latin typeface="Arial" charset="0"/>
                         <a:ea typeface="Arial" charset="0"/>
                         <a:cs typeface="Arial" charset="0"/>
                       </a:endParaRPr>
                     </a:p>
                   </a:txBody>
-                  <a:tcPr marL="101600" marR="101600" marT="38100" marB="38100" anchor="ctr">
+                  <a:tcPr marL="76200" marR="76200" marT="31750" marB="31750" anchor="ctr">
                     <a:lnL w="6350" cap="flat" cmpd="sng" algn="ctr">
                       <a:solidFill>
                         <a:srgbClr val="C6C9CD"/>
@@ -2244,11 +2238,11 @@
                     </a:bodyPr>
                     <a:lstStyle/>
                     <a:p>
-                      <a:pPr algn="ctr" indent="0" marL="0">
+                      <a:pPr algn="l" indent="0" marL="0">
                         <a:buNone/>
                       </a:pPr>
                       <a:r>
-                        <a:rPr lang="en-US" sz="1000" dirty="0">
+                        <a:rPr lang="en-US" sz="1200" dirty="0">
                           <a:solidFill>
                             <a:srgbClr val="000000"/>
                           </a:solidFill>
@@ -2258,18 +2252,18 @@
                         </a:rPr>
                         <a:t>Audit closeout</a:t>
                       </a:r>
-                      <a:endParaRPr lang="en-US" sz="1000" dirty="0">
+                      <a:endParaRPr lang="en-US" sz="1200" dirty="0">
                         <a:latin typeface="Arial" charset="0"/>
                         <a:ea typeface="Arial" charset="0"/>
                         <a:cs typeface="Arial" charset="0"/>
                       </a:endParaRPr>
                     </a:p>
                     <a:p>
-                      <a:pPr algn="ctr" indent="0" marL="0">
+                      <a:pPr algn="l" indent="0" marL="0">
                         <a:buNone/>
                       </a:pPr>
                       <a:r>
-                        <a:rPr lang="en-US" sz="1000" dirty="0">
+                        <a:rPr lang="en-US" sz="1200" dirty="0">
                           <a:solidFill>
                             <a:srgbClr val="000000"/>
                           </a:solidFill>
@@ -2279,14 +2273,14 @@
                         </a:rPr>
                         <a:t>Release inventory</a:t>
                       </a:r>
-                      <a:endParaRPr lang="en-US" sz="1000" dirty="0">
+                      <a:endParaRPr lang="en-US" sz="1200" dirty="0">
                         <a:latin typeface="Arial" charset="0"/>
                         <a:ea typeface="Arial" charset="0"/>
                         <a:cs typeface="Arial" charset="0"/>
                       </a:endParaRPr>
                     </a:p>
                   </a:txBody>
-                  <a:tcPr marL="101600" marR="101600" marT="38100" marB="38100" anchor="ctr">
+                  <a:tcPr marL="76200" marR="76200" marT="31750" marB="31750" anchor="ctr">
                     <a:lnL w="6350" cap="flat" cmpd="sng" algn="ctr">
                       <a:solidFill>
                         <a:srgbClr val="C6C9CD"/>
@@ -2341,7 +2335,7 @@
                         <a:buNone/>
                       </a:pPr>
                       <a:r>
-                        <a:rPr lang="en-US" sz="1000" b="1" dirty="0">
+                        <a:rPr lang="en-US" sz="1200" b="1" dirty="0">
                           <a:solidFill>
                             <a:srgbClr val="000000"/>
                           </a:solidFill>
@@ -2349,20 +2343,14 @@
                           <a:ea typeface="Arial" pitchFamily="34" charset="-122"/>
                           <a:cs typeface="Arial" pitchFamily="34" charset="-120"/>
                         </a:rPr>
-                        <a:t>Workflow &amp; product</a:t>
+                        <a:t>Workflow &amp; product
+</a:t>
                       </a:r>
-                      <a:endParaRPr lang="en-US" sz="1000" dirty="0">
-                        <a:latin typeface="Arial" charset="0"/>
-                        <a:ea typeface="Arial" charset="0"/>
-                        <a:cs typeface="Arial" charset="0"/>
-                      </a:endParaRPr>
-                    </a:p>
-                    <a:p>
                       <a:pPr algn="l" indent="0" marL="0">
                         <a:buNone/>
                       </a:pPr>
                       <a:r>
-                        <a:rPr lang="en-US" sz="1000" b="1" dirty="0">
+                        <a:rPr lang="en-US" sz="1200" dirty="0">
                           <a:solidFill>
                             <a:srgbClr val="000000"/>
                           </a:solidFill>
@@ -2372,14 +2360,14 @@
                         </a:rPr>
                         <a:t>Product lead</a:t>
                       </a:r>
-                      <a:endParaRPr lang="en-US" sz="1000" dirty="0">
+                      <a:endParaRPr lang="en-US" sz="1200" dirty="0">
                         <a:latin typeface="Arial" charset="0"/>
                         <a:ea typeface="Arial" charset="0"/>
                         <a:cs typeface="Arial" charset="0"/>
                       </a:endParaRPr>
                     </a:p>
                   </a:txBody>
-                  <a:tcPr marL="101600" marR="101600" marT="38100" marB="38100" anchor="ctr">
+                  <a:tcPr marL="76200" marR="76200" marT="31750" marB="31750" anchor="ctr">
                     <a:lnL w="6350" cap="flat" cmpd="sng" algn="ctr">
                       <a:solidFill>
                         <a:srgbClr val="C6C9CD"/>
@@ -2428,11 +2416,11 @@
                     </a:bodyPr>
                     <a:lstStyle/>
                     <a:p>
-                      <a:pPr algn="ctr" indent="0" marL="0">
+                      <a:pPr algn="l" indent="0" marL="0">
                         <a:buNone/>
                       </a:pPr>
                       <a:r>
-                        <a:rPr lang="en-US" sz="1000" dirty="0">
+                        <a:rPr lang="en-US" sz="1200" dirty="0">
                           <a:solidFill>
                             <a:srgbClr val="000000"/>
                           </a:solidFill>
@@ -2442,18 +2430,18 @@
                         </a:rPr>
                         <a:t>Task mapping</a:t>
                       </a:r>
-                      <a:endParaRPr lang="en-US" sz="1000" dirty="0">
+                      <a:endParaRPr lang="en-US" sz="1200" dirty="0">
                         <a:latin typeface="Arial" charset="0"/>
                         <a:ea typeface="Arial" charset="0"/>
                         <a:cs typeface="Arial" charset="0"/>
                       </a:endParaRPr>
                     </a:p>
                     <a:p>
-                      <a:pPr algn="ctr" indent="0" marL="0">
+                      <a:pPr algn="l" indent="0" marL="0">
                         <a:buNone/>
                       </a:pPr>
                       <a:r>
-                        <a:rPr lang="en-US" sz="1000" dirty="0">
+                        <a:rPr lang="en-US" sz="1200" dirty="0">
                           <a:solidFill>
                             <a:srgbClr val="000000"/>
                           </a:solidFill>
@@ -2463,14 +2451,14 @@
                         </a:rPr>
                         <a:t>Baseline time logs</a:t>
                       </a:r>
-                      <a:endParaRPr lang="en-US" sz="1000" dirty="0">
+                      <a:endParaRPr lang="en-US" sz="1200" dirty="0">
                         <a:latin typeface="Arial" charset="0"/>
                         <a:ea typeface="Arial" charset="0"/>
                         <a:cs typeface="Arial" charset="0"/>
                       </a:endParaRPr>
                     </a:p>
                   </a:txBody>
-                  <a:tcPr marL="101600" marR="101600" marT="38100" marB="38100" anchor="ctr">
+                  <a:tcPr marL="76200" marR="76200" marT="31750" marB="31750" anchor="ctr">
                     <a:lnL w="6350" cap="flat" cmpd="sng" algn="ctr">
                       <a:solidFill>
                         <a:srgbClr val="C6C9CD"/>
@@ -2519,11 +2507,11 @@
                     </a:bodyPr>
                     <a:lstStyle/>
                     <a:p>
-                      <a:pPr algn="ctr" indent="0" marL="0">
+                      <a:pPr algn="l" indent="0" marL="0">
                         <a:buNone/>
                       </a:pPr>
                       <a:r>
-                        <a:rPr lang="en-US" sz="1000" dirty="0">
+                        <a:rPr lang="en-US" sz="1200" dirty="0">
                           <a:solidFill>
                             <a:srgbClr val="000000"/>
                           </a:solidFill>
@@ -2533,18 +2521,18 @@
                         </a:rPr>
                         <a:t>Grounded draft</a:t>
                       </a:r>
-                      <a:endParaRPr lang="en-US" sz="1000" dirty="0">
+                      <a:endParaRPr lang="en-US" sz="1200" dirty="0">
                         <a:latin typeface="Arial" charset="0"/>
                         <a:ea typeface="Arial" charset="0"/>
                         <a:cs typeface="Arial" charset="0"/>
                       </a:endParaRPr>
                     </a:p>
                     <a:p>
-                      <a:pPr algn="ctr" indent="0" marL="0">
+                      <a:pPr algn="l" indent="0" marL="0">
                         <a:buNone/>
                       </a:pPr>
                       <a:r>
-                        <a:rPr lang="en-US" sz="1000" dirty="0">
+                        <a:rPr lang="en-US" sz="1200" dirty="0">
                           <a:solidFill>
                             <a:srgbClr val="000000"/>
                           </a:solidFill>
@@ -2554,14 +2542,14 @@
                         </a:rPr>
                         <a:t>Visible citations</a:t>
                       </a:r>
-                      <a:endParaRPr lang="en-US" sz="1000" dirty="0">
+                      <a:endParaRPr lang="en-US" sz="1200" dirty="0">
                         <a:latin typeface="Arial" charset="0"/>
                         <a:ea typeface="Arial" charset="0"/>
                         <a:cs typeface="Arial" charset="0"/>
                       </a:endParaRPr>
                     </a:p>
                   </a:txBody>
-                  <a:tcPr marL="101600" marR="101600" marT="38100" marB="38100" anchor="ctr">
+                  <a:tcPr marL="76200" marR="76200" marT="31750" marB="31750" anchor="ctr">
                     <a:lnL w="6350" cap="flat" cmpd="sng" algn="ctr">
                       <a:solidFill>
                         <a:srgbClr val="C6C9CD"/>
@@ -2610,11 +2598,11 @@
                     </a:bodyPr>
                     <a:lstStyle/>
                     <a:p>
-                      <a:pPr algn="ctr" indent="0" marL="0">
+                      <a:pPr algn="l" indent="0" marL="0">
                         <a:buNone/>
                       </a:pPr>
                       <a:r>
-                        <a:rPr lang="en-US" sz="1000" dirty="0">
+                        <a:rPr lang="en-US" sz="1200" dirty="0">
                           <a:solidFill>
                             <a:srgbClr val="000000"/>
                           </a:solidFill>
@@ -2624,18 +2612,18 @@
                         </a:rPr>
                         <a:t>15-user pilot</a:t>
                       </a:r>
-                      <a:endParaRPr lang="en-US" sz="1000" dirty="0">
+                      <a:endParaRPr lang="en-US" sz="1200" dirty="0">
                         <a:latin typeface="Arial" charset="0"/>
                         <a:ea typeface="Arial" charset="0"/>
                         <a:cs typeface="Arial" charset="0"/>
                       </a:endParaRPr>
                     </a:p>
                     <a:p>
-                      <a:pPr algn="ctr" indent="0" marL="0">
+                      <a:pPr algn="l" indent="0" marL="0">
                         <a:buNone/>
                       </a:pPr>
                       <a:r>
-                        <a:rPr lang="en-US" sz="1000" dirty="0">
+                        <a:rPr lang="en-US" sz="1200" dirty="0">
                           <a:solidFill>
                             <a:srgbClr val="000000"/>
                           </a:solidFill>
@@ -2645,14 +2633,14 @@
                         </a:rPr>
                         <a:t>Defect fixes</a:t>
                       </a:r>
-                      <a:endParaRPr lang="en-US" sz="1000" dirty="0">
+                      <a:endParaRPr lang="en-US" sz="1200" dirty="0">
                         <a:latin typeface="Arial" charset="0"/>
                         <a:ea typeface="Arial" charset="0"/>
                         <a:cs typeface="Arial" charset="0"/>
                       </a:endParaRPr>
                     </a:p>
                   </a:txBody>
-                  <a:tcPr marL="101600" marR="101600" marT="38100" marB="38100" anchor="ctr">
+                  <a:tcPr marL="76200" marR="76200" marT="31750" marB="31750" anchor="ctr">
                     <a:lnL w="6350" cap="flat" cmpd="sng" algn="ctr">
                       <a:solidFill>
                         <a:srgbClr val="C6C9CD"/>
@@ -2701,11 +2689,11 @@
                     </a:bodyPr>
                     <a:lstStyle/>
                     <a:p>
-                      <a:pPr algn="ctr" indent="0" marL="0">
+                      <a:pPr algn="l" indent="0" marL="0">
                         <a:buNone/>
                       </a:pPr>
                       <a:r>
-                        <a:rPr lang="en-US" sz="1000" dirty="0">
+                        <a:rPr lang="en-US" sz="1200" dirty="0">
                           <a:solidFill>
                             <a:srgbClr val="000000"/>
                           </a:solidFill>
@@ -2715,18 +2703,18 @@
                         </a:rPr>
                         <a:t>Release candidate</a:t>
                       </a:r>
-                      <a:endParaRPr lang="en-US" sz="1000" dirty="0">
+                      <a:endParaRPr lang="en-US" sz="1200" dirty="0">
                         <a:latin typeface="Arial" charset="0"/>
                         <a:ea typeface="Arial" charset="0"/>
                         <a:cs typeface="Arial" charset="0"/>
                       </a:endParaRPr>
                     </a:p>
                     <a:p>
-                      <a:pPr algn="ctr" indent="0" marL="0">
+                      <a:pPr algn="l" indent="0" marL="0">
                         <a:buNone/>
                       </a:pPr>
                       <a:r>
-                        <a:rPr lang="en-US" sz="1000" dirty="0">
+                        <a:rPr lang="en-US" sz="1200" dirty="0">
                           <a:solidFill>
                             <a:srgbClr val="000000"/>
                           </a:solidFill>
@@ -2736,14 +2724,14 @@
                         </a:rPr>
                         <a:t>Runbook</a:t>
                       </a:r>
-                      <a:endParaRPr lang="en-US" sz="1000" dirty="0">
+                      <a:endParaRPr lang="en-US" sz="1200" dirty="0">
                         <a:latin typeface="Arial" charset="0"/>
                         <a:ea typeface="Arial" charset="0"/>
                         <a:cs typeface="Arial" charset="0"/>
                       </a:endParaRPr>
                     </a:p>
                   </a:txBody>
-                  <a:tcPr marL="101600" marR="101600" marT="38100" marB="38100" anchor="ctr">
+                  <a:tcPr marL="76200" marR="76200" marT="31750" marB="31750" anchor="ctr">
                     <a:lnL w="6350" cap="flat" cmpd="sng" algn="ctr">
                       <a:solidFill>
                         <a:srgbClr val="C6C9CD"/>
@@ -2798,7 +2786,7 @@
                         <a:buNone/>
                       </a:pPr>
                       <a:r>
-                        <a:rPr lang="en-US" sz="1000" b="1" dirty="0">
+                        <a:rPr lang="en-US" sz="1200" b="1" dirty="0">
                           <a:solidFill>
                             <a:srgbClr val="000000"/>
                           </a:solidFill>
@@ -2806,20 +2794,14 @@
                           <a:ea typeface="Arial" pitchFamily="34" charset="-122"/>
                           <a:cs typeface="Arial" pitchFamily="34" charset="-120"/>
                         </a:rPr>
-                        <a:t>Quality &amp; controls</a:t>
+                        <a:t>Quality &amp; controls
+</a:t>
                       </a:r>
-                      <a:endParaRPr lang="en-US" sz="1000" dirty="0">
-                        <a:latin typeface="Arial" charset="0"/>
-                        <a:ea typeface="Arial" charset="0"/>
-                        <a:cs typeface="Arial" charset="0"/>
-                      </a:endParaRPr>
-                    </a:p>
-                    <a:p>
                       <a:pPr algn="l" indent="0" marL="0">
                         <a:buNone/>
                       </a:pPr>
                       <a:r>
-                        <a:rPr lang="en-US" sz="1000" b="1" dirty="0">
+                        <a:rPr lang="en-US" sz="1200" dirty="0">
                           <a:solidFill>
                             <a:srgbClr val="000000"/>
                           </a:solidFill>
@@ -2829,14 +2811,14 @@
                         </a:rPr>
                         <a:t>Expert reviewer</a:t>
                       </a:r>
-                      <a:endParaRPr lang="en-US" sz="1000" dirty="0">
+                      <a:endParaRPr lang="en-US" sz="1200" dirty="0">
                         <a:latin typeface="Arial" charset="0"/>
                         <a:ea typeface="Arial" charset="0"/>
                         <a:cs typeface="Arial" charset="0"/>
                       </a:endParaRPr>
                     </a:p>
                   </a:txBody>
-                  <a:tcPr marL="101600" marR="101600" marT="38100" marB="38100" anchor="ctr">
+                  <a:tcPr marL="76200" marR="76200" marT="31750" marB="31750" anchor="ctr">
                     <a:lnL w="6350" cap="flat" cmpd="sng" algn="ctr">
                       <a:solidFill>
                         <a:srgbClr val="C6C9CD"/>
@@ -2885,11 +2867,11 @@
                     </a:bodyPr>
                     <a:lstStyle/>
                     <a:p>
-                      <a:pPr algn="ctr" indent="0" marL="0">
+                      <a:pPr algn="l" indent="0" marL="0">
                         <a:buNone/>
                       </a:pPr>
                       <a:r>
-                        <a:rPr lang="en-US" sz="1000" dirty="0">
+                        <a:rPr lang="en-US" sz="1200" dirty="0">
                           <a:solidFill>
                             <a:srgbClr val="000000"/>
                           </a:solidFill>
@@ -2899,18 +2881,18 @@
                         </a:rPr>
                         <a:t>Risk boundaries</a:t>
                       </a:r>
-                      <a:endParaRPr lang="en-US" sz="1000" dirty="0">
+                      <a:endParaRPr lang="en-US" sz="1200" dirty="0">
                         <a:latin typeface="Arial" charset="0"/>
                         <a:ea typeface="Arial" charset="0"/>
                         <a:cs typeface="Arial" charset="0"/>
                       </a:endParaRPr>
                     </a:p>
                     <a:p>
-                      <a:pPr algn="ctr" indent="0" marL="0">
+                      <a:pPr algn="l" indent="0" marL="0">
                         <a:buNone/>
                       </a:pPr>
                       <a:r>
-                        <a:rPr lang="en-US" sz="1000" dirty="0">
+                        <a:rPr lang="en-US" sz="1200" dirty="0">
                           <a:solidFill>
                             <a:srgbClr val="000000"/>
                           </a:solidFill>
@@ -2920,14 +2902,14 @@
                         </a:rPr>
                         <a:t>Review criteria</a:t>
                       </a:r>
-                      <a:endParaRPr lang="en-US" sz="1000" dirty="0">
+                      <a:endParaRPr lang="en-US" sz="1200" dirty="0">
                         <a:latin typeface="Arial" charset="0"/>
                         <a:ea typeface="Arial" charset="0"/>
                         <a:cs typeface="Arial" charset="0"/>
                       </a:endParaRPr>
                     </a:p>
                   </a:txBody>
-                  <a:tcPr marL="101600" marR="101600" marT="38100" marB="38100" anchor="ctr">
+                  <a:tcPr marL="76200" marR="76200" marT="31750" marB="31750" anchor="ctr">
                     <a:lnL w="6350" cap="flat" cmpd="sng" algn="ctr">
                       <a:solidFill>
                         <a:srgbClr val="C6C9CD"/>
@@ -2976,11 +2958,11 @@
                     </a:bodyPr>
                     <a:lstStyle/>
                     <a:p>
-                      <a:pPr algn="ctr" indent="0" marL="0">
+                      <a:pPr algn="l" indent="0" marL="0">
                         <a:buNone/>
                       </a:pPr>
                       <a:r>
-                        <a:rPr lang="en-US" sz="1000" dirty="0">
+                        <a:rPr lang="en-US" sz="1200" dirty="0">
                           <a:solidFill>
                             <a:srgbClr val="000000"/>
                           </a:solidFill>
@@ -2990,18 +2972,18 @@
                         </a:rPr>
                         <a:t>Test pack</a:t>
                       </a:r>
-                      <a:endParaRPr lang="en-US" sz="1000" dirty="0">
+                      <a:endParaRPr lang="en-US" sz="1200" dirty="0">
                         <a:latin typeface="Arial" charset="0"/>
                         <a:ea typeface="Arial" charset="0"/>
                         <a:cs typeface="Arial" charset="0"/>
                       </a:endParaRPr>
                     </a:p>
                     <a:p>
-                      <a:pPr algn="ctr" indent="0" marL="0">
+                      <a:pPr algn="l" indent="0" marL="0">
                         <a:buNone/>
                       </a:pPr>
                       <a:r>
-                        <a:rPr lang="en-US" sz="1000" dirty="0">
+                        <a:rPr lang="en-US" sz="1200" dirty="0">
                           <a:solidFill>
                             <a:srgbClr val="000000"/>
                           </a:solidFill>
@@ -3011,14 +2993,14 @@
                         </a:rPr>
                         <a:t>Rejection reasons</a:t>
                       </a:r>
-                      <a:endParaRPr lang="en-US" sz="1000" dirty="0">
+                      <a:endParaRPr lang="en-US" sz="1200" dirty="0">
                         <a:latin typeface="Arial" charset="0"/>
                         <a:ea typeface="Arial" charset="0"/>
                         <a:cs typeface="Arial" charset="0"/>
                       </a:endParaRPr>
                     </a:p>
                   </a:txBody>
-                  <a:tcPr marL="101600" marR="101600" marT="38100" marB="38100" anchor="ctr">
+                  <a:tcPr marL="76200" marR="76200" marT="31750" marB="31750" anchor="ctr">
                     <a:lnL w="6350" cap="flat" cmpd="sng" algn="ctr">
                       <a:solidFill>
                         <a:srgbClr val="C6C9CD"/>
@@ -3067,11 +3049,11 @@
                     </a:bodyPr>
                     <a:lstStyle/>
                     <a:p>
-                      <a:pPr algn="ctr" indent="0" marL="0">
+                      <a:pPr algn="l" indent="0" marL="0">
                         <a:buNone/>
                       </a:pPr>
                       <a:r>
-                        <a:rPr lang="en-US" sz="1000" dirty="0">
+                        <a:rPr lang="en-US" sz="1200" dirty="0">
                           <a:solidFill>
                             <a:srgbClr val="000000"/>
                           </a:solidFill>
@@ -3081,18 +3063,18 @@
                         </a:rPr>
                         <a:t>10 reviewed tasks</a:t>
                       </a:r>
-                      <a:endParaRPr lang="en-US" sz="1000" dirty="0">
+                      <a:endParaRPr lang="en-US" sz="1200" dirty="0">
                         <a:latin typeface="Arial" charset="0"/>
                         <a:ea typeface="Arial" charset="0"/>
                         <a:cs typeface="Arial" charset="0"/>
                       </a:endParaRPr>
                     </a:p>
                     <a:p>
-                      <a:pPr algn="ctr" indent="0" marL="0">
+                      <a:pPr algn="l" indent="0" marL="0">
                         <a:buNone/>
                       </a:pPr>
                       <a:r>
-                        <a:rPr lang="en-US" sz="1000" dirty="0">
+                        <a:rPr lang="en-US" sz="1200" dirty="0">
                           <a:solidFill>
                             <a:srgbClr val="000000"/>
                           </a:solidFill>
@@ -3102,14 +3084,14 @@
                         </a:rPr>
                         <a:t>Error triage</a:t>
                       </a:r>
-                      <a:endParaRPr lang="en-US" sz="1000" dirty="0">
+                      <a:endParaRPr lang="en-US" sz="1200" dirty="0">
                         <a:latin typeface="Arial" charset="0"/>
                         <a:ea typeface="Arial" charset="0"/>
                         <a:cs typeface="Arial" charset="0"/>
                       </a:endParaRPr>
                     </a:p>
                   </a:txBody>
-                  <a:tcPr marL="101600" marR="101600" marT="38100" marB="38100" anchor="ctr">
+                  <a:tcPr marL="76200" marR="76200" marT="31750" marB="31750" anchor="ctr">
                     <a:lnL w="6350" cap="flat" cmpd="sng" algn="ctr">
                       <a:solidFill>
                         <a:srgbClr val="C6C9CD"/>
@@ -3158,11 +3140,11 @@
                     </a:bodyPr>
                     <a:lstStyle/>
                     <a:p>
-                      <a:pPr algn="ctr" indent="0" marL="0">
+                      <a:pPr algn="l" indent="0" marL="0">
                         <a:buNone/>
                       </a:pPr>
                       <a:r>
-                        <a:rPr lang="en-US" sz="1000" dirty="0">
+                        <a:rPr lang="en-US" sz="1200" dirty="0">
                           <a:solidFill>
                             <a:srgbClr val="000000"/>
                           </a:solidFill>
@@ -3172,18 +3154,18 @@
                         </a:rPr>
                         <a:t>20 completed tasks</a:t>
                       </a:r>
-                      <a:endParaRPr lang="en-US" sz="1000" dirty="0">
+                      <a:endParaRPr lang="en-US" sz="1200" dirty="0">
                         <a:latin typeface="Arial" charset="0"/>
                         <a:ea typeface="Arial" charset="0"/>
                         <a:cs typeface="Arial" charset="0"/>
                       </a:endParaRPr>
                     </a:p>
                     <a:p>
-                      <a:pPr algn="ctr" indent="0" marL="0">
+                      <a:pPr algn="l" indent="0" marL="0">
                         <a:buNone/>
                       </a:pPr>
                       <a:r>
-                        <a:rPr lang="en-US" sz="1000" dirty="0">
+                        <a:rPr lang="en-US" sz="1200" dirty="0">
                           <a:solidFill>
                             <a:srgbClr val="000000"/>
                           </a:solidFill>
@@ -3193,14 +3175,14 @@
                         </a:rPr>
                         <a:t>Gate evidence</a:t>
                       </a:r>
-                      <a:endParaRPr lang="en-US" sz="1000" dirty="0">
+                      <a:endParaRPr lang="en-US" sz="1200" dirty="0">
                         <a:latin typeface="Arial" charset="0"/>
                         <a:ea typeface="Arial" charset="0"/>
                         <a:cs typeface="Arial" charset="0"/>
                       </a:endParaRPr>
                     </a:p>
                   </a:txBody>
-                  <a:tcPr marL="101600" marR="101600" marT="38100" marB="38100" anchor="ctr">
+                  <a:tcPr marL="76200" marR="76200" marT="31750" marB="31750" anchor="ctr">
                     <a:lnL w="6350" cap="flat" cmpd="sng" algn="ctr">
                       <a:solidFill>
                         <a:srgbClr val="C6C9CD"/>
@@ -3255,7 +3237,7 @@
                         <a:buNone/>
                       </a:pPr>
                       <a:r>
-                        <a:rPr lang="en-US" sz="1000" b="1" dirty="0">
+                        <a:rPr lang="en-US" sz="1200" b="1" dirty="0">
                           <a:solidFill>
                             <a:srgbClr val="000000"/>
                           </a:solidFill>
@@ -3263,20 +3245,14 @@
                           <a:ea typeface="Arial" pitchFamily="34" charset="-122"/>
                           <a:cs typeface="Arial" pitchFamily="34" charset="-120"/>
                         </a:rPr>
-                        <a:t>Adoption &amp; value</a:t>
+                        <a:t>Adoption &amp; value
+</a:t>
                       </a:r>
-                      <a:endParaRPr lang="en-US" sz="1000" dirty="0">
-                        <a:latin typeface="Arial" charset="0"/>
-                        <a:ea typeface="Arial" charset="0"/>
-                        <a:cs typeface="Arial" charset="0"/>
-                      </a:endParaRPr>
-                    </a:p>
-                    <a:p>
                       <a:pPr algn="l" indent="0" marL="0">
                         <a:buNone/>
                       </a:pPr>
                       <a:r>
-                        <a:rPr lang="en-US" sz="1000" b="1" dirty="0">
+                        <a:rPr lang="en-US" sz="1200" dirty="0">
                           <a:solidFill>
                             <a:srgbClr val="000000"/>
                           </a:solidFill>
@@ -3286,14 +3262,14 @@
                         </a:rPr>
                         <a:t>Practice lead</a:t>
                       </a:r>
-                      <a:endParaRPr lang="en-US" sz="1000" dirty="0">
+                      <a:endParaRPr lang="en-US" sz="1200" dirty="0">
                         <a:latin typeface="Arial" charset="0"/>
                         <a:ea typeface="Arial" charset="0"/>
                         <a:cs typeface="Arial" charset="0"/>
                       </a:endParaRPr>
                     </a:p>
                   </a:txBody>
-                  <a:tcPr marL="101600" marR="101600" marT="38100" marB="38100" anchor="ctr">
+                  <a:tcPr marL="76200" marR="76200" marT="31750" marB="31750" anchor="ctr">
                     <a:lnL w="6350" cap="flat" cmpd="sng" algn="ctr">
                       <a:solidFill>
                         <a:srgbClr val="C6C9CD"/>
@@ -3342,11 +3318,11 @@
                     </a:bodyPr>
                     <a:lstStyle/>
                     <a:p>
-                      <a:pPr algn="ctr" indent="0" marL="0">
+                      <a:pPr algn="l" indent="0" marL="0">
                         <a:buNone/>
                       </a:pPr>
                       <a:r>
-                        <a:rPr lang="en-US" sz="1000" dirty="0">
+                        <a:rPr lang="en-US" sz="1200" dirty="0">
                           <a:solidFill>
                             <a:srgbClr val="000000"/>
                           </a:solidFill>
@@ -3356,18 +3332,18 @@
                         </a:rPr>
                         <a:t>Sponsor &amp; users</a:t>
                       </a:r>
-                      <a:endParaRPr lang="en-US" sz="1000" dirty="0">
+                      <a:endParaRPr lang="en-US" sz="1200" dirty="0">
                         <a:latin typeface="Arial" charset="0"/>
                         <a:ea typeface="Arial" charset="0"/>
                         <a:cs typeface="Arial" charset="0"/>
                       </a:endParaRPr>
                     </a:p>
                     <a:p>
-                      <a:pPr algn="ctr" indent="0" marL="0">
+                      <a:pPr algn="l" indent="0" marL="0">
                         <a:buNone/>
                       </a:pPr>
                       <a:r>
-                        <a:rPr lang="en-US" sz="1000" dirty="0">
+                        <a:rPr lang="en-US" sz="1200" dirty="0">
                           <a:solidFill>
                             <a:srgbClr val="000000"/>
                           </a:solidFill>
@@ -3377,14 +3353,14 @@
                         </a:rPr>
                         <a:t>Agree tracking</a:t>
                       </a:r>
-                      <a:endParaRPr lang="en-US" sz="1000" dirty="0">
+                      <a:endParaRPr lang="en-US" sz="1200" dirty="0">
                         <a:latin typeface="Arial" charset="0"/>
                         <a:ea typeface="Arial" charset="0"/>
                         <a:cs typeface="Arial" charset="0"/>
                       </a:endParaRPr>
                     </a:p>
                   </a:txBody>
-                  <a:tcPr marL="101600" marR="101600" marT="38100" marB="38100" anchor="ctr">
+                  <a:tcPr marL="76200" marR="76200" marT="31750" marB="31750" anchor="ctr">
                     <a:lnL w="6350" cap="flat" cmpd="sng" algn="ctr">
                       <a:solidFill>
                         <a:srgbClr val="C6C9CD"/>
@@ -3433,11 +3409,11 @@
                     </a:bodyPr>
                     <a:lstStyle/>
                     <a:p>
-                      <a:pPr algn="ctr" indent="0" marL="0">
+                      <a:pPr algn="l" indent="0" marL="0">
                         <a:buNone/>
                       </a:pPr>
                       <a:r>
-                        <a:rPr lang="en-US" sz="1000" dirty="0">
+                        <a:rPr lang="en-US" sz="1200" dirty="0">
                           <a:solidFill>
                             <a:srgbClr val="000000"/>
                           </a:solidFill>
@@ -3447,18 +3423,18 @@
                         </a:rPr>
                         <a:t>Training &amp; support</a:t>
                       </a:r>
-                      <a:endParaRPr lang="en-US" sz="1000" dirty="0">
+                      <a:endParaRPr lang="en-US" sz="1200" dirty="0">
                         <a:latin typeface="Arial" charset="0"/>
                         <a:ea typeface="Arial" charset="0"/>
                         <a:cs typeface="Arial" charset="0"/>
                       </a:endParaRPr>
                     </a:p>
                     <a:p>
-                      <a:pPr algn="ctr" indent="0" marL="0">
+                      <a:pPr algn="l" indent="0" marL="0">
                         <a:buNone/>
                       </a:pPr>
                       <a:r>
-                        <a:rPr lang="en-US" sz="1000" dirty="0">
+                        <a:rPr lang="en-US" sz="1200" dirty="0">
                           <a:solidFill>
                             <a:srgbClr val="000000"/>
                           </a:solidFill>
@@ -3468,14 +3444,14 @@
                         </a:rPr>
                         <a:t>Measurement plan</a:t>
                       </a:r>
-                      <a:endParaRPr lang="en-US" sz="1000" dirty="0">
+                      <a:endParaRPr lang="en-US" sz="1200" dirty="0">
                         <a:latin typeface="Arial" charset="0"/>
                         <a:ea typeface="Arial" charset="0"/>
                         <a:cs typeface="Arial" charset="0"/>
                       </a:endParaRPr>
                     </a:p>
                   </a:txBody>
-                  <a:tcPr marL="101600" marR="101600" marT="38100" marB="38100" anchor="ctr">
+                  <a:tcPr marL="76200" marR="76200" marT="31750" marB="31750" anchor="ctr">
                     <a:lnL w="6350" cap="flat" cmpd="sng" algn="ctr">
                       <a:solidFill>
                         <a:srgbClr val="C6C9CD"/>
@@ -3524,11 +3500,11 @@
                     </a:bodyPr>
                     <a:lstStyle/>
                     <a:p>
-                      <a:pPr algn="ctr" indent="0" marL="0">
+                      <a:pPr algn="l" indent="0" marL="0">
                         <a:buNone/>
                       </a:pPr>
                       <a:r>
-                        <a:rPr lang="en-US" sz="1000" dirty="0">
+                        <a:rPr lang="en-US" sz="1200" dirty="0">
                           <a:solidFill>
                             <a:srgbClr val="000000"/>
                           </a:solidFill>
@@ -3538,18 +3514,18 @@
                         </a:rPr>
                         <a:t>Weekly usage</a:t>
                       </a:r>
-                      <a:endParaRPr lang="en-US" sz="1000" dirty="0">
+                      <a:endParaRPr lang="en-US" sz="1200" dirty="0">
                         <a:latin typeface="Arial" charset="0"/>
                         <a:ea typeface="Arial" charset="0"/>
                         <a:cs typeface="Arial" charset="0"/>
                       </a:endParaRPr>
                     </a:p>
                     <a:p>
-                      <a:pPr algn="ctr" indent="0" marL="0">
+                      <a:pPr algn="l" indent="0" marL="0">
                         <a:buNone/>
                       </a:pPr>
                       <a:r>
-                        <a:rPr lang="en-US" sz="1000" dirty="0">
+                        <a:rPr lang="en-US" sz="1200" dirty="0">
                           <a:solidFill>
                             <a:srgbClr val="000000"/>
                           </a:solidFill>
@@ -3559,14 +3535,14 @@
                         </a:rPr>
                         <a:t>Feedback sessions</a:t>
                       </a:r>
-                      <a:endParaRPr lang="en-US" sz="1000" dirty="0">
+                      <a:endParaRPr lang="en-US" sz="1200" dirty="0">
                         <a:latin typeface="Arial" charset="0"/>
                         <a:ea typeface="Arial" charset="0"/>
                         <a:cs typeface="Arial" charset="0"/>
                       </a:endParaRPr>
                     </a:p>
                   </a:txBody>
-                  <a:tcPr marL="101600" marR="101600" marT="38100" marB="38100" anchor="ctr">
+                  <a:tcPr marL="76200" marR="76200" marT="31750" marB="31750" anchor="ctr">
                     <a:lnL w="6350" cap="flat" cmpd="sng" algn="ctr">
                       <a:solidFill>
                         <a:srgbClr val="C6C9CD"/>
@@ -3615,11 +3591,11 @@
                     </a:bodyPr>
                     <a:lstStyle/>
                     <a:p>
-                      <a:pPr algn="ctr" indent="0" marL="0">
+                      <a:pPr algn="l" indent="0" marL="0">
                         <a:buNone/>
                       </a:pPr>
                       <a:r>
-                        <a:rPr lang="en-US" sz="1000" dirty="0">
+                        <a:rPr lang="en-US" sz="1200" dirty="0">
                           <a:solidFill>
                             <a:srgbClr val="000000"/>
                           </a:solidFill>
@@ -3629,18 +3605,18 @@
                         </a:rPr>
                         <a:t>Benefit case</a:t>
                       </a:r>
-                      <a:endParaRPr lang="en-US" sz="1000" dirty="0">
+                      <a:endParaRPr lang="en-US" sz="1200" dirty="0">
                         <a:latin typeface="Arial" charset="0"/>
                         <a:ea typeface="Arial" charset="0"/>
                         <a:cs typeface="Arial" charset="0"/>
                       </a:endParaRPr>
                     </a:p>
                     <a:p>
-                      <a:pPr algn="ctr" indent="0" marL="0">
+                      <a:pPr algn="l" indent="0" marL="0">
                         <a:buNone/>
                       </a:pPr>
                       <a:r>
-                        <a:rPr lang="en-US" sz="1000" dirty="0">
+                        <a:rPr lang="en-US" sz="1200" dirty="0">
                           <a:solidFill>
                             <a:srgbClr val="000000"/>
                           </a:solidFill>
@@ -3650,14 +3626,14 @@
                         </a:rPr>
                         <a:t>Scale recommendation</a:t>
                       </a:r>
-                      <a:endParaRPr lang="en-US" sz="1000" dirty="0">
+                      <a:endParaRPr lang="en-US" sz="1200" dirty="0">
                         <a:latin typeface="Arial" charset="0"/>
                         <a:ea typeface="Arial" charset="0"/>
                         <a:cs typeface="Arial" charset="0"/>
                       </a:endParaRPr>
                     </a:p>
                   </a:txBody>
-                  <a:tcPr marL="101600" marR="101600" marT="38100" marB="38100" anchor="ctr">
+                  <a:tcPr marL="76200" marR="76200" marT="31750" marB="31750" anchor="ctr">
                     <a:lnL w="6350" cap="flat" cmpd="sng" algn="ctr">
                       <a:solidFill>
                         <a:srgbClr val="C6C9CD"/>
@@ -3903,7 +3879,7 @@
               <a:defRPr spc="0"/>
             </a:pPr>
             <a:r>
-              <a:rPr lang="en-US" sz="1250" b="1" dirty="0" spc="0">
+              <a:rPr lang="en-US" sz="1400" b="1" dirty="0" spc="0">
                 <a:solidFill>
                   <a:srgbClr val="000000"/>
                 </a:solidFill>
@@ -3913,7 +3889,7 @@
               </a:rPr>
               <a:t>EVIDENCE GATES</a:t>
             </a:r>
-            <a:endParaRPr lang="en-US" sz="1250" dirty="0" spc="0"/>
+            <a:endParaRPr lang="en-US" sz="1400" dirty="0" spc="0"/>
           </a:p>
         </p:txBody>
       </p:sp>
@@ -3948,7 +3924,7 @@
               <a:defRPr spc="0"/>
             </a:pPr>
             <a:r>
-              <a:rPr lang="en-US" sz="1150" b="1" dirty="0" spc="0">
+              <a:rPr lang="en-US" sz="1300" b="1" dirty="0" spc="0">
                 <a:solidFill>
                   <a:srgbClr val="FD5108"/>
                 </a:solidFill>
@@ -3958,7 +3934,7 @@
               </a:rPr>
               <a:t>G1 · Week 2</a:t>
             </a:r>
-            <a:endParaRPr lang="en-US" sz="1150" dirty="0" spc="0"/>
+            <a:endParaRPr lang="en-US" sz="1300" dirty="0" spc="0"/>
           </a:p>
         </p:txBody>
       </p:sp>
@@ -3970,8 +3946,8 @@
         </p:nvSpPr>
         <p:spPr>
           <a:xfrm>
-            <a:off x="444500" y="5251450"/>
-            <a:ext cx="1905000" cy="222250"/>
+            <a:off x="412750" y="5251450"/>
+            <a:ext cx="1968500" cy="342900"/>
           </a:xfrm>
           <a:prstGeom prst="rect">
             <a:avLst/>
@@ -3993,7 +3969,7 @@
               <a:defRPr spc="0"/>
             </a:pPr>
             <a:r>
-              <a:rPr lang="en-US" sz="950" dirty="0" spc="0">
+              <a:rPr lang="en-US" sz="1150" dirty="0" spc="0">
                 <a:solidFill>
                   <a:srgbClr val="000000"/>
                 </a:solidFill>
@@ -4003,7 +3979,7 @@
               </a:rPr>
               <a:t>Corpus + access signed</a:t>
             </a:r>
-            <a:endParaRPr lang="en-US" sz="950" dirty="0" spc="0"/>
+            <a:endParaRPr lang="en-US" sz="1150" dirty="0" spc="0"/>
           </a:p>
         </p:txBody>
       </p:sp>
@@ -4038,7 +4014,7 @@
               <a:defRPr spc="0"/>
             </a:pPr>
             <a:r>
-              <a:rPr lang="en-US" sz="1150" b="1" dirty="0" spc="0">
+              <a:rPr lang="en-US" sz="1300" b="1" dirty="0" spc="0">
                 <a:solidFill>
                   <a:srgbClr val="FD5108"/>
                 </a:solidFill>
@@ -4048,7 +4024,7 @@
               </a:rPr>
               <a:t>G2 · Week 4</a:t>
             </a:r>
-            <a:endParaRPr lang="en-US" sz="1150" dirty="0" spc="0"/>
+            <a:endParaRPr lang="en-US" sz="1300" dirty="0" spc="0"/>
           </a:p>
         </p:txBody>
       </p:sp>
@@ -4060,8 +4036,8 @@
         </p:nvSpPr>
         <p:spPr>
           <a:xfrm>
-            <a:off x="2413000" y="5251450"/>
-            <a:ext cx="1905000" cy="222250"/>
+            <a:off x="2381250" y="5251450"/>
+            <a:ext cx="1968500" cy="342900"/>
           </a:xfrm>
           <a:prstGeom prst="rect">
             <a:avLst/>
@@ -4083,7 +4059,7 @@
               <a:defRPr spc="0"/>
             </a:pPr>
             <a:r>
-              <a:rPr lang="en-US" sz="950" dirty="0" spc="0">
+              <a:rPr lang="en-US" sz="1150" dirty="0" spc="0">
                 <a:solidFill>
                   <a:srgbClr val="000000"/>
                 </a:solidFill>
@@ -4093,7 +4069,7 @@
               </a:rPr>
               <a:t>Test pack approved</a:t>
             </a:r>
-            <a:endParaRPr lang="en-US" sz="950" dirty="0" spc="0"/>
+            <a:endParaRPr lang="en-US" sz="1150" dirty="0" spc="0"/>
           </a:p>
         </p:txBody>
       </p:sp>
@@ -4128,7 +4104,7 @@
               <a:defRPr spc="0"/>
             </a:pPr>
             <a:r>
-              <a:rPr lang="en-US" sz="1150" b="1" dirty="0" spc="0">
+              <a:rPr lang="en-US" sz="1300" b="1" dirty="0" spc="0">
                 <a:solidFill>
                   <a:srgbClr val="FD5108"/>
                 </a:solidFill>
@@ -4138,7 +4114,7 @@
               </a:rPr>
               <a:t>G3 · Week 8</a:t>
             </a:r>
-            <a:endParaRPr lang="en-US" sz="1150" dirty="0" spc="0"/>
+            <a:endParaRPr lang="en-US" sz="1300" dirty="0" spc="0"/>
           </a:p>
         </p:txBody>
       </p:sp>
@@ -4150,8 +4126,8 @@
         </p:nvSpPr>
         <p:spPr>
           <a:xfrm>
-            <a:off x="4381500" y="5251450"/>
-            <a:ext cx="1905000" cy="222250"/>
+            <a:off x="4349750" y="5251450"/>
+            <a:ext cx="1968500" cy="342900"/>
           </a:xfrm>
           <a:prstGeom prst="rect">
             <a:avLst/>
@@ -4173,7 +4149,7 @@
               <a:defRPr spc="0"/>
             </a:pPr>
             <a:r>
-              <a:rPr lang="en-US" sz="950" dirty="0" spc="0">
+              <a:rPr lang="en-US" sz="1150" dirty="0" spc="0">
                 <a:solidFill>
                   <a:srgbClr val="000000"/>
                 </a:solidFill>
@@ -4183,7 +4159,7 @@
               </a:rPr>
               <a:t>10 tasks reviewed</a:t>
             </a:r>
-            <a:endParaRPr lang="en-US" sz="950" dirty="0" spc="0"/>
+            <a:endParaRPr lang="en-US" sz="1150" dirty="0" spc="0"/>
           </a:p>
         </p:txBody>
       </p:sp>
@@ -4218,7 +4194,7 @@
               <a:defRPr spc="0"/>
             </a:pPr>
             <a:r>
-              <a:rPr lang="en-US" sz="1150" b="1" dirty="0" spc="0">
+              <a:rPr lang="en-US" sz="1300" b="1" dirty="0" spc="0">
                 <a:solidFill>
                   <a:srgbClr val="FD5108"/>
                 </a:solidFill>
@@ -4228,7 +4204,7 @@
               </a:rPr>
               <a:t>G4 · Week 12</a:t>
             </a:r>
-            <a:endParaRPr lang="en-US" sz="1150" dirty="0" spc="0"/>
+            <a:endParaRPr lang="en-US" sz="1300" dirty="0" spc="0"/>
           </a:p>
         </p:txBody>
       </p:sp>
@@ -4240,8 +4216,8 @@
         </p:nvSpPr>
         <p:spPr>
           <a:xfrm>
-            <a:off x="6350000" y="5251450"/>
-            <a:ext cx="1905000" cy="222250"/>
+            <a:off x="6318250" y="5251450"/>
+            <a:ext cx="1968500" cy="342900"/>
           </a:xfrm>
           <a:prstGeom prst="rect">
             <a:avLst/>
@@ -4263,7 +4239,7 @@
               <a:defRPr spc="0"/>
             </a:pPr>
             <a:r>
-              <a:rPr lang="en-US" sz="950" dirty="0" spc="0">
+              <a:rPr lang="en-US" sz="1150" dirty="0" spc="0">
                 <a:solidFill>
                   <a:srgbClr val="000000"/>
                 </a:solidFill>
@@ -4271,9 +4247,30 @@
                 <a:ea typeface="Arial" pitchFamily="34" charset="-122"/>
                 <a:cs typeface="Arial" pitchFamily="34" charset="-120"/>
               </a:rPr>
-              <a:t>Practice lead + CFO decide</a:t>
+              <a:t>Practice lead + CFO</a:t>
             </a:r>
-            <a:endParaRPr lang="en-US" sz="950" dirty="0" spc="0"/>
+            <a:endParaRPr lang="en-US" sz="1150" dirty="0" spc="0"/>
+          </a:p>
+          <a:p>
+            <a:pPr algn="ctr" indent="0" marL="0">
+              <a:lnSpc>
+                <a:spcPct val="100000"/>
+              </a:lnSpc>
+              <a:buNone/>
+              <a:defRPr spc="0"/>
+            </a:pPr>
+            <a:r>
+              <a:rPr lang="en-US" sz="1150" dirty="0" spc="0">
+                <a:solidFill>
+                  <a:srgbClr val="000000"/>
+                </a:solidFill>
+                <a:latin typeface="Arial" pitchFamily="34" charset="0"/>
+                <a:ea typeface="Arial" pitchFamily="34" charset="-122"/>
+                <a:cs typeface="Arial" pitchFamily="34" charset="-120"/>
+              </a:rPr>
+              <a:t>decide</a:t>
+            </a:r>
+            <a:endParaRPr lang="en-US" sz="1150" dirty="0" spc="0"/>
           </a:p>
         </p:txBody>
       </p:sp>
@@ -4308,7 +4305,7 @@
               <a:defRPr spc="0"/>
             </a:pPr>
             <a:r>
-              <a:rPr lang="en-US" sz="1250" b="1" dirty="0" spc="0">
+              <a:rPr lang="en-US" sz="1400" b="1" dirty="0" spc="0">
                 <a:solidFill>
                   <a:srgbClr val="000000"/>
                 </a:solidFill>
@@ -4318,7 +4315,7 @@
               </a:rPr>
               <a:t>DEPENDENCIES</a:t>
             </a:r>
-            <a:endParaRPr lang="en-US" sz="1250" dirty="0" spc="0"/>
+            <a:endParaRPr lang="en-US" sz="1400" dirty="0" spc="0"/>
           </a:p>
         </p:txBody>
       </p:sp>
@@ -4353,7 +4350,7 @@
               <a:defRPr spc="0"/>
             </a:pPr>
             <a:r>
-              <a:rPr lang="en-US" sz="1000" dirty="0" spc="0">
+              <a:rPr lang="en-US" sz="1150" dirty="0" spc="0">
                 <a:solidFill>
                   <a:srgbClr val="000000"/>
                 </a:solidFill>
@@ -4363,7 +4360,7 @@
               </a:rPr>
               <a:t>Permissions before retrieval tests</a:t>
             </a:r>
-            <a:endParaRPr lang="en-US" sz="1000" dirty="0" spc="0"/>
+            <a:endParaRPr lang="en-US" sz="1150" dirty="0" spc="0"/>
           </a:p>
         </p:txBody>
       </p:sp>
@@ -4398,7 +4395,7 @@
               <a:defRPr spc="0"/>
             </a:pPr>
             <a:r>
-              <a:rPr lang="en-US" sz="1000" dirty="0" spc="0">
+              <a:rPr lang="en-US" sz="1150" dirty="0" spc="0">
                 <a:solidFill>
                   <a:srgbClr val="000000"/>
                 </a:solidFill>
@@ -4408,7 +4405,7 @@
               </a:rPr>
               <a:t>Approved test pack before pilot</a:t>
             </a:r>
-            <a:endParaRPr lang="en-US" sz="1000" dirty="0" spc="0"/>
+            <a:endParaRPr lang="en-US" sz="1150" dirty="0" spc="0"/>
           </a:p>
         </p:txBody>
       </p:sp>
@@ -4443,7 +4440,7 @@
               <a:defRPr spc="0"/>
             </a:pPr>
             <a:r>
-              <a:rPr lang="en-US" sz="1000" dirty="0" spc="0">
+              <a:rPr lang="en-US" sz="1150" dirty="0" spc="0">
                 <a:solidFill>
                   <a:srgbClr val="000000"/>
                 </a:solidFill>
@@ -4453,7 +4450,7 @@
               </a:rPr>
               <a:t>Quality evidence before benefit case</a:t>
             </a:r>
-            <a:endParaRPr lang="en-US" sz="1000" dirty="0" spc="0"/>
+            <a:endParaRPr lang="en-US" sz="1150" dirty="0" spc="0"/>
           </a:p>
         </p:txBody>
       </p:sp>
